--- a/submission/NEE/figures_polished/Fig1.pptx
+++ b/submission/NEE/figures_polished/Fig1.pptx
@@ -908,8 +908,8 @@
         </p:nvSpPr>
         <p:spPr>
           <a:xfrm>
-            <a:off x="2352600" y="338400"/>
-            <a:ext cx="712800" cy="0"/>
+            <a:off x="2406600" y="338400"/>
+            <a:ext cx="711720" cy="0"/>
           </a:xfrm>
           <a:prstGeom prst="line">
             <a:avLst/>
@@ -951,8 +951,8 @@
         </p:nvSpPr>
         <p:spPr>
           <a:xfrm>
-            <a:off x="2353680" y="440640"/>
-            <a:ext cx="715680" cy="0"/>
+            <a:off x="2408400" y="440640"/>
+            <a:ext cx="714600" cy="0"/>
           </a:xfrm>
           <a:prstGeom prst="line">
             <a:avLst/>
@@ -994,8 +994,8 @@
         </p:nvSpPr>
         <p:spPr>
           <a:xfrm>
-            <a:off x="2363760" y="542880"/>
-            <a:ext cx="718920" cy="0"/>
+            <a:off x="2418840" y="542880"/>
+            <a:ext cx="717840" cy="0"/>
           </a:xfrm>
           <a:prstGeom prst="line">
             <a:avLst/>
@@ -1037,8 +1037,8 @@
         </p:nvSpPr>
         <p:spPr>
           <a:xfrm>
-            <a:off x="2282400" y="747360"/>
-            <a:ext cx="671400" cy="0"/>
+            <a:off x="2288520" y="747360"/>
+            <a:ext cx="672840" cy="0"/>
           </a:xfrm>
           <a:prstGeom prst="line">
             <a:avLst/>
@@ -1080,8 +1080,8 @@
         </p:nvSpPr>
         <p:spPr>
           <a:xfrm>
-            <a:off x="2306520" y="849960"/>
-            <a:ext cx="685440" cy="0"/>
+            <a:off x="2312280" y="849960"/>
+            <a:ext cx="686880" cy="0"/>
           </a:xfrm>
           <a:prstGeom prst="line">
             <a:avLst/>
@@ -1123,8 +1123,8 @@
         </p:nvSpPr>
         <p:spPr>
           <a:xfrm>
-            <a:off x="2289600" y="952200"/>
-            <a:ext cx="700920" cy="0"/>
+            <a:off x="2295000" y="952200"/>
+            <a:ext cx="703080" cy="0"/>
           </a:xfrm>
           <a:prstGeom prst="line">
             <a:avLst/>
@@ -1166,8 +1166,8 @@
         </p:nvSpPr>
         <p:spPr>
           <a:xfrm>
-            <a:off x="1414800" y="1156680"/>
-            <a:ext cx="541440" cy="0"/>
+            <a:off x="1413000" y="1156680"/>
+            <a:ext cx="541800" cy="0"/>
           </a:xfrm>
           <a:prstGeom prst="line">
             <a:avLst/>
@@ -1209,8 +1209,8 @@
         </p:nvSpPr>
         <p:spPr>
           <a:xfrm>
-            <a:off x="1414800" y="1258920"/>
-            <a:ext cx="543600" cy="0"/>
+            <a:off x="1412640" y="1258920"/>
+            <a:ext cx="543960" cy="0"/>
           </a:xfrm>
           <a:prstGeom prst="line">
             <a:avLst/>
@@ -1252,8 +1252,8 @@
         </p:nvSpPr>
         <p:spPr>
           <a:xfrm>
-            <a:off x="1414440" y="1361160"/>
-            <a:ext cx="545760" cy="0"/>
+            <a:off x="1412280" y="1361160"/>
+            <a:ext cx="546120" cy="0"/>
           </a:xfrm>
           <a:prstGeom prst="line">
             <a:avLst/>
@@ -1295,8 +1295,8 @@
         </p:nvSpPr>
         <p:spPr>
           <a:xfrm>
-            <a:off x="886320" y="1565640"/>
-            <a:ext cx="655560" cy="0"/>
+            <a:off x="851040" y="1565640"/>
+            <a:ext cx="653760" cy="0"/>
           </a:xfrm>
           <a:prstGeom prst="line">
             <a:avLst/>
@@ -1338,8 +1338,8 @@
         </p:nvSpPr>
         <p:spPr>
           <a:xfrm>
-            <a:off x="890640" y="1668240"/>
-            <a:ext cx="657360" cy="0"/>
+            <a:off x="854280" y="1668240"/>
+            <a:ext cx="655920" cy="0"/>
           </a:xfrm>
           <a:prstGeom prst="line">
             <a:avLst/>
@@ -1381,8 +1381,8 @@
         </p:nvSpPr>
         <p:spPr>
           <a:xfrm>
-            <a:off x="886320" y="1770480"/>
-            <a:ext cx="658800" cy="0"/>
+            <a:off x="850320" y="1770480"/>
+            <a:ext cx="657360" cy="0"/>
           </a:xfrm>
           <a:prstGeom prst="line">
             <a:avLst/>
@@ -1424,8 +1424,8 @@
         </p:nvSpPr>
         <p:spPr>
           <a:xfrm>
-            <a:off x="2688480" y="317880"/>
-            <a:ext cx="41400" cy="41400"/>
+            <a:off x="2742120" y="317880"/>
+            <a:ext cx="41040" cy="41400"/>
           </a:xfrm>
           <a:custGeom>
             <a:avLst/>
@@ -1433,17 +1433,17 @@
             <a:ahLst/>
             <a:rect l="0" t="0" r="r" b="b"/>
             <a:pathLst>
-              <a:path w="115" h="115">
+              <a:path w="114" h="115">
                 <a:moveTo>
                   <a:pt x="0" y="57"/>
                 </a:moveTo>
                 <a:cubicBezTo>
                   <a:pt x="0" y="-19"/>
-                  <a:pt x="115" y="-19"/>
-                  <a:pt x="115" y="57"/>
+                  <a:pt x="114" y="-19"/>
+                  <a:pt x="114" y="57"/>
                 </a:cubicBezTo>
                 <a:cubicBezTo>
-                  <a:pt x="115" y="134"/>
+                  <a:pt x="114" y="134"/>
                   <a:pt x="0" y="134"/>
                   <a:pt x="0" y="57"/>
                 </a:cubicBezTo>
@@ -1482,8 +1482,8 @@
         </p:nvSpPr>
         <p:spPr>
           <a:xfrm>
-            <a:off x="2688480" y="317880"/>
-            <a:ext cx="41400" cy="41400"/>
+            <a:off x="2742120" y="317880"/>
+            <a:ext cx="41040" cy="41400"/>
           </a:xfrm>
           <a:custGeom>
             <a:avLst/>
@@ -1491,19 +1491,19 @@
             <a:ahLst/>
             <a:rect l="0" t="0" r="r" b="b"/>
             <a:pathLst>
-              <a:path fill="none" w="115" h="115">
+              <a:path fill="none" w="114" h="115">
                 <a:moveTo>
-                  <a:pt x="115" y="57"/>
+                  <a:pt x="114" y="57"/>
                 </a:moveTo>
                 <a:cubicBezTo>
-                  <a:pt x="115" y="134"/>
+                  <a:pt x="114" y="134"/>
                   <a:pt x="0" y="134"/>
                   <a:pt x="0" y="57"/>
                 </a:cubicBezTo>
                 <a:cubicBezTo>
                   <a:pt x="0" y="-19"/>
-                  <a:pt x="115" y="-19"/>
-                  <a:pt x="115" y="57"/>
+                  <a:pt x="114" y="-19"/>
+                  <a:pt x="114" y="57"/>
                 </a:cubicBezTo>
               </a:path>
             </a:pathLst>
@@ -1539,7 +1539,7 @@
         </p:nvSpPr>
         <p:spPr>
           <a:xfrm>
-            <a:off x="2691000" y="420120"/>
+            <a:off x="2745000" y="420120"/>
             <a:ext cx="41400" cy="41760"/>
           </a:xfrm>
           <a:custGeom>
@@ -1597,7 +1597,7 @@
         </p:nvSpPr>
         <p:spPr>
           <a:xfrm>
-            <a:off x="2691000" y="420120"/>
+            <a:off x="2745000" y="420120"/>
             <a:ext cx="41400" cy="41760"/>
           </a:xfrm>
           <a:custGeom>
@@ -1654,8 +1654,8 @@
         </p:nvSpPr>
         <p:spPr>
           <a:xfrm>
-            <a:off x="2702880" y="522360"/>
-            <a:ext cx="41040" cy="41400"/>
+            <a:off x="2757240" y="522360"/>
+            <a:ext cx="41400" cy="41400"/>
           </a:xfrm>
           <a:custGeom>
             <a:avLst/>
@@ -1663,17 +1663,17 @@
             <a:ahLst/>
             <a:rect l="0" t="0" r="r" b="b"/>
             <a:pathLst>
-              <a:path w="114" h="115">
+              <a:path w="115" h="115">
                 <a:moveTo>
                   <a:pt x="0" y="57"/>
                 </a:moveTo>
                 <a:cubicBezTo>
                   <a:pt x="0" y="-19"/>
-                  <a:pt x="114" y="-19"/>
-                  <a:pt x="114" y="57"/>
+                  <a:pt x="115" y="-19"/>
+                  <a:pt x="115" y="57"/>
                 </a:cubicBezTo>
                 <a:cubicBezTo>
-                  <a:pt x="114" y="134"/>
+                  <a:pt x="115" y="134"/>
                   <a:pt x="0" y="134"/>
                   <a:pt x="0" y="57"/>
                 </a:cubicBezTo>
@@ -1712,8 +1712,8 @@
         </p:nvSpPr>
         <p:spPr>
           <a:xfrm>
-            <a:off x="2702880" y="522360"/>
-            <a:ext cx="41040" cy="41400"/>
+            <a:off x="2757240" y="522360"/>
+            <a:ext cx="41400" cy="41400"/>
           </a:xfrm>
           <a:custGeom>
             <a:avLst/>
@@ -1721,19 +1721,19 @@
             <a:ahLst/>
             <a:rect l="0" t="0" r="r" b="b"/>
             <a:pathLst>
-              <a:path fill="none" w="114" h="115">
+              <a:path fill="none" w="115" h="115">
                 <a:moveTo>
-                  <a:pt x="114" y="57"/>
+                  <a:pt x="115" y="57"/>
                 </a:moveTo>
                 <a:cubicBezTo>
-                  <a:pt x="114" y="134"/>
+                  <a:pt x="115" y="134"/>
                   <a:pt x="0" y="134"/>
                   <a:pt x="0" y="57"/>
                 </a:cubicBezTo>
                 <a:cubicBezTo>
                   <a:pt x="0" y="-19"/>
-                  <a:pt x="114" y="-19"/>
-                  <a:pt x="114" y="57"/>
+                  <a:pt x="115" y="-19"/>
+                  <a:pt x="115" y="57"/>
                 </a:cubicBezTo>
               </a:path>
             </a:pathLst>
@@ -1769,7 +1769,7 @@
         </p:nvSpPr>
         <p:spPr>
           <a:xfrm>
-            <a:off x="2597760" y="727200"/>
+            <a:off x="2604600" y="727200"/>
             <a:ext cx="41400" cy="41040"/>
           </a:xfrm>
           <a:custGeom>
@@ -1827,7 +1827,7 @@
         </p:nvSpPr>
         <p:spPr>
           <a:xfrm>
-            <a:off x="2597760" y="727200"/>
+            <a:off x="2604600" y="727200"/>
             <a:ext cx="41400" cy="41040"/>
           </a:xfrm>
           <a:custGeom>
@@ -1884,7 +1884,7 @@
         </p:nvSpPr>
         <p:spPr>
           <a:xfrm>
-            <a:off x="2628720" y="829440"/>
+            <a:off x="2635200" y="829440"/>
             <a:ext cx="41400" cy="41400"/>
           </a:xfrm>
           <a:custGeom>
@@ -1942,7 +1942,7 @@
         </p:nvSpPr>
         <p:spPr>
           <a:xfrm>
-            <a:off x="2628720" y="829440"/>
+            <a:off x="2635200" y="829440"/>
             <a:ext cx="41400" cy="41400"/>
           </a:xfrm>
           <a:custGeom>
@@ -1999,7 +1999,7 @@
         </p:nvSpPr>
         <p:spPr>
           <a:xfrm>
-            <a:off x="2619720" y="931680"/>
+            <a:off x="2625840" y="931680"/>
             <a:ext cx="41400" cy="41400"/>
           </a:xfrm>
           <a:custGeom>
@@ -2057,7 +2057,7 @@
         </p:nvSpPr>
         <p:spPr>
           <a:xfrm>
-            <a:off x="2619720" y="931680"/>
+            <a:off x="2625840" y="931680"/>
             <a:ext cx="41400" cy="41400"/>
           </a:xfrm>
           <a:custGeom>
@@ -2114,7 +2114,7 @@
         </p:nvSpPr>
         <p:spPr>
           <a:xfrm>
-            <a:off x="1665000" y="1136160"/>
+            <a:off x="1663200" y="1136160"/>
             <a:ext cx="41400" cy="41400"/>
           </a:xfrm>
           <a:custGeom>
@@ -2172,7 +2172,7 @@
         </p:nvSpPr>
         <p:spPr>
           <a:xfrm>
-            <a:off x="1665000" y="1136160"/>
+            <a:off x="1663200" y="1136160"/>
             <a:ext cx="41400" cy="41400"/>
           </a:xfrm>
           <a:custGeom>
@@ -2229,7 +2229,7 @@
         </p:nvSpPr>
         <p:spPr>
           <a:xfrm>
-            <a:off x="1666080" y="1238400"/>
+            <a:off x="1664280" y="1238400"/>
             <a:ext cx="41040" cy="41760"/>
           </a:xfrm>
           <a:custGeom>
@@ -2287,7 +2287,7 @@
         </p:nvSpPr>
         <p:spPr>
           <a:xfrm>
-            <a:off x="1666080" y="1238400"/>
+            <a:off x="1664280" y="1238400"/>
             <a:ext cx="41040" cy="41760"/>
           </a:xfrm>
           <a:custGeom>
@@ -2344,7 +2344,7 @@
         </p:nvSpPr>
         <p:spPr>
           <a:xfrm>
-            <a:off x="1666800" y="1340640"/>
+            <a:off x="1664640" y="1340640"/>
             <a:ext cx="41400" cy="41400"/>
           </a:xfrm>
           <a:custGeom>
@@ -2402,7 +2402,7 @@
         </p:nvSpPr>
         <p:spPr>
           <a:xfrm>
-            <a:off x="1666800" y="1340640"/>
+            <a:off x="1664640" y="1340640"/>
             <a:ext cx="41400" cy="41400"/>
           </a:xfrm>
           <a:custGeom>
@@ -2459,7 +2459,7 @@
         </p:nvSpPr>
         <p:spPr>
           <a:xfrm>
-            <a:off x="1193760" y="1545480"/>
+            <a:off x="1157400" y="1545480"/>
             <a:ext cx="41400" cy="41040"/>
           </a:xfrm>
           <a:custGeom>
@@ -2517,7 +2517,7 @@
         </p:nvSpPr>
         <p:spPr>
           <a:xfrm>
-            <a:off x="1193760" y="1545480"/>
+            <a:off x="1157400" y="1545480"/>
             <a:ext cx="41400" cy="41040"/>
           </a:xfrm>
           <a:custGeom>
@@ -2574,7 +2574,7 @@
         </p:nvSpPr>
         <p:spPr>
           <a:xfrm>
-            <a:off x="1198800" y="1647720"/>
+            <a:off x="1161720" y="1647720"/>
             <a:ext cx="41400" cy="41400"/>
           </a:xfrm>
           <a:custGeom>
@@ -2632,7 +2632,7 @@
         </p:nvSpPr>
         <p:spPr>
           <a:xfrm>
-            <a:off x="1198800" y="1647720"/>
+            <a:off x="1161720" y="1647720"/>
             <a:ext cx="41400" cy="41400"/>
           </a:xfrm>
           <a:custGeom>
@@ -2689,7 +2689,7 @@
         </p:nvSpPr>
         <p:spPr>
           <a:xfrm>
-            <a:off x="1195200" y="1749960"/>
+            <a:off x="1158480" y="1749960"/>
             <a:ext cx="41400" cy="41040"/>
           </a:xfrm>
           <a:custGeom>
@@ -2747,7 +2747,7 @@
         </p:nvSpPr>
         <p:spPr>
           <a:xfrm>
-            <a:off x="1195200" y="1749960"/>
+            <a:off x="1158480" y="1749960"/>
             <a:ext cx="41400" cy="41040"/>
           </a:xfrm>
           <a:custGeom>
@@ -2804,7 +2804,7 @@
         </p:nvSpPr>
         <p:spPr>
           <a:xfrm>
-            <a:off x="2067120" y="300600"/>
+            <a:off x="2121120" y="300600"/>
             <a:ext cx="238320" cy="79560"/>
           </a:xfrm>
           <a:prstGeom prst="rect">
@@ -2852,7 +2852,7 @@
         </p:nvSpPr>
         <p:spPr>
           <a:xfrm>
-            <a:off x="2030400" y="402840"/>
+            <a:off x="2084760" y="402840"/>
             <a:ext cx="277560" cy="79560"/>
           </a:xfrm>
           <a:prstGeom prst="rect">
@@ -2900,7 +2900,7 @@
         </p:nvSpPr>
         <p:spPr>
           <a:xfrm>
-            <a:off x="2040480" y="505080"/>
+            <a:off x="2095200" y="505080"/>
             <a:ext cx="277560" cy="79560"/>
           </a:xfrm>
           <a:prstGeom prst="rect">
@@ -2975,7 +2975,7 @@
                 <a:latin typeface="Arial"/>
                 <a:ea typeface="Arial"/>
               </a:rPr>
-              <a:t>1.40</a:t>
+              <a:t>1.43</a:t>
             </a:r>
             <a:endParaRPr lang="en-US" sz="600" b="0" u="none" strike="noStrike">
               <a:solidFill>
@@ -3071,7 +3071,7 @@
                 <a:latin typeface="Arial"/>
                 <a:ea typeface="Arial"/>
               </a:rPr>
-              <a:t>1.00</a:t>
+              <a:t>0.99</a:t>
             </a:r>
             <a:endParaRPr lang="en-US" sz="600" b="0" u="none" strike="noStrike">
               <a:solidFill>
@@ -3119,7 +3119,7 @@
                 <a:latin typeface="Arial"/>
                 <a:ea typeface="Arial"/>
               </a:rPr>
-              <a:t>0.85</a:t>
+              <a:t>0.84</a:t>
             </a:r>
             <a:endParaRPr lang="en-US" sz="600" b="0" u="none" strike="noStrike">
               <a:solidFill>
@@ -4125,8 +4125,8 @@
         </p:nvSpPr>
         <p:spPr>
           <a:xfrm>
-            <a:off x="3885120" y="355320"/>
-            <a:ext cx="1976040" cy="1455120"/>
+            <a:off x="3885120" y="335520"/>
+            <a:ext cx="1975680" cy="1478880"/>
           </a:xfrm>
           <a:custGeom>
             <a:avLst/>
@@ -4134,369 +4134,369 @@
             <a:ahLst/>
             <a:rect l="0" t="0" r="r" b="b"/>
             <a:pathLst>
-              <a:path w="5489" h="4042">
+              <a:path w="5488" h="4108">
                 <a:moveTo>
-                  <a:pt x="0" y="3674"/>
+                  <a:pt x="0" y="3760"/>
                 </a:moveTo>
                 <a:lnTo>
-                  <a:pt x="93" y="3660"/>
-                </a:lnTo>
-                <a:lnTo>
-                  <a:pt x="186" y="3646"/>
-                </a:lnTo>
-                <a:lnTo>
-                  <a:pt x="279" y="3632"/>
-                </a:lnTo>
-                <a:lnTo>
-                  <a:pt x="372" y="3617"/>
-                </a:lnTo>
-                <a:lnTo>
-                  <a:pt x="465" y="3601"/>
-                </a:lnTo>
-                <a:lnTo>
-                  <a:pt x="558" y="3586"/>
-                </a:lnTo>
-                <a:lnTo>
-                  <a:pt x="651" y="3569"/>
-                </a:lnTo>
-                <a:lnTo>
-                  <a:pt x="744" y="3553"/>
-                </a:lnTo>
-                <a:lnTo>
-                  <a:pt x="837" y="3535"/>
-                </a:lnTo>
-                <a:lnTo>
-                  <a:pt x="930" y="3518"/>
-                </a:lnTo>
-                <a:lnTo>
-                  <a:pt x="1023" y="3499"/>
-                </a:lnTo>
-                <a:lnTo>
-                  <a:pt x="1116" y="3480"/>
-                </a:lnTo>
-                <a:lnTo>
-                  <a:pt x="1209" y="3461"/>
-                </a:lnTo>
-                <a:lnTo>
-                  <a:pt x="1302" y="3440"/>
-                </a:lnTo>
-                <a:lnTo>
-                  <a:pt x="1395" y="3419"/>
-                </a:lnTo>
-                <a:lnTo>
-                  <a:pt x="1488" y="3398"/>
-                </a:lnTo>
-                <a:lnTo>
-                  <a:pt x="1581" y="3375"/>
-                </a:lnTo>
-                <a:lnTo>
-                  <a:pt x="1674" y="3352"/>
-                </a:lnTo>
-                <a:lnTo>
-                  <a:pt x="1767" y="3327"/>
-                </a:lnTo>
-                <a:lnTo>
-                  <a:pt x="1860" y="3302"/>
-                </a:lnTo>
-                <a:lnTo>
-                  <a:pt x="1953" y="3276"/>
-                </a:lnTo>
-                <a:lnTo>
-                  <a:pt x="2046" y="3248"/>
-                </a:lnTo>
-                <a:lnTo>
-                  <a:pt x="2139" y="3219"/>
-                </a:lnTo>
-                <a:lnTo>
-                  <a:pt x="2232" y="3189"/>
-                </a:lnTo>
-                <a:lnTo>
-                  <a:pt x="2325" y="3158"/>
-                </a:lnTo>
-                <a:lnTo>
-                  <a:pt x="2418" y="3125"/>
-                </a:lnTo>
-                <a:lnTo>
-                  <a:pt x="2511" y="3090"/>
-                </a:lnTo>
-                <a:lnTo>
-                  <a:pt x="2604" y="3053"/>
-                </a:lnTo>
-                <a:lnTo>
-                  <a:pt x="2697" y="3015"/>
-                </a:lnTo>
-                <a:lnTo>
-                  <a:pt x="2790" y="2974"/>
-                </a:lnTo>
-                <a:lnTo>
-                  <a:pt x="2883" y="2931"/>
-                </a:lnTo>
-                <a:lnTo>
-                  <a:pt x="2977" y="2886"/>
-                </a:lnTo>
-                <a:lnTo>
-                  <a:pt x="3070" y="2838"/>
-                </a:lnTo>
-                <a:lnTo>
-                  <a:pt x="3163" y="2787"/>
-                </a:lnTo>
-                <a:lnTo>
-                  <a:pt x="3256" y="2734"/>
-                </a:lnTo>
-                <a:lnTo>
-                  <a:pt x="3349" y="2677"/>
-                </a:lnTo>
-                <a:lnTo>
-                  <a:pt x="3442" y="2617"/>
-                </a:lnTo>
-                <a:lnTo>
-                  <a:pt x="3535" y="2553"/>
-                </a:lnTo>
-                <a:lnTo>
-                  <a:pt x="3628" y="2486"/>
-                </a:lnTo>
-                <a:lnTo>
-                  <a:pt x="3721" y="2415"/>
-                </a:lnTo>
-                <a:lnTo>
-                  <a:pt x="3814" y="2339"/>
-                </a:lnTo>
-                <a:lnTo>
-                  <a:pt x="3907" y="2259"/>
-                </a:lnTo>
-                <a:lnTo>
-                  <a:pt x="4001" y="2175"/>
-                </a:lnTo>
-                <a:lnTo>
-                  <a:pt x="4094" y="2086"/>
-                </a:lnTo>
-                <a:lnTo>
-                  <a:pt x="4187" y="1992"/>
-                </a:lnTo>
-                <a:lnTo>
-                  <a:pt x="4280" y="1893"/>
-                </a:lnTo>
-                <a:lnTo>
-                  <a:pt x="4373" y="1788"/>
-                </a:lnTo>
-                <a:lnTo>
-                  <a:pt x="4466" y="1678"/>
-                </a:lnTo>
-                <a:lnTo>
-                  <a:pt x="4559" y="1561"/>
-                </a:lnTo>
-                <a:lnTo>
-                  <a:pt x="4652" y="1439"/>
-                </a:lnTo>
-                <a:lnTo>
-                  <a:pt x="4745" y="1310"/>
-                </a:lnTo>
-                <a:lnTo>
-                  <a:pt x="4838" y="1174"/>
-                </a:lnTo>
-                <a:lnTo>
-                  <a:pt x="4931" y="1030"/>
-                </a:lnTo>
-                <a:lnTo>
-                  <a:pt x="5024" y="879"/>
-                </a:lnTo>
-                <a:lnTo>
-                  <a:pt x="5117" y="720"/>
-                </a:lnTo>
-                <a:lnTo>
-                  <a:pt x="5210" y="554"/>
-                </a:lnTo>
-                <a:lnTo>
-                  <a:pt x="5303" y="378"/>
-                </a:lnTo>
-                <a:lnTo>
-                  <a:pt x="5396" y="194"/>
-                </a:lnTo>
-                <a:lnTo>
-                  <a:pt x="5489" y="0"/>
-                </a:lnTo>
-                <a:lnTo>
-                  <a:pt x="5489" y="2413"/>
-                </a:lnTo>
-                <a:lnTo>
-                  <a:pt x="5396" y="2458"/>
-                </a:lnTo>
-                <a:lnTo>
-                  <a:pt x="5303" y="2502"/>
-                </a:lnTo>
-                <a:lnTo>
-                  <a:pt x="5210" y="2546"/>
-                </a:lnTo>
-                <a:lnTo>
-                  <a:pt x="5117" y="2588"/>
-                </a:lnTo>
-                <a:lnTo>
-                  <a:pt x="5024" y="2630"/>
-                </a:lnTo>
-                <a:lnTo>
-                  <a:pt x="4931" y="2672"/>
-                </a:lnTo>
-                <a:lnTo>
-                  <a:pt x="4838" y="2712"/>
-                </a:lnTo>
-                <a:lnTo>
-                  <a:pt x="4745" y="2752"/>
-                </a:lnTo>
-                <a:lnTo>
-                  <a:pt x="4652" y="2791"/>
-                </a:lnTo>
-                <a:lnTo>
-                  <a:pt x="4559" y="2830"/>
-                </a:lnTo>
-                <a:lnTo>
-                  <a:pt x="4466" y="2868"/>
-                </a:lnTo>
-                <a:lnTo>
-                  <a:pt x="4373" y="2906"/>
-                </a:lnTo>
-                <a:lnTo>
-                  <a:pt x="4280" y="2943"/>
-                </a:lnTo>
-                <a:lnTo>
-                  <a:pt x="4187" y="2980"/>
-                </a:lnTo>
-                <a:lnTo>
-                  <a:pt x="4094" y="3016"/>
-                </a:lnTo>
-                <a:lnTo>
-                  <a:pt x="4001" y="3052"/>
-                </a:lnTo>
-                <a:lnTo>
-                  <a:pt x="3907" y="3087"/>
-                </a:lnTo>
-                <a:lnTo>
-                  <a:pt x="3814" y="3122"/>
-                </a:lnTo>
-                <a:lnTo>
-                  <a:pt x="3721" y="3157"/>
-                </a:lnTo>
-                <a:lnTo>
-                  <a:pt x="3628" y="3191"/>
-                </a:lnTo>
-                <a:lnTo>
-                  <a:pt x="3535" y="3225"/>
-                </a:lnTo>
-                <a:lnTo>
-                  <a:pt x="3442" y="3258"/>
-                </a:lnTo>
-                <a:lnTo>
-                  <a:pt x="3349" y="3291"/>
-                </a:lnTo>
-                <a:lnTo>
-                  <a:pt x="3256" y="3323"/>
-                </a:lnTo>
-                <a:lnTo>
-                  <a:pt x="3163" y="3355"/>
-                </a:lnTo>
-                <a:lnTo>
-                  <a:pt x="3070" y="3387"/>
-                </a:lnTo>
-                <a:lnTo>
-                  <a:pt x="2977" y="3418"/>
-                </a:lnTo>
-                <a:lnTo>
-                  <a:pt x="2883" y="3449"/>
-                </a:lnTo>
-                <a:lnTo>
-                  <a:pt x="2790" y="3479"/>
-                </a:lnTo>
-                <a:lnTo>
-                  <a:pt x="2697" y="3508"/>
-                </a:lnTo>
-                <a:lnTo>
-                  <a:pt x="2604" y="3536"/>
-                </a:lnTo>
-                <a:lnTo>
-                  <a:pt x="2511" y="3564"/>
-                </a:lnTo>
-                <a:lnTo>
-                  <a:pt x="2418" y="3592"/>
-                </a:lnTo>
-                <a:lnTo>
-                  <a:pt x="2325" y="3618"/>
-                </a:lnTo>
-                <a:lnTo>
-                  <a:pt x="2232" y="3644"/>
-                </a:lnTo>
-                <a:lnTo>
-                  <a:pt x="2139" y="3669"/>
-                </a:lnTo>
-                <a:lnTo>
-                  <a:pt x="2046" y="3693"/>
-                </a:lnTo>
-                <a:lnTo>
-                  <a:pt x="1953" y="3716"/>
-                </a:lnTo>
-                <a:lnTo>
-                  <a:pt x="1860" y="3739"/>
-                </a:lnTo>
-                <a:lnTo>
-                  <a:pt x="1767" y="3761"/>
-                </a:lnTo>
-                <a:lnTo>
-                  <a:pt x="1674" y="3782"/>
-                </a:lnTo>
-                <a:lnTo>
-                  <a:pt x="1581" y="3802"/>
-                </a:lnTo>
-                <a:lnTo>
-                  <a:pt x="1488" y="3821"/>
-                </a:lnTo>
-                <a:lnTo>
-                  <a:pt x="1395" y="3840"/>
-                </a:lnTo>
-                <a:lnTo>
-                  <a:pt x="1302" y="3858"/>
-                </a:lnTo>
-                <a:lnTo>
-                  <a:pt x="1209" y="3875"/>
-                </a:lnTo>
-                <a:lnTo>
-                  <a:pt x="1116" y="3892"/>
-                </a:lnTo>
-                <a:lnTo>
-                  <a:pt x="1023" y="3908"/>
-                </a:lnTo>
-                <a:lnTo>
-                  <a:pt x="930" y="3923"/>
-                </a:lnTo>
-                <a:lnTo>
-                  <a:pt x="837" y="3937"/>
-                </a:lnTo>
-                <a:lnTo>
-                  <a:pt x="744" y="3951"/>
-                </a:lnTo>
-                <a:lnTo>
-                  <a:pt x="651" y="3964"/>
-                </a:lnTo>
-                <a:lnTo>
-                  <a:pt x="558" y="3977"/>
-                </a:lnTo>
-                <a:lnTo>
-                  <a:pt x="465" y="3989"/>
-                </a:lnTo>
-                <a:lnTo>
-                  <a:pt x="372" y="4001"/>
-                </a:lnTo>
-                <a:lnTo>
-                  <a:pt x="279" y="4012"/>
-                </a:lnTo>
-                <a:lnTo>
-                  <a:pt x="186" y="4023"/>
-                </a:lnTo>
-                <a:lnTo>
-                  <a:pt x="93" y="4033"/>
-                </a:lnTo>
-                <a:lnTo>
-                  <a:pt x="0" y="4042"/>
-                </a:lnTo>
-                <a:lnTo>
-                  <a:pt x="0" y="3674"/>
+                  <a:pt x="93" y="3746"/>
+                </a:lnTo>
+                <a:lnTo>
+                  <a:pt x="186" y="3732"/>
+                </a:lnTo>
+                <a:lnTo>
+                  <a:pt x="279" y="3718"/>
+                </a:lnTo>
+                <a:lnTo>
+                  <a:pt x="372" y="3703"/>
+                </a:lnTo>
+                <a:lnTo>
+                  <a:pt x="465" y="3688"/>
+                </a:lnTo>
+                <a:lnTo>
+                  <a:pt x="558" y="3672"/>
+                </a:lnTo>
+                <a:lnTo>
+                  <a:pt x="651" y="3656"/>
+                </a:lnTo>
+                <a:lnTo>
+                  <a:pt x="744" y="3639"/>
+                </a:lnTo>
+                <a:lnTo>
+                  <a:pt x="837" y="3622"/>
+                </a:lnTo>
+                <a:lnTo>
+                  <a:pt x="930" y="3604"/>
+                </a:lnTo>
+                <a:lnTo>
+                  <a:pt x="1023" y="3585"/>
+                </a:lnTo>
+                <a:lnTo>
+                  <a:pt x="1116" y="3566"/>
+                </a:lnTo>
+                <a:lnTo>
+                  <a:pt x="1209" y="3546"/>
+                </a:lnTo>
+                <a:lnTo>
+                  <a:pt x="1302" y="3526"/>
+                </a:lnTo>
+                <a:lnTo>
+                  <a:pt x="1395" y="3505"/>
+                </a:lnTo>
+                <a:lnTo>
+                  <a:pt x="1488" y="3483"/>
+                </a:lnTo>
+                <a:lnTo>
+                  <a:pt x="1581" y="3460"/>
+                </a:lnTo>
+                <a:lnTo>
+                  <a:pt x="1674" y="3437"/>
+                </a:lnTo>
+                <a:lnTo>
+                  <a:pt x="1767" y="3412"/>
+                </a:lnTo>
+                <a:lnTo>
+                  <a:pt x="1860" y="3386"/>
+                </a:lnTo>
+                <a:lnTo>
+                  <a:pt x="1953" y="3360"/>
+                </a:lnTo>
+                <a:lnTo>
+                  <a:pt x="2046" y="3332"/>
+                </a:lnTo>
+                <a:lnTo>
+                  <a:pt x="2139" y="3303"/>
+                </a:lnTo>
+                <a:lnTo>
+                  <a:pt x="2232" y="3272"/>
+                </a:lnTo>
+                <a:lnTo>
+                  <a:pt x="2325" y="3240"/>
+                </a:lnTo>
+                <a:lnTo>
+                  <a:pt x="2418" y="3207"/>
+                </a:lnTo>
+                <a:lnTo>
+                  <a:pt x="2511" y="3172"/>
+                </a:lnTo>
+                <a:lnTo>
+                  <a:pt x="2604" y="3135"/>
+                </a:lnTo>
+                <a:lnTo>
+                  <a:pt x="2697" y="3095"/>
+                </a:lnTo>
+                <a:lnTo>
+                  <a:pt x="2790" y="3054"/>
+                </a:lnTo>
+                <a:lnTo>
+                  <a:pt x="2883" y="3011"/>
+                </a:lnTo>
+                <a:lnTo>
+                  <a:pt x="2977" y="2965"/>
+                </a:lnTo>
+                <a:lnTo>
+                  <a:pt x="3070" y="2916"/>
+                </a:lnTo>
+                <a:lnTo>
+                  <a:pt x="3163" y="2865"/>
+                </a:lnTo>
+                <a:lnTo>
+                  <a:pt x="3256" y="2810"/>
+                </a:lnTo>
+                <a:lnTo>
+                  <a:pt x="3349" y="2752"/>
+                </a:lnTo>
+                <a:lnTo>
+                  <a:pt x="3442" y="2691"/>
+                </a:lnTo>
+                <a:lnTo>
+                  <a:pt x="3535" y="2626"/>
+                </a:lnTo>
+                <a:lnTo>
+                  <a:pt x="3628" y="2558"/>
+                </a:lnTo>
+                <a:lnTo>
+                  <a:pt x="3721" y="2485"/>
+                </a:lnTo>
+                <a:lnTo>
+                  <a:pt x="3814" y="2408"/>
+                </a:lnTo>
+                <a:lnTo>
+                  <a:pt x="3907" y="2327"/>
+                </a:lnTo>
+                <a:lnTo>
+                  <a:pt x="4000" y="2241"/>
+                </a:lnTo>
+                <a:lnTo>
+                  <a:pt x="4093" y="2150"/>
+                </a:lnTo>
+                <a:lnTo>
+                  <a:pt x="4186" y="2054"/>
+                </a:lnTo>
+                <a:lnTo>
+                  <a:pt x="4279" y="1952"/>
+                </a:lnTo>
+                <a:lnTo>
+                  <a:pt x="4372" y="1845"/>
+                </a:lnTo>
+                <a:lnTo>
+                  <a:pt x="4465" y="1732"/>
+                </a:lnTo>
+                <a:lnTo>
+                  <a:pt x="4558" y="1612"/>
+                </a:lnTo>
+                <a:lnTo>
+                  <a:pt x="4651" y="1486"/>
+                </a:lnTo>
+                <a:lnTo>
+                  <a:pt x="4744" y="1354"/>
+                </a:lnTo>
+                <a:lnTo>
+                  <a:pt x="4837" y="1214"/>
+                </a:lnTo>
+                <a:lnTo>
+                  <a:pt x="4930" y="1065"/>
+                </a:lnTo>
+                <a:lnTo>
+                  <a:pt x="5023" y="910"/>
+                </a:lnTo>
+                <a:lnTo>
+                  <a:pt x="5116" y="746"/>
+                </a:lnTo>
+                <a:lnTo>
+                  <a:pt x="5209" y="574"/>
+                </a:lnTo>
+                <a:lnTo>
+                  <a:pt x="5302" y="392"/>
+                </a:lnTo>
+                <a:lnTo>
+                  <a:pt x="5395" y="201"/>
+                </a:lnTo>
+                <a:lnTo>
+                  <a:pt x="5488" y="0"/>
+                </a:lnTo>
+                <a:lnTo>
+                  <a:pt x="5488" y="2443"/>
+                </a:lnTo>
+                <a:lnTo>
+                  <a:pt x="5395" y="2490"/>
+                </a:lnTo>
+                <a:lnTo>
+                  <a:pt x="5302" y="2537"/>
+                </a:lnTo>
+                <a:lnTo>
+                  <a:pt x="5209" y="2583"/>
+                </a:lnTo>
+                <a:lnTo>
+                  <a:pt x="5116" y="2629"/>
+                </a:lnTo>
+                <a:lnTo>
+                  <a:pt x="5023" y="2673"/>
+                </a:lnTo>
+                <a:lnTo>
+                  <a:pt x="4930" y="2716"/>
+                </a:lnTo>
+                <a:lnTo>
+                  <a:pt x="4837" y="2759"/>
+                </a:lnTo>
+                <a:lnTo>
+                  <a:pt x="4744" y="2801"/>
+                </a:lnTo>
+                <a:lnTo>
+                  <a:pt x="4651" y="2843"/>
+                </a:lnTo>
+                <a:lnTo>
+                  <a:pt x="4558" y="2883"/>
+                </a:lnTo>
+                <a:lnTo>
+                  <a:pt x="4465" y="2923"/>
+                </a:lnTo>
+                <a:lnTo>
+                  <a:pt x="4372" y="2962"/>
+                </a:lnTo>
+                <a:lnTo>
+                  <a:pt x="4279" y="3001"/>
+                </a:lnTo>
+                <a:lnTo>
+                  <a:pt x="4186" y="3039"/>
+                </a:lnTo>
+                <a:lnTo>
+                  <a:pt x="4093" y="3077"/>
+                </a:lnTo>
+                <a:lnTo>
+                  <a:pt x="4000" y="3114"/>
+                </a:lnTo>
+                <a:lnTo>
+                  <a:pt x="3907" y="3151"/>
+                </a:lnTo>
+                <a:lnTo>
+                  <a:pt x="3814" y="3186"/>
+                </a:lnTo>
+                <a:lnTo>
+                  <a:pt x="3721" y="3222"/>
+                </a:lnTo>
+                <a:lnTo>
+                  <a:pt x="3628" y="3257"/>
+                </a:lnTo>
+                <a:lnTo>
+                  <a:pt x="3535" y="3292"/>
+                </a:lnTo>
+                <a:lnTo>
+                  <a:pt x="3442" y="3326"/>
+                </a:lnTo>
+                <a:lnTo>
+                  <a:pt x="3349" y="3360"/>
+                </a:lnTo>
+                <a:lnTo>
+                  <a:pt x="3256" y="3393"/>
+                </a:lnTo>
+                <a:lnTo>
+                  <a:pt x="3163" y="3426"/>
+                </a:lnTo>
+                <a:lnTo>
+                  <a:pt x="3070" y="3458"/>
+                </a:lnTo>
+                <a:lnTo>
+                  <a:pt x="2977" y="3489"/>
+                </a:lnTo>
+                <a:lnTo>
+                  <a:pt x="2883" y="3520"/>
+                </a:lnTo>
+                <a:lnTo>
+                  <a:pt x="2790" y="3550"/>
+                </a:lnTo>
+                <a:lnTo>
+                  <a:pt x="2697" y="3580"/>
+                </a:lnTo>
+                <a:lnTo>
+                  <a:pt x="2604" y="3609"/>
+                </a:lnTo>
+                <a:lnTo>
+                  <a:pt x="2511" y="3637"/>
+                </a:lnTo>
+                <a:lnTo>
+                  <a:pt x="2418" y="3664"/>
+                </a:lnTo>
+                <a:lnTo>
+                  <a:pt x="2325" y="3691"/>
+                </a:lnTo>
+                <a:lnTo>
+                  <a:pt x="2232" y="3716"/>
+                </a:lnTo>
+                <a:lnTo>
+                  <a:pt x="2139" y="3741"/>
+                </a:lnTo>
+                <a:lnTo>
+                  <a:pt x="2046" y="3765"/>
+                </a:lnTo>
+                <a:lnTo>
+                  <a:pt x="1953" y="3788"/>
+                </a:lnTo>
+                <a:lnTo>
+                  <a:pt x="1860" y="3811"/>
+                </a:lnTo>
+                <a:lnTo>
+                  <a:pt x="1767" y="3832"/>
+                </a:lnTo>
+                <a:lnTo>
+                  <a:pt x="1674" y="3853"/>
+                </a:lnTo>
+                <a:lnTo>
+                  <a:pt x="1581" y="3873"/>
+                </a:lnTo>
+                <a:lnTo>
+                  <a:pt x="1488" y="3892"/>
+                </a:lnTo>
+                <a:lnTo>
+                  <a:pt x="1395" y="3911"/>
+                </a:lnTo>
+                <a:lnTo>
+                  <a:pt x="1302" y="3928"/>
+                </a:lnTo>
+                <a:lnTo>
+                  <a:pt x="1209" y="3945"/>
+                </a:lnTo>
+                <a:lnTo>
+                  <a:pt x="1116" y="3961"/>
+                </a:lnTo>
+                <a:lnTo>
+                  <a:pt x="1023" y="3977"/>
+                </a:lnTo>
+                <a:lnTo>
+                  <a:pt x="930" y="3992"/>
+                </a:lnTo>
+                <a:lnTo>
+                  <a:pt x="837" y="4006"/>
+                </a:lnTo>
+                <a:lnTo>
+                  <a:pt x="744" y="4020"/>
+                </a:lnTo>
+                <a:lnTo>
+                  <a:pt x="651" y="4033"/>
+                </a:lnTo>
+                <a:lnTo>
+                  <a:pt x="558" y="4045"/>
+                </a:lnTo>
+                <a:lnTo>
+                  <a:pt x="465" y="4057"/>
+                </a:lnTo>
+                <a:lnTo>
+                  <a:pt x="372" y="4068"/>
+                </a:lnTo>
+                <a:lnTo>
+                  <a:pt x="279" y="4079"/>
+                </a:lnTo>
+                <a:lnTo>
+                  <a:pt x="186" y="4089"/>
+                </a:lnTo>
+                <a:lnTo>
+                  <a:pt x="93" y="4099"/>
+                </a:lnTo>
+                <a:lnTo>
+                  <a:pt x="0" y="4108"/>
+                </a:lnTo>
+                <a:lnTo>
+                  <a:pt x="0" y="3760"/>
                 </a:lnTo>
                 <a:close/>
               </a:path>
@@ -4535,8 +4535,8 @@
         </p:nvSpPr>
         <p:spPr>
           <a:xfrm>
-            <a:off x="3885120" y="528480"/>
-            <a:ext cx="1976040" cy="1144800"/>
+            <a:off x="3885120" y="519480"/>
+            <a:ext cx="1975680" cy="1155960"/>
           </a:xfrm>
           <a:custGeom>
             <a:avLst/>
@@ -4544,354 +4544,360 @@
             <a:ahLst/>
             <a:rect l="0" t="0" r="r" b="b"/>
             <a:pathLst>
-              <a:path w="5489" h="3180">
+              <a:path w="5488" h="3211">
                 <a:moveTo>
-                  <a:pt x="0" y="2664"/>
+                  <a:pt x="0" y="2697"/>
                 </a:moveTo>
                 <a:lnTo>
-                  <a:pt x="93" y="2647"/>
-                </a:lnTo>
-                <a:lnTo>
-                  <a:pt x="186" y="2630"/>
-                </a:lnTo>
-                <a:lnTo>
-                  <a:pt x="279" y="2612"/>
-                </a:lnTo>
-                <a:lnTo>
-                  <a:pt x="372" y="2594"/>
-                </a:lnTo>
-                <a:lnTo>
-                  <a:pt x="465" y="2576"/>
-                </a:lnTo>
-                <a:lnTo>
-                  <a:pt x="558" y="2557"/>
-                </a:lnTo>
-                <a:lnTo>
-                  <a:pt x="651" y="2538"/>
-                </a:lnTo>
-                <a:lnTo>
-                  <a:pt x="744" y="2518"/>
-                </a:lnTo>
-                <a:lnTo>
-                  <a:pt x="837" y="2498"/>
-                </a:lnTo>
-                <a:lnTo>
-                  <a:pt x="930" y="2478"/>
-                </a:lnTo>
-                <a:lnTo>
-                  <a:pt x="1023" y="2457"/>
-                </a:lnTo>
-                <a:lnTo>
-                  <a:pt x="1116" y="2436"/>
-                </a:lnTo>
-                <a:lnTo>
-                  <a:pt x="1209" y="2413"/>
-                </a:lnTo>
-                <a:lnTo>
-                  <a:pt x="1302" y="2391"/>
-                </a:lnTo>
-                <a:lnTo>
-                  <a:pt x="1395" y="2368"/>
-                </a:lnTo>
-                <a:lnTo>
-                  <a:pt x="1488" y="2344"/>
-                </a:lnTo>
-                <a:lnTo>
-                  <a:pt x="1581" y="2319"/>
-                </a:lnTo>
-                <a:lnTo>
-                  <a:pt x="1674" y="2294"/>
-                </a:lnTo>
-                <a:lnTo>
-                  <a:pt x="1767" y="2268"/>
-                </a:lnTo>
-                <a:lnTo>
-                  <a:pt x="1860" y="2241"/>
-                </a:lnTo>
-                <a:lnTo>
-                  <a:pt x="1953" y="2214"/>
-                </a:lnTo>
-                <a:lnTo>
-                  <a:pt x="2046" y="2186"/>
-                </a:lnTo>
-                <a:lnTo>
-                  <a:pt x="2139" y="2156"/>
-                </a:lnTo>
-                <a:lnTo>
-                  <a:pt x="2232" y="2126"/>
-                </a:lnTo>
-                <a:lnTo>
-                  <a:pt x="2325" y="2095"/>
-                </a:lnTo>
-                <a:lnTo>
-                  <a:pt x="2418" y="2062"/>
-                </a:lnTo>
-                <a:lnTo>
-                  <a:pt x="2511" y="2029"/>
-                </a:lnTo>
-                <a:lnTo>
-                  <a:pt x="2604" y="1994"/>
-                </a:lnTo>
-                <a:lnTo>
-                  <a:pt x="2697" y="1958"/>
-                </a:lnTo>
-                <a:lnTo>
-                  <a:pt x="2790" y="1921"/>
-                </a:lnTo>
-                <a:lnTo>
-                  <a:pt x="2883" y="1882"/>
-                </a:lnTo>
-                <a:lnTo>
-                  <a:pt x="2977" y="1842"/>
-                </a:lnTo>
-                <a:lnTo>
-                  <a:pt x="3070" y="1800"/>
-                </a:lnTo>
-                <a:lnTo>
-                  <a:pt x="3163" y="1757"/>
-                </a:lnTo>
-                <a:lnTo>
-                  <a:pt x="3256" y="1712"/>
-                </a:lnTo>
-                <a:lnTo>
-                  <a:pt x="3349" y="1666"/>
-                </a:lnTo>
-                <a:lnTo>
-                  <a:pt x="3442" y="1618"/>
-                </a:lnTo>
-                <a:lnTo>
-                  <a:pt x="3535" y="1568"/>
-                </a:lnTo>
-                <a:lnTo>
-                  <a:pt x="3628" y="1516"/>
-                </a:lnTo>
-                <a:lnTo>
-                  <a:pt x="3721" y="1462"/>
-                </a:lnTo>
-                <a:lnTo>
-                  <a:pt x="3814" y="1406"/>
-                </a:lnTo>
-                <a:lnTo>
-                  <a:pt x="3907" y="1349"/>
-                </a:lnTo>
-                <a:lnTo>
-                  <a:pt x="4001" y="1289"/>
-                </a:lnTo>
-                <a:lnTo>
-                  <a:pt x="4094" y="1227"/>
-                </a:lnTo>
-                <a:lnTo>
-                  <a:pt x="4187" y="1163"/>
-                </a:lnTo>
-                <a:lnTo>
-                  <a:pt x="4280" y="1096"/>
-                </a:lnTo>
-                <a:lnTo>
-                  <a:pt x="4373" y="1028"/>
-                </a:lnTo>
-                <a:lnTo>
-                  <a:pt x="4466" y="957"/>
-                </a:lnTo>
-                <a:lnTo>
-                  <a:pt x="4559" y="883"/>
-                </a:lnTo>
-                <a:lnTo>
-                  <a:pt x="4652" y="807"/>
-                </a:lnTo>
-                <a:lnTo>
-                  <a:pt x="4745" y="729"/>
-                </a:lnTo>
-                <a:lnTo>
-                  <a:pt x="4838" y="648"/>
-                </a:lnTo>
-                <a:lnTo>
-                  <a:pt x="4931" y="564"/>
-                </a:lnTo>
-                <a:lnTo>
-                  <a:pt x="5024" y="477"/>
-                </a:lnTo>
-                <a:lnTo>
-                  <a:pt x="5117" y="388"/>
-                </a:lnTo>
-                <a:lnTo>
-                  <a:pt x="5210" y="296"/>
-                </a:lnTo>
-                <a:lnTo>
-                  <a:pt x="5303" y="201"/>
-                </a:lnTo>
-                <a:lnTo>
-                  <a:pt x="5396" y="102"/>
-                </a:lnTo>
-                <a:lnTo>
-                  <a:pt x="5489" y="0"/>
-                </a:lnTo>
-                <a:lnTo>
-                  <a:pt x="5489" y="1597"/>
-                </a:lnTo>
-                <a:lnTo>
-                  <a:pt x="5396" y="1631"/>
-                </a:lnTo>
-                <a:lnTo>
-                  <a:pt x="5303" y="1665"/>
-                </a:lnTo>
-                <a:lnTo>
-                  <a:pt x="5210" y="1699"/>
-                </a:lnTo>
-                <a:lnTo>
-                  <a:pt x="5117" y="1732"/>
-                </a:lnTo>
-                <a:lnTo>
-                  <a:pt x="5024" y="1765"/>
-                </a:lnTo>
-                <a:lnTo>
-                  <a:pt x="4931" y="1797"/>
-                </a:lnTo>
-                <a:lnTo>
-                  <a:pt x="4838" y="1830"/>
-                </a:lnTo>
-                <a:lnTo>
-                  <a:pt x="4745" y="1862"/>
-                </a:lnTo>
-                <a:lnTo>
-                  <a:pt x="4652" y="1894"/>
-                </a:lnTo>
-                <a:lnTo>
-                  <a:pt x="4559" y="1926"/>
-                </a:lnTo>
-                <a:lnTo>
-                  <a:pt x="4466" y="1957"/>
-                </a:lnTo>
-                <a:lnTo>
-                  <a:pt x="4373" y="1988"/>
-                </a:lnTo>
-                <a:lnTo>
-                  <a:pt x="4280" y="2020"/>
-                </a:lnTo>
-                <a:lnTo>
-                  <a:pt x="4187" y="2051"/>
-                </a:lnTo>
-                <a:lnTo>
-                  <a:pt x="4094" y="2082"/>
-                </a:lnTo>
-                <a:lnTo>
-                  <a:pt x="3907" y="2143"/>
-                </a:lnTo>
-                <a:lnTo>
-                  <a:pt x="3721" y="2203"/>
-                </a:lnTo>
-                <a:lnTo>
-                  <a:pt x="3535" y="2263"/>
-                </a:lnTo>
-                <a:lnTo>
-                  <a:pt x="3442" y="2293"/>
-                </a:lnTo>
-                <a:lnTo>
-                  <a:pt x="3349" y="2323"/>
-                </a:lnTo>
-                <a:lnTo>
-                  <a:pt x="3163" y="2382"/>
-                </a:lnTo>
-                <a:lnTo>
-                  <a:pt x="3070" y="2411"/>
-                </a:lnTo>
-                <a:lnTo>
-                  <a:pt x="2883" y="2469"/>
-                </a:lnTo>
-                <a:lnTo>
-                  <a:pt x="2790" y="2498"/>
-                </a:lnTo>
-                <a:lnTo>
-                  <a:pt x="2697" y="2526"/>
-                </a:lnTo>
-                <a:lnTo>
-                  <a:pt x="2604" y="2554"/>
-                </a:lnTo>
-                <a:lnTo>
-                  <a:pt x="2511" y="2582"/>
-                </a:lnTo>
-                <a:lnTo>
-                  <a:pt x="2418" y="2609"/>
-                </a:lnTo>
-                <a:lnTo>
-                  <a:pt x="2325" y="2637"/>
-                </a:lnTo>
-                <a:lnTo>
-                  <a:pt x="2232" y="2663"/>
-                </a:lnTo>
-                <a:lnTo>
-                  <a:pt x="2139" y="2690"/>
-                </a:lnTo>
-                <a:lnTo>
-                  <a:pt x="2046" y="2716"/>
-                </a:lnTo>
-                <a:lnTo>
-                  <a:pt x="1953" y="2742"/>
-                </a:lnTo>
-                <a:lnTo>
-                  <a:pt x="1860" y="2767"/>
-                </a:lnTo>
-                <a:lnTo>
-                  <a:pt x="1767" y="2792"/>
-                </a:lnTo>
-                <a:lnTo>
-                  <a:pt x="1674" y="2817"/>
-                </a:lnTo>
-                <a:lnTo>
-                  <a:pt x="1581" y="2841"/>
-                </a:lnTo>
-                <a:lnTo>
-                  <a:pt x="1488" y="2864"/>
-                </a:lnTo>
-                <a:lnTo>
-                  <a:pt x="1395" y="2888"/>
-                </a:lnTo>
-                <a:lnTo>
-                  <a:pt x="1302" y="2910"/>
-                </a:lnTo>
-                <a:lnTo>
-                  <a:pt x="1209" y="2933"/>
-                </a:lnTo>
-                <a:lnTo>
-                  <a:pt x="1116" y="2954"/>
-                </a:lnTo>
-                <a:lnTo>
-                  <a:pt x="1023" y="2976"/>
-                </a:lnTo>
-                <a:lnTo>
-                  <a:pt x="930" y="2997"/>
-                </a:lnTo>
-                <a:lnTo>
-                  <a:pt x="837" y="3017"/>
-                </a:lnTo>
-                <a:lnTo>
-                  <a:pt x="744" y="3037"/>
-                </a:lnTo>
-                <a:lnTo>
-                  <a:pt x="651" y="3056"/>
-                </a:lnTo>
-                <a:lnTo>
-                  <a:pt x="558" y="3075"/>
-                </a:lnTo>
-                <a:lnTo>
-                  <a:pt x="465" y="3094"/>
-                </a:lnTo>
-                <a:lnTo>
-                  <a:pt x="372" y="3112"/>
-                </a:lnTo>
-                <a:lnTo>
-                  <a:pt x="279" y="3130"/>
-                </a:lnTo>
-                <a:lnTo>
-                  <a:pt x="186" y="3147"/>
-                </a:lnTo>
-                <a:lnTo>
-                  <a:pt x="93" y="3164"/>
-                </a:lnTo>
-                <a:lnTo>
-                  <a:pt x="0" y="3180"/>
-                </a:lnTo>
-                <a:lnTo>
-                  <a:pt x="0" y="2664"/>
+                  <a:pt x="93" y="2680"/>
+                </a:lnTo>
+                <a:lnTo>
+                  <a:pt x="186" y="2663"/>
+                </a:lnTo>
+                <a:lnTo>
+                  <a:pt x="279" y="2645"/>
+                </a:lnTo>
+                <a:lnTo>
+                  <a:pt x="372" y="2627"/>
+                </a:lnTo>
+                <a:lnTo>
+                  <a:pt x="465" y="2609"/>
+                </a:lnTo>
+                <a:lnTo>
+                  <a:pt x="558" y="2590"/>
+                </a:lnTo>
+                <a:lnTo>
+                  <a:pt x="651" y="2570"/>
+                </a:lnTo>
+                <a:lnTo>
+                  <a:pt x="744" y="2551"/>
+                </a:lnTo>
+                <a:lnTo>
+                  <a:pt x="837" y="2531"/>
+                </a:lnTo>
+                <a:lnTo>
+                  <a:pt x="930" y="2510"/>
+                </a:lnTo>
+                <a:lnTo>
+                  <a:pt x="1023" y="2489"/>
+                </a:lnTo>
+                <a:lnTo>
+                  <a:pt x="1116" y="2467"/>
+                </a:lnTo>
+                <a:lnTo>
+                  <a:pt x="1209" y="2445"/>
+                </a:lnTo>
+                <a:lnTo>
+                  <a:pt x="1302" y="2422"/>
+                </a:lnTo>
+                <a:lnTo>
+                  <a:pt x="1395" y="2398"/>
+                </a:lnTo>
+                <a:lnTo>
+                  <a:pt x="1488" y="2374"/>
+                </a:lnTo>
+                <a:lnTo>
+                  <a:pt x="1581" y="2350"/>
+                </a:lnTo>
+                <a:lnTo>
+                  <a:pt x="1674" y="2324"/>
+                </a:lnTo>
+                <a:lnTo>
+                  <a:pt x="1767" y="2298"/>
+                </a:lnTo>
+                <a:lnTo>
+                  <a:pt x="1860" y="2271"/>
+                </a:lnTo>
+                <a:lnTo>
+                  <a:pt x="1953" y="2243"/>
+                </a:lnTo>
+                <a:lnTo>
+                  <a:pt x="2046" y="2214"/>
+                </a:lnTo>
+                <a:lnTo>
+                  <a:pt x="2139" y="2185"/>
+                </a:lnTo>
+                <a:lnTo>
+                  <a:pt x="2232" y="2154"/>
+                </a:lnTo>
+                <a:lnTo>
+                  <a:pt x="2325" y="2122"/>
+                </a:lnTo>
+                <a:lnTo>
+                  <a:pt x="2418" y="2090"/>
+                </a:lnTo>
+                <a:lnTo>
+                  <a:pt x="2511" y="2056"/>
+                </a:lnTo>
+                <a:lnTo>
+                  <a:pt x="2604" y="2021"/>
+                </a:lnTo>
+                <a:lnTo>
+                  <a:pt x="2697" y="1984"/>
+                </a:lnTo>
+                <a:lnTo>
+                  <a:pt x="2790" y="1947"/>
+                </a:lnTo>
+                <a:lnTo>
+                  <a:pt x="2883" y="1908"/>
+                </a:lnTo>
+                <a:lnTo>
+                  <a:pt x="2977" y="1867"/>
+                </a:lnTo>
+                <a:lnTo>
+                  <a:pt x="3070" y="1825"/>
+                </a:lnTo>
+                <a:lnTo>
+                  <a:pt x="3163" y="1781"/>
+                </a:lnTo>
+                <a:lnTo>
+                  <a:pt x="3256" y="1736"/>
+                </a:lnTo>
+                <a:lnTo>
+                  <a:pt x="3349" y="1689"/>
+                </a:lnTo>
+                <a:lnTo>
+                  <a:pt x="3442" y="1640"/>
+                </a:lnTo>
+                <a:lnTo>
+                  <a:pt x="3535" y="1590"/>
+                </a:lnTo>
+                <a:lnTo>
+                  <a:pt x="3628" y="1537"/>
+                </a:lnTo>
+                <a:lnTo>
+                  <a:pt x="3721" y="1483"/>
+                </a:lnTo>
+                <a:lnTo>
+                  <a:pt x="3814" y="1426"/>
+                </a:lnTo>
+                <a:lnTo>
+                  <a:pt x="3907" y="1368"/>
+                </a:lnTo>
+                <a:lnTo>
+                  <a:pt x="4000" y="1307"/>
+                </a:lnTo>
+                <a:lnTo>
+                  <a:pt x="4093" y="1245"/>
+                </a:lnTo>
+                <a:lnTo>
+                  <a:pt x="4186" y="1179"/>
+                </a:lnTo>
+                <a:lnTo>
+                  <a:pt x="4279" y="1112"/>
+                </a:lnTo>
+                <a:lnTo>
+                  <a:pt x="4372" y="1043"/>
+                </a:lnTo>
+                <a:lnTo>
+                  <a:pt x="4465" y="971"/>
+                </a:lnTo>
+                <a:lnTo>
+                  <a:pt x="4558" y="896"/>
+                </a:lnTo>
+                <a:lnTo>
+                  <a:pt x="4651" y="819"/>
+                </a:lnTo>
+                <a:lnTo>
+                  <a:pt x="4744" y="739"/>
+                </a:lnTo>
+                <a:lnTo>
+                  <a:pt x="4837" y="657"/>
+                </a:lnTo>
+                <a:lnTo>
+                  <a:pt x="4930" y="572"/>
+                </a:lnTo>
+                <a:lnTo>
+                  <a:pt x="5023" y="484"/>
+                </a:lnTo>
+                <a:lnTo>
+                  <a:pt x="5116" y="394"/>
+                </a:lnTo>
+                <a:lnTo>
+                  <a:pt x="5209" y="300"/>
+                </a:lnTo>
+                <a:lnTo>
+                  <a:pt x="5302" y="203"/>
+                </a:lnTo>
+                <a:lnTo>
+                  <a:pt x="5395" y="103"/>
+                </a:lnTo>
+                <a:lnTo>
+                  <a:pt x="5488" y="0"/>
+                </a:lnTo>
+                <a:lnTo>
+                  <a:pt x="5488" y="1612"/>
+                </a:lnTo>
+                <a:lnTo>
+                  <a:pt x="5395" y="1646"/>
+                </a:lnTo>
+                <a:lnTo>
+                  <a:pt x="5302" y="1681"/>
+                </a:lnTo>
+                <a:lnTo>
+                  <a:pt x="5209" y="1715"/>
+                </a:lnTo>
+                <a:lnTo>
+                  <a:pt x="5116" y="1749"/>
+                </a:lnTo>
+                <a:lnTo>
+                  <a:pt x="5023" y="1783"/>
+                </a:lnTo>
+                <a:lnTo>
+                  <a:pt x="4930" y="1816"/>
+                </a:lnTo>
+                <a:lnTo>
+                  <a:pt x="4837" y="1849"/>
+                </a:lnTo>
+                <a:lnTo>
+                  <a:pt x="4744" y="1881"/>
+                </a:lnTo>
+                <a:lnTo>
+                  <a:pt x="4651" y="1914"/>
+                </a:lnTo>
+                <a:lnTo>
+                  <a:pt x="4558" y="1946"/>
+                </a:lnTo>
+                <a:lnTo>
+                  <a:pt x="4465" y="1978"/>
+                </a:lnTo>
+                <a:lnTo>
+                  <a:pt x="4372" y="2010"/>
+                </a:lnTo>
+                <a:lnTo>
+                  <a:pt x="4279" y="2042"/>
+                </a:lnTo>
+                <a:lnTo>
+                  <a:pt x="4186" y="2073"/>
+                </a:lnTo>
+                <a:lnTo>
+                  <a:pt x="4093" y="2105"/>
+                </a:lnTo>
+                <a:lnTo>
+                  <a:pt x="4000" y="2136"/>
+                </a:lnTo>
+                <a:lnTo>
+                  <a:pt x="3907" y="2167"/>
+                </a:lnTo>
+                <a:lnTo>
+                  <a:pt x="3721" y="2228"/>
+                </a:lnTo>
+                <a:lnTo>
+                  <a:pt x="3628" y="2259"/>
+                </a:lnTo>
+                <a:lnTo>
+                  <a:pt x="3535" y="2289"/>
+                </a:lnTo>
+                <a:lnTo>
+                  <a:pt x="3349" y="2350"/>
+                </a:lnTo>
+                <a:lnTo>
+                  <a:pt x="3256" y="2379"/>
+                </a:lnTo>
+                <a:lnTo>
+                  <a:pt x="3070" y="2439"/>
+                </a:lnTo>
+                <a:lnTo>
+                  <a:pt x="2977" y="2468"/>
+                </a:lnTo>
+                <a:lnTo>
+                  <a:pt x="2883" y="2497"/>
+                </a:lnTo>
+                <a:lnTo>
+                  <a:pt x="2790" y="2526"/>
+                </a:lnTo>
+                <a:lnTo>
+                  <a:pt x="2697" y="2555"/>
+                </a:lnTo>
+                <a:lnTo>
+                  <a:pt x="2604" y="2583"/>
+                </a:lnTo>
+                <a:lnTo>
+                  <a:pt x="2511" y="2611"/>
+                </a:lnTo>
+                <a:lnTo>
+                  <a:pt x="2418" y="2639"/>
+                </a:lnTo>
+                <a:lnTo>
+                  <a:pt x="2325" y="2666"/>
+                </a:lnTo>
+                <a:lnTo>
+                  <a:pt x="2232" y="2693"/>
+                </a:lnTo>
+                <a:lnTo>
+                  <a:pt x="2139" y="2720"/>
+                </a:lnTo>
+                <a:lnTo>
+                  <a:pt x="2046" y="2746"/>
+                </a:lnTo>
+                <a:lnTo>
+                  <a:pt x="1953" y="2772"/>
+                </a:lnTo>
+                <a:lnTo>
+                  <a:pt x="1860" y="2798"/>
+                </a:lnTo>
+                <a:lnTo>
+                  <a:pt x="1767" y="2823"/>
+                </a:lnTo>
+                <a:lnTo>
+                  <a:pt x="1674" y="2847"/>
+                </a:lnTo>
+                <a:lnTo>
+                  <a:pt x="1581" y="2872"/>
+                </a:lnTo>
+                <a:lnTo>
+                  <a:pt x="1488" y="2895"/>
+                </a:lnTo>
+                <a:lnTo>
+                  <a:pt x="1395" y="2919"/>
+                </a:lnTo>
+                <a:lnTo>
+                  <a:pt x="1302" y="2941"/>
+                </a:lnTo>
+                <a:lnTo>
+                  <a:pt x="1209" y="2964"/>
+                </a:lnTo>
+                <a:lnTo>
+                  <a:pt x="1116" y="2986"/>
+                </a:lnTo>
+                <a:lnTo>
+                  <a:pt x="1023" y="3007"/>
+                </a:lnTo>
+                <a:lnTo>
+                  <a:pt x="930" y="3028"/>
+                </a:lnTo>
+                <a:lnTo>
+                  <a:pt x="837" y="3048"/>
+                </a:lnTo>
+                <a:lnTo>
+                  <a:pt x="744" y="3068"/>
+                </a:lnTo>
+                <a:lnTo>
+                  <a:pt x="651" y="3088"/>
+                </a:lnTo>
+                <a:lnTo>
+                  <a:pt x="558" y="3107"/>
+                </a:lnTo>
+                <a:lnTo>
+                  <a:pt x="465" y="3125"/>
+                </a:lnTo>
+                <a:lnTo>
+                  <a:pt x="372" y="3143"/>
+                </a:lnTo>
+                <a:lnTo>
+                  <a:pt x="279" y="3161"/>
+                </a:lnTo>
+                <a:lnTo>
+                  <a:pt x="186" y="3178"/>
+                </a:lnTo>
+                <a:lnTo>
+                  <a:pt x="93" y="3195"/>
+                </a:lnTo>
+                <a:lnTo>
+                  <a:pt x="0" y="3211"/>
+                </a:lnTo>
+                <a:lnTo>
+                  <a:pt x="0" y="2697"/>
                 </a:lnTo>
                 <a:close/>
               </a:path>
@@ -4930,8 +4936,8 @@
         </p:nvSpPr>
         <p:spPr>
           <a:xfrm>
-            <a:off x="3885120" y="322560"/>
-            <a:ext cx="1976040" cy="1084680"/>
+            <a:off x="3885120" y="318240"/>
+            <a:ext cx="1975680" cy="1053360"/>
           </a:xfrm>
           <a:custGeom>
             <a:avLst/>
@@ -4939,360 +4945,360 @@
             <a:ahLst/>
             <a:rect l="0" t="0" r="r" b="b"/>
             <a:pathLst>
-              <a:path w="5489" h="3013">
+              <a:path w="5488" h="2926">
                 <a:moveTo>
-                  <a:pt x="0" y="1078"/>
+                  <a:pt x="0" y="828"/>
                 </a:moveTo>
                 <a:lnTo>
-                  <a:pt x="93" y="1091"/>
-                </a:lnTo>
-                <a:lnTo>
-                  <a:pt x="186" y="1105"/>
-                </a:lnTo>
-                <a:lnTo>
-                  <a:pt x="279" y="1117"/>
-                </a:lnTo>
-                <a:lnTo>
-                  <a:pt x="372" y="1130"/>
-                </a:lnTo>
-                <a:lnTo>
-                  <a:pt x="465" y="1141"/>
-                </a:lnTo>
-                <a:lnTo>
-                  <a:pt x="558" y="1153"/>
-                </a:lnTo>
-                <a:lnTo>
-                  <a:pt x="651" y="1164"/>
-                </a:lnTo>
-                <a:lnTo>
-                  <a:pt x="744" y="1174"/>
-                </a:lnTo>
-                <a:lnTo>
-                  <a:pt x="837" y="1184"/>
-                </a:lnTo>
-                <a:lnTo>
-                  <a:pt x="930" y="1194"/>
-                </a:lnTo>
-                <a:lnTo>
-                  <a:pt x="1023" y="1203"/>
-                </a:lnTo>
-                <a:lnTo>
-                  <a:pt x="1116" y="1211"/>
-                </a:lnTo>
-                <a:lnTo>
-                  <a:pt x="1209" y="1219"/>
-                </a:lnTo>
-                <a:lnTo>
-                  <a:pt x="1302" y="1226"/>
-                </a:lnTo>
-                <a:lnTo>
-                  <a:pt x="1395" y="1232"/>
-                </a:lnTo>
-                <a:lnTo>
-                  <a:pt x="1488" y="1237"/>
-                </a:lnTo>
-                <a:lnTo>
-                  <a:pt x="1581" y="1242"/>
-                </a:lnTo>
-                <a:lnTo>
-                  <a:pt x="1674" y="1245"/>
-                </a:lnTo>
-                <a:lnTo>
-                  <a:pt x="1767" y="1248"/>
-                </a:lnTo>
-                <a:lnTo>
-                  <a:pt x="1860" y="1250"/>
-                </a:lnTo>
-                <a:lnTo>
-                  <a:pt x="1953" y="1251"/>
-                </a:lnTo>
-                <a:lnTo>
-                  <a:pt x="2046" y="1250"/>
-                </a:lnTo>
-                <a:lnTo>
-                  <a:pt x="2139" y="1248"/>
-                </a:lnTo>
-                <a:lnTo>
-                  <a:pt x="2232" y="1245"/>
-                </a:lnTo>
-                <a:lnTo>
-                  <a:pt x="2325" y="1240"/>
-                </a:lnTo>
-                <a:lnTo>
-                  <a:pt x="2418" y="1234"/>
-                </a:lnTo>
-                <a:lnTo>
-                  <a:pt x="2511" y="1227"/>
-                </a:lnTo>
-                <a:lnTo>
-                  <a:pt x="2604" y="1217"/>
-                </a:lnTo>
-                <a:lnTo>
-                  <a:pt x="2697" y="1206"/>
-                </a:lnTo>
-                <a:lnTo>
-                  <a:pt x="2790" y="1193"/>
-                </a:lnTo>
-                <a:lnTo>
-                  <a:pt x="2883" y="1179"/>
-                </a:lnTo>
-                <a:lnTo>
-                  <a:pt x="2977" y="1162"/>
-                </a:lnTo>
-                <a:lnTo>
-                  <a:pt x="3070" y="1144"/>
-                </a:lnTo>
-                <a:lnTo>
-                  <a:pt x="3163" y="1123"/>
-                </a:lnTo>
-                <a:lnTo>
-                  <a:pt x="3256" y="1101"/>
-                </a:lnTo>
-                <a:lnTo>
-                  <a:pt x="3349" y="1076"/>
-                </a:lnTo>
-                <a:lnTo>
-                  <a:pt x="3442" y="1050"/>
-                </a:lnTo>
-                <a:lnTo>
-                  <a:pt x="3535" y="1021"/>
-                </a:lnTo>
-                <a:lnTo>
-                  <a:pt x="3628" y="991"/>
-                </a:lnTo>
-                <a:lnTo>
-                  <a:pt x="3721" y="958"/>
-                </a:lnTo>
-                <a:lnTo>
-                  <a:pt x="3814" y="924"/>
-                </a:lnTo>
-                <a:lnTo>
-                  <a:pt x="3907" y="887"/>
-                </a:lnTo>
-                <a:lnTo>
-                  <a:pt x="4001" y="849"/>
-                </a:lnTo>
-                <a:lnTo>
-                  <a:pt x="4094" y="809"/>
-                </a:lnTo>
-                <a:lnTo>
-                  <a:pt x="4187" y="767"/>
-                </a:lnTo>
-                <a:lnTo>
-                  <a:pt x="4280" y="723"/>
-                </a:lnTo>
-                <a:lnTo>
-                  <a:pt x="4373" y="677"/>
-                </a:lnTo>
-                <a:lnTo>
-                  <a:pt x="4466" y="630"/>
-                </a:lnTo>
-                <a:lnTo>
-                  <a:pt x="4559" y="580"/>
-                </a:lnTo>
-                <a:lnTo>
-                  <a:pt x="4652" y="529"/>
-                </a:lnTo>
-                <a:lnTo>
-                  <a:pt x="4745" y="477"/>
-                </a:lnTo>
-                <a:lnTo>
-                  <a:pt x="4838" y="423"/>
-                </a:lnTo>
-                <a:lnTo>
-                  <a:pt x="4931" y="367"/>
-                </a:lnTo>
-                <a:lnTo>
-                  <a:pt x="5024" y="310"/>
-                </a:lnTo>
-                <a:lnTo>
-                  <a:pt x="5117" y="251"/>
-                </a:lnTo>
-                <a:lnTo>
-                  <a:pt x="5210" y="191"/>
-                </a:lnTo>
-                <a:lnTo>
-                  <a:pt x="5303" y="129"/>
-                </a:lnTo>
-                <a:lnTo>
-                  <a:pt x="5396" y="66"/>
-                </a:lnTo>
-                <a:lnTo>
-                  <a:pt x="5489" y="0"/>
-                </a:lnTo>
-                <a:lnTo>
-                  <a:pt x="5489" y="2355"/>
-                </a:lnTo>
-                <a:lnTo>
-                  <a:pt x="5396" y="2348"/>
-                </a:lnTo>
-                <a:lnTo>
-                  <a:pt x="5303" y="2342"/>
-                </a:lnTo>
-                <a:lnTo>
-                  <a:pt x="5210" y="2335"/>
-                </a:lnTo>
-                <a:lnTo>
-                  <a:pt x="5117" y="2329"/>
-                </a:lnTo>
-                <a:lnTo>
-                  <a:pt x="5024" y="2324"/>
-                </a:lnTo>
-                <a:lnTo>
-                  <a:pt x="4931" y="2318"/>
-                </a:lnTo>
-                <a:lnTo>
-                  <a:pt x="4838" y="2313"/>
-                </a:lnTo>
-                <a:lnTo>
-                  <a:pt x="4745" y="2309"/>
-                </a:lnTo>
-                <a:lnTo>
-                  <a:pt x="4652" y="2305"/>
-                </a:lnTo>
-                <a:lnTo>
-                  <a:pt x="4559" y="2301"/>
-                </a:lnTo>
-                <a:lnTo>
-                  <a:pt x="4466" y="2298"/>
-                </a:lnTo>
-                <a:lnTo>
-                  <a:pt x="4373" y="2296"/>
-                </a:lnTo>
-                <a:lnTo>
-                  <a:pt x="4280" y="2294"/>
-                </a:lnTo>
-                <a:lnTo>
-                  <a:pt x="4187" y="2293"/>
-                </a:lnTo>
-                <a:lnTo>
-                  <a:pt x="4094" y="2293"/>
-                </a:lnTo>
-                <a:lnTo>
-                  <a:pt x="4001" y="2294"/>
-                </a:lnTo>
-                <a:lnTo>
-                  <a:pt x="3907" y="2295"/>
-                </a:lnTo>
-                <a:lnTo>
-                  <a:pt x="3814" y="2297"/>
-                </a:lnTo>
-                <a:lnTo>
-                  <a:pt x="3721" y="2300"/>
-                </a:lnTo>
-                <a:lnTo>
-                  <a:pt x="3628" y="2304"/>
-                </a:lnTo>
-                <a:lnTo>
-                  <a:pt x="3535" y="2309"/>
-                </a:lnTo>
-                <a:lnTo>
-                  <a:pt x="3442" y="2316"/>
-                </a:lnTo>
-                <a:lnTo>
-                  <a:pt x="3349" y="2323"/>
-                </a:lnTo>
-                <a:lnTo>
-                  <a:pt x="3256" y="2331"/>
-                </a:lnTo>
-                <a:lnTo>
-                  <a:pt x="3163" y="2341"/>
-                </a:lnTo>
-                <a:lnTo>
-                  <a:pt x="3070" y="2351"/>
-                </a:lnTo>
-                <a:lnTo>
-                  <a:pt x="2977" y="2363"/>
-                </a:lnTo>
-                <a:lnTo>
-                  <a:pt x="2883" y="2375"/>
-                </a:lnTo>
-                <a:lnTo>
-                  <a:pt x="2790" y="2389"/>
-                </a:lnTo>
-                <a:lnTo>
-                  <a:pt x="2697" y="2404"/>
-                </a:lnTo>
-                <a:lnTo>
-                  <a:pt x="2604" y="2420"/>
-                </a:lnTo>
-                <a:lnTo>
-                  <a:pt x="2511" y="2436"/>
-                </a:lnTo>
-                <a:lnTo>
-                  <a:pt x="2418" y="2454"/>
-                </a:lnTo>
-                <a:lnTo>
-                  <a:pt x="2325" y="2472"/>
-                </a:lnTo>
-                <a:lnTo>
-                  <a:pt x="2232" y="2491"/>
-                </a:lnTo>
-                <a:lnTo>
-                  <a:pt x="2139" y="2510"/>
-                </a:lnTo>
-                <a:lnTo>
-                  <a:pt x="2046" y="2531"/>
-                </a:lnTo>
-                <a:lnTo>
-                  <a:pt x="1953" y="2551"/>
-                </a:lnTo>
-                <a:lnTo>
-                  <a:pt x="1860" y="2572"/>
-                </a:lnTo>
-                <a:lnTo>
-                  <a:pt x="1767" y="2594"/>
-                </a:lnTo>
-                <a:lnTo>
-                  <a:pt x="1674" y="2615"/>
-                </a:lnTo>
-                <a:lnTo>
-                  <a:pt x="1581" y="2637"/>
-                </a:lnTo>
-                <a:lnTo>
-                  <a:pt x="1488" y="2660"/>
-                </a:lnTo>
-                <a:lnTo>
-                  <a:pt x="1395" y="2682"/>
-                </a:lnTo>
-                <a:lnTo>
-                  <a:pt x="1302" y="2704"/>
-                </a:lnTo>
-                <a:lnTo>
-                  <a:pt x="1116" y="2750"/>
-                </a:lnTo>
-                <a:lnTo>
-                  <a:pt x="1023" y="2772"/>
-                </a:lnTo>
-                <a:lnTo>
-                  <a:pt x="930" y="2795"/>
-                </a:lnTo>
-                <a:lnTo>
-                  <a:pt x="837" y="2817"/>
-                </a:lnTo>
-                <a:lnTo>
-                  <a:pt x="651" y="2862"/>
-                </a:lnTo>
-                <a:lnTo>
-                  <a:pt x="558" y="2884"/>
-                </a:lnTo>
-                <a:lnTo>
-                  <a:pt x="372" y="2928"/>
-                </a:lnTo>
-                <a:lnTo>
-                  <a:pt x="279" y="2949"/>
-                </a:lnTo>
-                <a:lnTo>
-                  <a:pt x="186" y="2971"/>
-                </a:lnTo>
-                <a:lnTo>
-                  <a:pt x="93" y="2992"/>
-                </a:lnTo>
-                <a:lnTo>
-                  <a:pt x="0" y="3013"/>
-                </a:lnTo>
-                <a:lnTo>
-                  <a:pt x="0" y="1078"/>
+                  <a:pt x="93" y="848"/>
+                </a:lnTo>
+                <a:lnTo>
+                  <a:pt x="186" y="867"/>
+                </a:lnTo>
+                <a:lnTo>
+                  <a:pt x="279" y="885"/>
+                </a:lnTo>
+                <a:lnTo>
+                  <a:pt x="372" y="903"/>
+                </a:lnTo>
+                <a:lnTo>
+                  <a:pt x="465" y="920"/>
+                </a:lnTo>
+                <a:lnTo>
+                  <a:pt x="558" y="937"/>
+                </a:lnTo>
+                <a:lnTo>
+                  <a:pt x="651" y="954"/>
+                </a:lnTo>
+                <a:lnTo>
+                  <a:pt x="744" y="970"/>
+                </a:lnTo>
+                <a:lnTo>
+                  <a:pt x="837" y="985"/>
+                </a:lnTo>
+                <a:lnTo>
+                  <a:pt x="930" y="1000"/>
+                </a:lnTo>
+                <a:lnTo>
+                  <a:pt x="1023" y="1014"/>
+                </a:lnTo>
+                <a:lnTo>
+                  <a:pt x="1116" y="1027"/>
+                </a:lnTo>
+                <a:lnTo>
+                  <a:pt x="1209" y="1040"/>
+                </a:lnTo>
+                <a:lnTo>
+                  <a:pt x="1302" y="1051"/>
+                </a:lnTo>
+                <a:lnTo>
+                  <a:pt x="1395" y="1062"/>
+                </a:lnTo>
+                <a:lnTo>
+                  <a:pt x="1488" y="1072"/>
+                </a:lnTo>
+                <a:lnTo>
+                  <a:pt x="1581" y="1082"/>
+                </a:lnTo>
+                <a:lnTo>
+                  <a:pt x="1674" y="1090"/>
+                </a:lnTo>
+                <a:lnTo>
+                  <a:pt x="1767" y="1097"/>
+                </a:lnTo>
+                <a:lnTo>
+                  <a:pt x="1860" y="1103"/>
+                </a:lnTo>
+                <a:lnTo>
+                  <a:pt x="1953" y="1108"/>
+                </a:lnTo>
+                <a:lnTo>
+                  <a:pt x="2046" y="1111"/>
+                </a:lnTo>
+                <a:lnTo>
+                  <a:pt x="2139" y="1114"/>
+                </a:lnTo>
+                <a:lnTo>
+                  <a:pt x="2232" y="1115"/>
+                </a:lnTo>
+                <a:lnTo>
+                  <a:pt x="2325" y="1114"/>
+                </a:lnTo>
+                <a:lnTo>
+                  <a:pt x="2418" y="1112"/>
+                </a:lnTo>
+                <a:lnTo>
+                  <a:pt x="2511" y="1108"/>
+                </a:lnTo>
+                <a:lnTo>
+                  <a:pt x="2604" y="1102"/>
+                </a:lnTo>
+                <a:lnTo>
+                  <a:pt x="2697" y="1095"/>
+                </a:lnTo>
+                <a:lnTo>
+                  <a:pt x="2790" y="1085"/>
+                </a:lnTo>
+                <a:lnTo>
+                  <a:pt x="2883" y="1074"/>
+                </a:lnTo>
+                <a:lnTo>
+                  <a:pt x="2977" y="1061"/>
+                </a:lnTo>
+                <a:lnTo>
+                  <a:pt x="3070" y="1046"/>
+                </a:lnTo>
+                <a:lnTo>
+                  <a:pt x="3163" y="1029"/>
+                </a:lnTo>
+                <a:lnTo>
+                  <a:pt x="3256" y="1010"/>
+                </a:lnTo>
+                <a:lnTo>
+                  <a:pt x="3349" y="988"/>
+                </a:lnTo>
+                <a:lnTo>
+                  <a:pt x="3442" y="965"/>
+                </a:lnTo>
+                <a:lnTo>
+                  <a:pt x="3535" y="940"/>
+                </a:lnTo>
+                <a:lnTo>
+                  <a:pt x="3628" y="912"/>
+                </a:lnTo>
+                <a:lnTo>
+                  <a:pt x="3721" y="883"/>
+                </a:lnTo>
+                <a:lnTo>
+                  <a:pt x="3814" y="852"/>
+                </a:lnTo>
+                <a:lnTo>
+                  <a:pt x="3907" y="819"/>
+                </a:lnTo>
+                <a:lnTo>
+                  <a:pt x="4000" y="784"/>
+                </a:lnTo>
+                <a:lnTo>
+                  <a:pt x="4093" y="747"/>
+                </a:lnTo>
+                <a:lnTo>
+                  <a:pt x="4186" y="708"/>
+                </a:lnTo>
+                <a:lnTo>
+                  <a:pt x="4279" y="668"/>
+                </a:lnTo>
+                <a:lnTo>
+                  <a:pt x="4372" y="626"/>
+                </a:lnTo>
+                <a:lnTo>
+                  <a:pt x="4465" y="582"/>
+                </a:lnTo>
+                <a:lnTo>
+                  <a:pt x="4558" y="536"/>
+                </a:lnTo>
+                <a:lnTo>
+                  <a:pt x="4651" y="489"/>
+                </a:lnTo>
+                <a:lnTo>
+                  <a:pt x="4744" y="441"/>
+                </a:lnTo>
+                <a:lnTo>
+                  <a:pt x="4837" y="391"/>
+                </a:lnTo>
+                <a:lnTo>
+                  <a:pt x="4930" y="339"/>
+                </a:lnTo>
+                <a:lnTo>
+                  <a:pt x="5023" y="286"/>
+                </a:lnTo>
+                <a:lnTo>
+                  <a:pt x="5116" y="232"/>
+                </a:lnTo>
+                <a:lnTo>
+                  <a:pt x="5209" y="176"/>
+                </a:lnTo>
+                <a:lnTo>
+                  <a:pt x="5302" y="119"/>
+                </a:lnTo>
+                <a:lnTo>
+                  <a:pt x="5395" y="60"/>
+                </a:lnTo>
+                <a:lnTo>
+                  <a:pt x="5488" y="0"/>
+                </a:lnTo>
+                <a:lnTo>
+                  <a:pt x="5488" y="2380"/>
+                </a:lnTo>
+                <a:lnTo>
+                  <a:pt x="5395" y="2370"/>
+                </a:lnTo>
+                <a:lnTo>
+                  <a:pt x="5302" y="2361"/>
+                </a:lnTo>
+                <a:lnTo>
+                  <a:pt x="5209" y="2352"/>
+                </a:lnTo>
+                <a:lnTo>
+                  <a:pt x="5116" y="2343"/>
+                </a:lnTo>
+                <a:lnTo>
+                  <a:pt x="5023" y="2334"/>
+                </a:lnTo>
+                <a:lnTo>
+                  <a:pt x="4930" y="2326"/>
+                </a:lnTo>
+                <a:lnTo>
+                  <a:pt x="4837" y="2319"/>
+                </a:lnTo>
+                <a:lnTo>
+                  <a:pt x="4744" y="2311"/>
+                </a:lnTo>
+                <a:lnTo>
+                  <a:pt x="4651" y="2304"/>
+                </a:lnTo>
+                <a:lnTo>
+                  <a:pt x="4558" y="2298"/>
+                </a:lnTo>
+                <a:lnTo>
+                  <a:pt x="4465" y="2292"/>
+                </a:lnTo>
+                <a:lnTo>
+                  <a:pt x="4372" y="2287"/>
+                </a:lnTo>
+                <a:lnTo>
+                  <a:pt x="4279" y="2282"/>
+                </a:lnTo>
+                <a:lnTo>
+                  <a:pt x="4186" y="2278"/>
+                </a:lnTo>
+                <a:lnTo>
+                  <a:pt x="4093" y="2275"/>
+                </a:lnTo>
+                <a:lnTo>
+                  <a:pt x="4000" y="2272"/>
+                </a:lnTo>
+                <a:lnTo>
+                  <a:pt x="3907" y="2271"/>
+                </a:lnTo>
+                <a:lnTo>
+                  <a:pt x="3814" y="2270"/>
+                </a:lnTo>
+                <a:lnTo>
+                  <a:pt x="3721" y="2270"/>
+                </a:lnTo>
+                <a:lnTo>
+                  <a:pt x="3628" y="2272"/>
+                </a:lnTo>
+                <a:lnTo>
+                  <a:pt x="3535" y="2274"/>
+                </a:lnTo>
+                <a:lnTo>
+                  <a:pt x="3442" y="2277"/>
+                </a:lnTo>
+                <a:lnTo>
+                  <a:pt x="3349" y="2282"/>
+                </a:lnTo>
+                <a:lnTo>
+                  <a:pt x="3256" y="2287"/>
+                </a:lnTo>
+                <a:lnTo>
+                  <a:pt x="3163" y="2294"/>
+                </a:lnTo>
+                <a:lnTo>
+                  <a:pt x="3070" y="2302"/>
+                </a:lnTo>
+                <a:lnTo>
+                  <a:pt x="2977" y="2311"/>
+                </a:lnTo>
+                <a:lnTo>
+                  <a:pt x="2883" y="2322"/>
+                </a:lnTo>
+                <a:lnTo>
+                  <a:pt x="2790" y="2333"/>
+                </a:lnTo>
+                <a:lnTo>
+                  <a:pt x="2697" y="2346"/>
+                </a:lnTo>
+                <a:lnTo>
+                  <a:pt x="2604" y="2359"/>
+                </a:lnTo>
+                <a:lnTo>
+                  <a:pt x="2511" y="2374"/>
+                </a:lnTo>
+                <a:lnTo>
+                  <a:pt x="2418" y="2389"/>
+                </a:lnTo>
+                <a:lnTo>
+                  <a:pt x="2325" y="2406"/>
+                </a:lnTo>
+                <a:lnTo>
+                  <a:pt x="2232" y="2423"/>
+                </a:lnTo>
+                <a:lnTo>
+                  <a:pt x="2139" y="2441"/>
+                </a:lnTo>
+                <a:lnTo>
+                  <a:pt x="2046" y="2459"/>
+                </a:lnTo>
+                <a:lnTo>
+                  <a:pt x="1953" y="2479"/>
+                </a:lnTo>
+                <a:lnTo>
+                  <a:pt x="1860" y="2498"/>
+                </a:lnTo>
+                <a:lnTo>
+                  <a:pt x="1767" y="2518"/>
+                </a:lnTo>
+                <a:lnTo>
+                  <a:pt x="1674" y="2539"/>
+                </a:lnTo>
+                <a:lnTo>
+                  <a:pt x="1581" y="2560"/>
+                </a:lnTo>
+                <a:lnTo>
+                  <a:pt x="1488" y="2581"/>
+                </a:lnTo>
+                <a:lnTo>
+                  <a:pt x="1395" y="2602"/>
+                </a:lnTo>
+                <a:lnTo>
+                  <a:pt x="1209" y="2646"/>
+                </a:lnTo>
+                <a:lnTo>
+                  <a:pt x="1116" y="2667"/>
+                </a:lnTo>
+                <a:lnTo>
+                  <a:pt x="930" y="2711"/>
+                </a:lnTo>
+                <a:lnTo>
+                  <a:pt x="837" y="2733"/>
+                </a:lnTo>
+                <a:lnTo>
+                  <a:pt x="744" y="2755"/>
+                </a:lnTo>
+                <a:lnTo>
+                  <a:pt x="651" y="2777"/>
+                </a:lnTo>
+                <a:lnTo>
+                  <a:pt x="465" y="2820"/>
+                </a:lnTo>
+                <a:lnTo>
+                  <a:pt x="372" y="2841"/>
+                </a:lnTo>
+                <a:lnTo>
+                  <a:pt x="279" y="2863"/>
+                </a:lnTo>
+                <a:lnTo>
+                  <a:pt x="186" y="2884"/>
+                </a:lnTo>
+                <a:lnTo>
+                  <a:pt x="93" y="2905"/>
+                </a:lnTo>
+                <a:lnTo>
+                  <a:pt x="0" y="2926"/>
+                </a:lnTo>
+                <a:lnTo>
+                  <a:pt x="0" y="828"/>
                 </a:lnTo>
                 <a:close/>
               </a:path>
@@ -5331,8 +5337,8 @@
         </p:nvSpPr>
         <p:spPr>
           <a:xfrm>
-            <a:off x="3885120" y="879120"/>
-            <a:ext cx="1976040" cy="882360"/>
+            <a:off x="3885120" y="865800"/>
+            <a:ext cx="1975680" cy="902160"/>
           </a:xfrm>
           <a:custGeom>
             <a:avLst/>
@@ -5340,186 +5346,186 @@
             <a:ahLst/>
             <a:rect l="0" t="0" r="r" b="b"/>
             <a:pathLst>
-              <a:path fill="none" w="5489" h="2451">
+              <a:path fill="none" w="5488" h="2506">
                 <a:moveTo>
-                  <a:pt x="0" y="2451"/>
+                  <a:pt x="0" y="2506"/>
                 </a:moveTo>
                 <a:lnTo>
-                  <a:pt x="93" y="2438"/>
-                </a:lnTo>
-                <a:lnTo>
-                  <a:pt x="186" y="2426"/>
-                </a:lnTo>
-                <a:lnTo>
-                  <a:pt x="279" y="2413"/>
-                </a:lnTo>
-                <a:lnTo>
-                  <a:pt x="372" y="2399"/>
-                </a:lnTo>
-                <a:lnTo>
-                  <a:pt x="465" y="2385"/>
-                </a:lnTo>
-                <a:lnTo>
-                  <a:pt x="558" y="2370"/>
-                </a:lnTo>
-                <a:lnTo>
-                  <a:pt x="651" y="2355"/>
-                </a:lnTo>
-                <a:lnTo>
-                  <a:pt x="744" y="2339"/>
-                </a:lnTo>
-                <a:lnTo>
-                  <a:pt x="837" y="2323"/>
-                </a:lnTo>
-                <a:lnTo>
-                  <a:pt x="930" y="2306"/>
-                </a:lnTo>
-                <a:lnTo>
-                  <a:pt x="1023" y="2289"/>
-                </a:lnTo>
-                <a:lnTo>
-                  <a:pt x="1116" y="2271"/>
-                </a:lnTo>
-                <a:lnTo>
-                  <a:pt x="1209" y="2252"/>
-                </a:lnTo>
-                <a:lnTo>
-                  <a:pt x="1302" y="2232"/>
-                </a:lnTo>
-                <a:lnTo>
-                  <a:pt x="1395" y="2212"/>
-                </a:lnTo>
-                <a:lnTo>
-                  <a:pt x="1488" y="2191"/>
-                </a:lnTo>
-                <a:lnTo>
-                  <a:pt x="1581" y="2170"/>
-                </a:lnTo>
-                <a:lnTo>
-                  <a:pt x="1674" y="2147"/>
-                </a:lnTo>
-                <a:lnTo>
-                  <a:pt x="1767" y="2124"/>
-                </a:lnTo>
-                <a:lnTo>
-                  <a:pt x="1860" y="2100"/>
-                </a:lnTo>
-                <a:lnTo>
-                  <a:pt x="1953" y="2074"/>
-                </a:lnTo>
-                <a:lnTo>
-                  <a:pt x="2046" y="2049"/>
-                </a:lnTo>
-                <a:lnTo>
-                  <a:pt x="2139" y="2022"/>
-                </a:lnTo>
-                <a:lnTo>
-                  <a:pt x="2232" y="1994"/>
-                </a:lnTo>
-                <a:lnTo>
-                  <a:pt x="2325" y="1965"/>
-                </a:lnTo>
-                <a:lnTo>
-                  <a:pt x="2418" y="1935"/>
-                </a:lnTo>
-                <a:lnTo>
-                  <a:pt x="2511" y="1904"/>
-                </a:lnTo>
-                <a:lnTo>
-                  <a:pt x="2604" y="1871"/>
-                </a:lnTo>
-                <a:lnTo>
-                  <a:pt x="2697" y="1838"/>
-                </a:lnTo>
-                <a:lnTo>
-                  <a:pt x="2790" y="1803"/>
-                </a:lnTo>
-                <a:lnTo>
-                  <a:pt x="2883" y="1767"/>
-                </a:lnTo>
-                <a:lnTo>
-                  <a:pt x="2977" y="1730"/>
-                </a:lnTo>
-                <a:lnTo>
-                  <a:pt x="3070" y="1692"/>
-                </a:lnTo>
-                <a:lnTo>
-                  <a:pt x="3163" y="1652"/>
-                </a:lnTo>
-                <a:lnTo>
-                  <a:pt x="3256" y="1610"/>
-                </a:lnTo>
-                <a:lnTo>
-                  <a:pt x="3349" y="1567"/>
-                </a:lnTo>
-                <a:lnTo>
-                  <a:pt x="3442" y="1522"/>
-                </a:lnTo>
-                <a:lnTo>
-                  <a:pt x="3535" y="1476"/>
-                </a:lnTo>
-                <a:lnTo>
-                  <a:pt x="3628" y="1428"/>
-                </a:lnTo>
-                <a:lnTo>
-                  <a:pt x="3721" y="1379"/>
-                </a:lnTo>
-                <a:lnTo>
-                  <a:pt x="3814" y="1327"/>
-                </a:lnTo>
-                <a:lnTo>
-                  <a:pt x="3907" y="1274"/>
-                </a:lnTo>
-                <a:lnTo>
-                  <a:pt x="4001" y="1218"/>
-                </a:lnTo>
-                <a:lnTo>
-                  <a:pt x="4094" y="1160"/>
-                </a:lnTo>
-                <a:lnTo>
-                  <a:pt x="4187" y="1101"/>
-                </a:lnTo>
-                <a:lnTo>
-                  <a:pt x="4280" y="1039"/>
-                </a:lnTo>
-                <a:lnTo>
-                  <a:pt x="4373" y="975"/>
-                </a:lnTo>
-                <a:lnTo>
-                  <a:pt x="4466" y="909"/>
-                </a:lnTo>
-                <a:lnTo>
-                  <a:pt x="4559" y="841"/>
-                </a:lnTo>
-                <a:lnTo>
-                  <a:pt x="4652" y="770"/>
-                </a:lnTo>
-                <a:lnTo>
-                  <a:pt x="4745" y="696"/>
-                </a:lnTo>
-                <a:lnTo>
-                  <a:pt x="4838" y="620"/>
-                </a:lnTo>
-                <a:lnTo>
-                  <a:pt x="4931" y="540"/>
-                </a:lnTo>
-                <a:lnTo>
-                  <a:pt x="5024" y="458"/>
-                </a:lnTo>
-                <a:lnTo>
-                  <a:pt x="5117" y="373"/>
-                </a:lnTo>
-                <a:lnTo>
-                  <a:pt x="5210" y="285"/>
-                </a:lnTo>
-                <a:lnTo>
-                  <a:pt x="5303" y="193"/>
-                </a:lnTo>
-                <a:lnTo>
-                  <a:pt x="5396" y="99"/>
-                </a:lnTo>
-                <a:lnTo>
-                  <a:pt x="5489" y="0"/>
+                  <a:pt x="93" y="2494"/>
+                </a:lnTo>
+                <a:lnTo>
+                  <a:pt x="186" y="2482"/>
+                </a:lnTo>
+                <a:lnTo>
+                  <a:pt x="279" y="2469"/>
+                </a:lnTo>
+                <a:lnTo>
+                  <a:pt x="372" y="2456"/>
+                </a:lnTo>
+                <a:lnTo>
+                  <a:pt x="465" y="2442"/>
+                </a:lnTo>
+                <a:lnTo>
+                  <a:pt x="558" y="2427"/>
+                </a:lnTo>
+                <a:lnTo>
+                  <a:pt x="651" y="2413"/>
+                </a:lnTo>
+                <a:lnTo>
+                  <a:pt x="744" y="2397"/>
+                </a:lnTo>
+                <a:lnTo>
+                  <a:pt x="837" y="2381"/>
+                </a:lnTo>
+                <a:lnTo>
+                  <a:pt x="930" y="2364"/>
+                </a:lnTo>
+                <a:lnTo>
+                  <a:pt x="1023" y="2347"/>
+                </a:lnTo>
+                <a:lnTo>
+                  <a:pt x="1116" y="2329"/>
+                </a:lnTo>
+                <a:lnTo>
+                  <a:pt x="1209" y="2310"/>
+                </a:lnTo>
+                <a:lnTo>
+                  <a:pt x="1302" y="2291"/>
+                </a:lnTo>
+                <a:lnTo>
+                  <a:pt x="1395" y="2271"/>
+                </a:lnTo>
+                <a:lnTo>
+                  <a:pt x="1488" y="2250"/>
+                </a:lnTo>
+                <a:lnTo>
+                  <a:pt x="1581" y="2229"/>
+                </a:lnTo>
+                <a:lnTo>
+                  <a:pt x="1674" y="2206"/>
+                </a:lnTo>
+                <a:lnTo>
+                  <a:pt x="1767" y="2183"/>
+                </a:lnTo>
+                <a:lnTo>
+                  <a:pt x="1860" y="2159"/>
+                </a:lnTo>
+                <a:lnTo>
+                  <a:pt x="1953" y="2134"/>
+                </a:lnTo>
+                <a:lnTo>
+                  <a:pt x="2046" y="2108"/>
+                </a:lnTo>
+                <a:lnTo>
+                  <a:pt x="2139" y="2081"/>
+                </a:lnTo>
+                <a:lnTo>
+                  <a:pt x="2232" y="2053"/>
+                </a:lnTo>
+                <a:lnTo>
+                  <a:pt x="2325" y="2024"/>
+                </a:lnTo>
+                <a:lnTo>
+                  <a:pt x="2418" y="1993"/>
+                </a:lnTo>
+                <a:lnTo>
+                  <a:pt x="2511" y="1962"/>
+                </a:lnTo>
+                <a:lnTo>
+                  <a:pt x="2604" y="1930"/>
+                </a:lnTo>
+                <a:lnTo>
+                  <a:pt x="2697" y="1896"/>
+                </a:lnTo>
+                <a:lnTo>
+                  <a:pt x="2790" y="1861"/>
+                </a:lnTo>
+                <a:lnTo>
+                  <a:pt x="2883" y="1824"/>
+                </a:lnTo>
+                <a:lnTo>
+                  <a:pt x="2977" y="1787"/>
+                </a:lnTo>
+                <a:lnTo>
+                  <a:pt x="3070" y="1748"/>
+                </a:lnTo>
+                <a:lnTo>
+                  <a:pt x="3163" y="1707"/>
+                </a:lnTo>
+                <a:lnTo>
+                  <a:pt x="3256" y="1665"/>
+                </a:lnTo>
+                <a:lnTo>
+                  <a:pt x="3349" y="1621"/>
+                </a:lnTo>
+                <a:lnTo>
+                  <a:pt x="3442" y="1575"/>
+                </a:lnTo>
+                <a:lnTo>
+                  <a:pt x="3535" y="1528"/>
+                </a:lnTo>
+                <a:lnTo>
+                  <a:pt x="3628" y="1479"/>
+                </a:lnTo>
+                <a:lnTo>
+                  <a:pt x="3721" y="1429"/>
+                </a:lnTo>
+                <a:lnTo>
+                  <a:pt x="3814" y="1376"/>
+                </a:lnTo>
+                <a:lnTo>
+                  <a:pt x="3907" y="1320"/>
+                </a:lnTo>
+                <a:lnTo>
+                  <a:pt x="4000" y="1263"/>
+                </a:lnTo>
+                <a:lnTo>
+                  <a:pt x="4093" y="1205"/>
+                </a:lnTo>
+                <a:lnTo>
+                  <a:pt x="4186" y="1143"/>
+                </a:lnTo>
+                <a:lnTo>
+                  <a:pt x="4279" y="1080"/>
+                </a:lnTo>
+                <a:lnTo>
+                  <a:pt x="4372" y="1014"/>
+                </a:lnTo>
+                <a:lnTo>
+                  <a:pt x="4465" y="946"/>
+                </a:lnTo>
+                <a:lnTo>
+                  <a:pt x="4558" y="875"/>
+                </a:lnTo>
+                <a:lnTo>
+                  <a:pt x="4651" y="801"/>
+                </a:lnTo>
+                <a:lnTo>
+                  <a:pt x="4744" y="725"/>
+                </a:lnTo>
+                <a:lnTo>
+                  <a:pt x="4837" y="645"/>
+                </a:lnTo>
+                <a:lnTo>
+                  <a:pt x="4930" y="563"/>
+                </a:lnTo>
+                <a:lnTo>
+                  <a:pt x="5023" y="478"/>
+                </a:lnTo>
+                <a:lnTo>
+                  <a:pt x="5116" y="389"/>
+                </a:lnTo>
+                <a:lnTo>
+                  <a:pt x="5209" y="297"/>
+                </a:lnTo>
+                <a:lnTo>
+                  <a:pt x="5302" y="202"/>
+                </a:lnTo>
+                <a:lnTo>
+                  <a:pt x="5395" y="103"/>
+                </a:lnTo>
+                <a:lnTo>
+                  <a:pt x="5488" y="0"/>
                 </a:lnTo>
               </a:path>
             </a:pathLst>
@@ -5555,8 +5561,8 @@
         </p:nvSpPr>
         <p:spPr>
           <a:xfrm>
-            <a:off x="3885120" y="855360"/>
-            <a:ext cx="1976040" cy="739800"/>
+            <a:off x="3885120" y="849240"/>
+            <a:ext cx="1975680" cy="748440"/>
           </a:xfrm>
           <a:custGeom>
             <a:avLst/>
@@ -5564,186 +5570,186 @@
             <a:ahLst/>
             <a:rect l="0" t="0" r="r" b="b"/>
             <a:pathLst>
-              <a:path fill="none" w="5489" h="2055">
+              <a:path fill="none" w="5488" h="2079">
                 <a:moveTo>
-                  <a:pt x="0" y="2055"/>
+                  <a:pt x="0" y="2079"/>
                 </a:moveTo>
                 <a:lnTo>
-                  <a:pt x="93" y="2037"/>
-                </a:lnTo>
-                <a:lnTo>
-                  <a:pt x="186" y="2020"/>
-                </a:lnTo>
-                <a:lnTo>
-                  <a:pt x="279" y="2001"/>
-                </a:lnTo>
-                <a:lnTo>
-                  <a:pt x="372" y="1983"/>
-                </a:lnTo>
-                <a:lnTo>
-                  <a:pt x="465" y="1964"/>
-                </a:lnTo>
-                <a:lnTo>
-                  <a:pt x="558" y="1945"/>
-                </a:lnTo>
-                <a:lnTo>
-                  <a:pt x="651" y="1925"/>
-                </a:lnTo>
-                <a:lnTo>
-                  <a:pt x="744" y="1905"/>
-                </a:lnTo>
-                <a:lnTo>
-                  <a:pt x="837" y="1884"/>
-                </a:lnTo>
-                <a:lnTo>
-                  <a:pt x="930" y="1863"/>
-                </a:lnTo>
-                <a:lnTo>
-                  <a:pt x="1023" y="1841"/>
-                </a:lnTo>
-                <a:lnTo>
-                  <a:pt x="1116" y="1819"/>
-                </a:lnTo>
-                <a:lnTo>
-                  <a:pt x="1209" y="1797"/>
-                </a:lnTo>
-                <a:lnTo>
-                  <a:pt x="1302" y="1773"/>
-                </a:lnTo>
-                <a:lnTo>
-                  <a:pt x="1395" y="1750"/>
-                </a:lnTo>
-                <a:lnTo>
-                  <a:pt x="1488" y="1726"/>
-                </a:lnTo>
-                <a:lnTo>
-                  <a:pt x="1581" y="1701"/>
-                </a:lnTo>
-                <a:lnTo>
-                  <a:pt x="1674" y="1676"/>
-                </a:lnTo>
-                <a:lnTo>
-                  <a:pt x="1767" y="1650"/>
-                </a:lnTo>
-                <a:lnTo>
-                  <a:pt x="1860" y="1624"/>
-                </a:lnTo>
-                <a:lnTo>
-                  <a:pt x="1953" y="1597"/>
-                </a:lnTo>
-                <a:lnTo>
-                  <a:pt x="2046" y="1570"/>
-                </a:lnTo>
-                <a:lnTo>
-                  <a:pt x="2139" y="1542"/>
-                </a:lnTo>
-                <a:lnTo>
-                  <a:pt x="2232" y="1513"/>
-                </a:lnTo>
-                <a:lnTo>
-                  <a:pt x="2325" y="1484"/>
-                </a:lnTo>
-                <a:lnTo>
-                  <a:pt x="2418" y="1454"/>
-                </a:lnTo>
-                <a:lnTo>
-                  <a:pt x="2511" y="1424"/>
-                </a:lnTo>
-                <a:lnTo>
-                  <a:pt x="2604" y="1393"/>
-                </a:lnTo>
-                <a:lnTo>
-                  <a:pt x="2697" y="1361"/>
-                </a:lnTo>
-                <a:lnTo>
-                  <a:pt x="2790" y="1328"/>
-                </a:lnTo>
-                <a:lnTo>
-                  <a:pt x="2883" y="1295"/>
-                </a:lnTo>
-                <a:lnTo>
-                  <a:pt x="2977" y="1261"/>
-                </a:lnTo>
-                <a:lnTo>
-                  <a:pt x="3070" y="1226"/>
-                </a:lnTo>
-                <a:lnTo>
-                  <a:pt x="3163" y="1191"/>
-                </a:lnTo>
-                <a:lnTo>
-                  <a:pt x="3256" y="1154"/>
-                </a:lnTo>
-                <a:lnTo>
-                  <a:pt x="3349" y="1117"/>
-                </a:lnTo>
-                <a:lnTo>
-                  <a:pt x="3442" y="1079"/>
-                </a:lnTo>
-                <a:lnTo>
-                  <a:pt x="3535" y="1041"/>
-                </a:lnTo>
-                <a:lnTo>
-                  <a:pt x="3628" y="1001"/>
-                </a:lnTo>
-                <a:lnTo>
-                  <a:pt x="3721" y="961"/>
-                </a:lnTo>
-                <a:lnTo>
-                  <a:pt x="3814" y="919"/>
-                </a:lnTo>
-                <a:lnTo>
-                  <a:pt x="3907" y="877"/>
-                </a:lnTo>
-                <a:lnTo>
-                  <a:pt x="4001" y="834"/>
-                </a:lnTo>
-                <a:lnTo>
-                  <a:pt x="4094" y="790"/>
-                </a:lnTo>
-                <a:lnTo>
-                  <a:pt x="4187" y="745"/>
-                </a:lnTo>
-                <a:lnTo>
-                  <a:pt x="4280" y="698"/>
-                </a:lnTo>
-                <a:lnTo>
-                  <a:pt x="4373" y="651"/>
-                </a:lnTo>
-                <a:lnTo>
-                  <a:pt x="4466" y="603"/>
-                </a:lnTo>
-                <a:lnTo>
-                  <a:pt x="4559" y="554"/>
-                </a:lnTo>
-                <a:lnTo>
-                  <a:pt x="4652" y="504"/>
-                </a:lnTo>
-                <a:lnTo>
-                  <a:pt x="4745" y="452"/>
-                </a:lnTo>
-                <a:lnTo>
-                  <a:pt x="4838" y="400"/>
-                </a:lnTo>
-                <a:lnTo>
-                  <a:pt x="4931" y="346"/>
-                </a:lnTo>
-                <a:lnTo>
-                  <a:pt x="5024" y="292"/>
-                </a:lnTo>
-                <a:lnTo>
-                  <a:pt x="5117" y="236"/>
-                </a:lnTo>
-                <a:lnTo>
-                  <a:pt x="5210" y="179"/>
-                </a:lnTo>
-                <a:lnTo>
-                  <a:pt x="5303" y="120"/>
-                </a:lnTo>
-                <a:lnTo>
-                  <a:pt x="5396" y="61"/>
-                </a:lnTo>
-                <a:lnTo>
-                  <a:pt x="5489" y="0"/>
+                  <a:pt x="93" y="2062"/>
+                </a:lnTo>
+                <a:lnTo>
+                  <a:pt x="186" y="2044"/>
+                </a:lnTo>
+                <a:lnTo>
+                  <a:pt x="279" y="2026"/>
+                </a:lnTo>
+                <a:lnTo>
+                  <a:pt x="372" y="2007"/>
+                </a:lnTo>
+                <a:lnTo>
+                  <a:pt x="465" y="1988"/>
+                </a:lnTo>
+                <a:lnTo>
+                  <a:pt x="558" y="1969"/>
+                </a:lnTo>
+                <a:lnTo>
+                  <a:pt x="651" y="1949"/>
+                </a:lnTo>
+                <a:lnTo>
+                  <a:pt x="744" y="1928"/>
+                </a:lnTo>
+                <a:lnTo>
+                  <a:pt x="837" y="1908"/>
+                </a:lnTo>
+                <a:lnTo>
+                  <a:pt x="930" y="1886"/>
+                </a:lnTo>
+                <a:lnTo>
+                  <a:pt x="1023" y="1865"/>
+                </a:lnTo>
+                <a:lnTo>
+                  <a:pt x="1116" y="1843"/>
+                </a:lnTo>
+                <a:lnTo>
+                  <a:pt x="1209" y="1820"/>
+                </a:lnTo>
+                <a:lnTo>
+                  <a:pt x="1302" y="1797"/>
+                </a:lnTo>
+                <a:lnTo>
+                  <a:pt x="1395" y="1773"/>
+                </a:lnTo>
+                <a:lnTo>
+                  <a:pt x="1488" y="1749"/>
+                </a:lnTo>
+                <a:lnTo>
+                  <a:pt x="1581" y="1724"/>
+                </a:lnTo>
+                <a:lnTo>
+                  <a:pt x="1674" y="1699"/>
+                </a:lnTo>
+                <a:lnTo>
+                  <a:pt x="1767" y="1673"/>
+                </a:lnTo>
+                <a:lnTo>
+                  <a:pt x="1860" y="1646"/>
+                </a:lnTo>
+                <a:lnTo>
+                  <a:pt x="1953" y="1619"/>
+                </a:lnTo>
+                <a:lnTo>
+                  <a:pt x="2046" y="1592"/>
+                </a:lnTo>
+                <a:lnTo>
+                  <a:pt x="2139" y="1564"/>
+                </a:lnTo>
+                <a:lnTo>
+                  <a:pt x="2232" y="1535"/>
+                </a:lnTo>
+                <a:lnTo>
+                  <a:pt x="2325" y="1505"/>
+                </a:lnTo>
+                <a:lnTo>
+                  <a:pt x="2418" y="1475"/>
+                </a:lnTo>
+                <a:lnTo>
+                  <a:pt x="2511" y="1444"/>
+                </a:lnTo>
+                <a:lnTo>
+                  <a:pt x="2604" y="1413"/>
+                </a:lnTo>
+                <a:lnTo>
+                  <a:pt x="2697" y="1381"/>
+                </a:lnTo>
+                <a:lnTo>
+                  <a:pt x="2790" y="1348"/>
+                </a:lnTo>
+                <a:lnTo>
+                  <a:pt x="2883" y="1314"/>
+                </a:lnTo>
+                <a:lnTo>
+                  <a:pt x="2977" y="1280"/>
+                </a:lnTo>
+                <a:lnTo>
+                  <a:pt x="3070" y="1245"/>
+                </a:lnTo>
+                <a:lnTo>
+                  <a:pt x="3163" y="1209"/>
+                </a:lnTo>
+                <a:lnTo>
+                  <a:pt x="3256" y="1172"/>
+                </a:lnTo>
+                <a:lnTo>
+                  <a:pt x="3349" y="1134"/>
+                </a:lnTo>
+                <a:lnTo>
+                  <a:pt x="3442" y="1096"/>
+                </a:lnTo>
+                <a:lnTo>
+                  <a:pt x="3535" y="1057"/>
+                </a:lnTo>
+                <a:lnTo>
+                  <a:pt x="3628" y="1017"/>
+                </a:lnTo>
+                <a:lnTo>
+                  <a:pt x="3721" y="976"/>
+                </a:lnTo>
+                <a:lnTo>
+                  <a:pt x="3814" y="934"/>
+                </a:lnTo>
+                <a:lnTo>
+                  <a:pt x="3907" y="891"/>
+                </a:lnTo>
+                <a:lnTo>
+                  <a:pt x="4000" y="848"/>
+                </a:lnTo>
+                <a:lnTo>
+                  <a:pt x="4093" y="803"/>
+                </a:lnTo>
+                <a:lnTo>
+                  <a:pt x="4186" y="756"/>
+                </a:lnTo>
+                <a:lnTo>
+                  <a:pt x="4279" y="710"/>
+                </a:lnTo>
+                <a:lnTo>
+                  <a:pt x="4372" y="662"/>
+                </a:lnTo>
+                <a:lnTo>
+                  <a:pt x="4465" y="613"/>
+                </a:lnTo>
+                <a:lnTo>
+                  <a:pt x="4558" y="563"/>
+                </a:lnTo>
+                <a:lnTo>
+                  <a:pt x="4651" y="512"/>
+                </a:lnTo>
+                <a:lnTo>
+                  <a:pt x="4744" y="460"/>
+                </a:lnTo>
+                <a:lnTo>
+                  <a:pt x="4837" y="407"/>
+                </a:lnTo>
+                <a:lnTo>
+                  <a:pt x="4930" y="353"/>
+                </a:lnTo>
+                <a:lnTo>
+                  <a:pt x="5023" y="297"/>
+                </a:lnTo>
+                <a:lnTo>
+                  <a:pt x="5116" y="240"/>
+                </a:lnTo>
+                <a:lnTo>
+                  <a:pt x="5209" y="182"/>
+                </a:lnTo>
+                <a:lnTo>
+                  <a:pt x="5302" y="123"/>
+                </a:lnTo>
+                <a:lnTo>
+                  <a:pt x="5395" y="62"/>
+                </a:lnTo>
+                <a:lnTo>
+                  <a:pt x="5488" y="0"/>
                 </a:lnTo>
               </a:path>
             </a:pathLst>
@@ -5779,8 +5785,8 @@
         </p:nvSpPr>
         <p:spPr>
           <a:xfrm>
-            <a:off x="3885120" y="828360"/>
-            <a:ext cx="1976040" cy="307800"/>
+            <a:off x="3885120" y="830160"/>
+            <a:ext cx="1975680" cy="248040"/>
           </a:xfrm>
           <a:custGeom>
             <a:avLst/>
@@ -5788,117 +5794,102 @@
             <a:ahLst/>
             <a:rect l="0" t="0" r="r" b="b"/>
             <a:pathLst>
-              <a:path fill="none" w="5489" h="855">
+              <a:path fill="none" w="5488" h="689">
                 <a:moveTo>
-                  <a:pt x="0" y="855"/>
+                  <a:pt x="0" y="689"/>
                 </a:moveTo>
                 <a:lnTo>
-                  <a:pt x="279" y="819"/>
-                </a:lnTo>
-                <a:lnTo>
-                  <a:pt x="465" y="794"/>
-                </a:lnTo>
-                <a:lnTo>
-                  <a:pt x="651" y="769"/>
-                </a:lnTo>
-                <a:lnTo>
-                  <a:pt x="744" y="756"/>
-                </a:lnTo>
-                <a:lnTo>
-                  <a:pt x="930" y="730"/>
-                </a:lnTo>
-                <a:lnTo>
-                  <a:pt x="1116" y="705"/>
-                </a:lnTo>
-                <a:lnTo>
-                  <a:pt x="1302" y="677"/>
-                </a:lnTo>
-                <a:lnTo>
-                  <a:pt x="1488" y="651"/>
-                </a:lnTo>
-                <a:lnTo>
-                  <a:pt x="1581" y="638"/>
-                </a:lnTo>
-                <a:lnTo>
-                  <a:pt x="1674" y="624"/>
-                </a:lnTo>
-                <a:lnTo>
-                  <a:pt x="1767" y="611"/>
-                </a:lnTo>
-                <a:lnTo>
-                  <a:pt x="1860" y="597"/>
-                </a:lnTo>
-                <a:lnTo>
-                  <a:pt x="1953" y="583"/>
-                </a:lnTo>
-                <a:lnTo>
-                  <a:pt x="2046" y="570"/>
-                </a:lnTo>
-                <a:lnTo>
-                  <a:pt x="2325" y="528"/>
-                </a:lnTo>
-                <a:lnTo>
-                  <a:pt x="2418" y="514"/>
-                </a:lnTo>
-                <a:lnTo>
-                  <a:pt x="2511" y="500"/>
-                </a:lnTo>
-                <a:lnTo>
-                  <a:pt x="2790" y="457"/>
-                </a:lnTo>
-                <a:lnTo>
-                  <a:pt x="3070" y="413"/>
-                </a:lnTo>
-                <a:lnTo>
-                  <a:pt x="3163" y="398"/>
-                </a:lnTo>
-                <a:lnTo>
-                  <a:pt x="3349" y="368"/>
-                </a:lnTo>
-                <a:lnTo>
-                  <a:pt x="3442" y="353"/>
-                </a:lnTo>
-                <a:lnTo>
-                  <a:pt x="3628" y="323"/>
-                </a:lnTo>
-                <a:lnTo>
-                  <a:pt x="3721" y="308"/>
-                </a:lnTo>
-                <a:lnTo>
-                  <a:pt x="3907" y="277"/>
-                </a:lnTo>
-                <a:lnTo>
-                  <a:pt x="4094" y="246"/>
-                </a:lnTo>
-                <a:lnTo>
-                  <a:pt x="4187" y="230"/>
-                </a:lnTo>
-                <a:lnTo>
-                  <a:pt x="4280" y="214"/>
-                </a:lnTo>
-                <a:lnTo>
-                  <a:pt x="4466" y="182"/>
-                </a:lnTo>
-                <a:lnTo>
-                  <a:pt x="4559" y="166"/>
-                </a:lnTo>
-                <a:lnTo>
-                  <a:pt x="4745" y="133"/>
-                </a:lnTo>
-                <a:lnTo>
-                  <a:pt x="4838" y="117"/>
-                </a:lnTo>
-                <a:lnTo>
-                  <a:pt x="5024" y="84"/>
-                </a:lnTo>
-                <a:lnTo>
-                  <a:pt x="5117" y="67"/>
-                </a:lnTo>
-                <a:lnTo>
-                  <a:pt x="5303" y="34"/>
-                </a:lnTo>
-                <a:lnTo>
-                  <a:pt x="5489" y="0"/>
+                  <a:pt x="186" y="669"/>
+                </a:lnTo>
+                <a:lnTo>
+                  <a:pt x="465" y="638"/>
+                </a:lnTo>
+                <a:lnTo>
+                  <a:pt x="744" y="606"/>
+                </a:lnTo>
+                <a:lnTo>
+                  <a:pt x="1023" y="574"/>
+                </a:lnTo>
+                <a:lnTo>
+                  <a:pt x="1209" y="553"/>
+                </a:lnTo>
+                <a:lnTo>
+                  <a:pt x="1302" y="542"/>
+                </a:lnTo>
+                <a:lnTo>
+                  <a:pt x="1395" y="531"/>
+                </a:lnTo>
+                <a:lnTo>
+                  <a:pt x="1488" y="520"/>
+                </a:lnTo>
+                <a:lnTo>
+                  <a:pt x="1581" y="509"/>
+                </a:lnTo>
+                <a:lnTo>
+                  <a:pt x="1767" y="487"/>
+                </a:lnTo>
+                <a:lnTo>
+                  <a:pt x="2046" y="454"/>
+                </a:lnTo>
+                <a:lnTo>
+                  <a:pt x="2232" y="431"/>
+                </a:lnTo>
+                <a:lnTo>
+                  <a:pt x="2604" y="385"/>
+                </a:lnTo>
+                <a:lnTo>
+                  <a:pt x="2697" y="374"/>
+                </a:lnTo>
+                <a:lnTo>
+                  <a:pt x="3070" y="327"/>
+                </a:lnTo>
+                <a:lnTo>
+                  <a:pt x="3163" y="315"/>
+                </a:lnTo>
+                <a:lnTo>
+                  <a:pt x="3256" y="303"/>
+                </a:lnTo>
+                <a:lnTo>
+                  <a:pt x="3349" y="291"/>
+                </a:lnTo>
+                <a:lnTo>
+                  <a:pt x="3442" y="279"/>
+                </a:lnTo>
+                <a:lnTo>
+                  <a:pt x="3721" y="243"/>
+                </a:lnTo>
+                <a:lnTo>
+                  <a:pt x="4000" y="206"/>
+                </a:lnTo>
+                <a:lnTo>
+                  <a:pt x="4093" y="194"/>
+                </a:lnTo>
+                <a:lnTo>
+                  <a:pt x="4186" y="181"/>
+                </a:lnTo>
+                <a:lnTo>
+                  <a:pt x="4465" y="144"/>
+                </a:lnTo>
+                <a:lnTo>
+                  <a:pt x="4558" y="131"/>
+                </a:lnTo>
+                <a:lnTo>
+                  <a:pt x="4837" y="91"/>
+                </a:lnTo>
+                <a:lnTo>
+                  <a:pt x="5116" y="53"/>
+                </a:lnTo>
+                <a:lnTo>
+                  <a:pt x="5209" y="39"/>
+                </a:lnTo>
+                <a:lnTo>
+                  <a:pt x="5302" y="26"/>
+                </a:lnTo>
+                <a:lnTo>
+                  <a:pt x="5395" y="13"/>
+                </a:lnTo>
+                <a:lnTo>
+                  <a:pt x="5488" y="0"/>
                 </a:lnTo>
               </a:path>
             </a:pathLst>
@@ -5934,8 +5925,8 @@
         </p:nvSpPr>
         <p:spPr>
           <a:xfrm>
-            <a:off x="5889600" y="879120"/>
-            <a:ext cx="102240" cy="241560"/>
+            <a:off x="5889600" y="865800"/>
+            <a:ext cx="101880" cy="241560"/>
           </a:xfrm>
           <a:prstGeom prst="line">
             <a:avLst/>
@@ -5977,8 +5968,8 @@
         </p:nvSpPr>
         <p:spPr>
           <a:xfrm>
-            <a:off x="5889600" y="855360"/>
-            <a:ext cx="101880" cy="0"/>
+            <a:off x="5889600" y="849240"/>
+            <a:ext cx="101520" cy="0"/>
           </a:xfrm>
           <a:prstGeom prst="line">
             <a:avLst/>
@@ -6020,8 +6011,8 @@
         </p:nvSpPr>
         <p:spPr>
           <a:xfrm flipV="1">
-            <a:off x="5889600" y="587160"/>
-            <a:ext cx="102240" cy="241560"/>
+            <a:off x="5889600" y="588960"/>
+            <a:ext cx="101880" cy="241560"/>
           </a:xfrm>
           <a:prstGeom prst="line">
             <a:avLst/>
@@ -6111,7 +6102,7 @@
         </p:nvSpPr>
         <p:spPr>
           <a:xfrm>
-            <a:off x="6015960" y="1035000"/>
+            <a:off x="6015600" y="1021320"/>
             <a:ext cx="335160" cy="86040"/>
           </a:xfrm>
           <a:prstGeom prst="rect">
@@ -6159,7 +6150,7 @@
         </p:nvSpPr>
         <p:spPr>
           <a:xfrm>
-            <a:off x="6015960" y="1117080"/>
+            <a:off x="6015600" y="1103760"/>
             <a:ext cx="322560" cy="86040"/>
           </a:xfrm>
           <a:prstGeom prst="rect">
@@ -6207,7 +6198,7 @@
         </p:nvSpPr>
         <p:spPr>
           <a:xfrm>
-            <a:off x="6015960" y="770040"/>
+            <a:off x="6015600" y="763920"/>
             <a:ext cx="250560" cy="86040"/>
           </a:xfrm>
           <a:prstGeom prst="rect">
@@ -6255,7 +6246,7 @@
         </p:nvSpPr>
         <p:spPr>
           <a:xfrm>
-            <a:off x="6015960" y="852120"/>
+            <a:off x="6015600" y="846000"/>
             <a:ext cx="174240" cy="86040"/>
           </a:xfrm>
           <a:prstGeom prst="rect">
@@ -6303,7 +6294,7 @@
         </p:nvSpPr>
         <p:spPr>
           <a:xfrm>
-            <a:off x="6015960" y="501840"/>
+            <a:off x="6015600" y="503640"/>
             <a:ext cx="352080" cy="86040"/>
           </a:xfrm>
           <a:prstGeom prst="rect">
@@ -6351,7 +6342,7 @@
         </p:nvSpPr>
         <p:spPr>
           <a:xfrm>
-            <a:off x="6015960" y="583920"/>
+            <a:off x="6015600" y="586080"/>
             <a:ext cx="322560" cy="86040"/>
           </a:xfrm>
           <a:prstGeom prst="rect">
@@ -6469,7 +6460,7 @@
                 <a:latin typeface="Arial"/>
                 <a:ea typeface="Arial"/>
               </a:rPr>
-              <a:t>Warming × effort: HR 0.85 (0.76–0.95)</a:t>
+              <a:t>Warming × effort: HR 0.84 (0.75–0.94)</a:t>
             </a:r>
             <a:endParaRPr lang="en-US" sz="600" b="0" u="none" strike="noStrike">
               <a:solidFill>
@@ -6807,7 +6798,7 @@
         <p:spPr>
           <a:xfrm>
             <a:off x="3846240" y="1880640"/>
-            <a:ext cx="2033280" cy="0"/>
+            <a:ext cx="2033640" cy="0"/>
           </a:xfrm>
           <a:prstGeom prst="line">
             <a:avLst/>
@@ -6935,7 +6926,7 @@
         </p:nvSpPr>
         <p:spPr>
           <a:xfrm flipV="1">
-            <a:off x="4911480" y="1880640"/>
+            <a:off x="4911840" y="1880640"/>
             <a:ext cx="0" cy="25560"/>
           </a:xfrm>
           <a:prstGeom prst="line">
@@ -6978,7 +6969,7 @@
         </p:nvSpPr>
         <p:spPr>
           <a:xfrm flipV="1">
-            <a:off x="5395320" y="1880640"/>
+            <a:off x="5395680" y="1880640"/>
             <a:ext cx="0" cy="25560"/>
           </a:xfrm>
           <a:prstGeom prst="line">
@@ -7021,7 +7012,7 @@
         </p:nvSpPr>
         <p:spPr>
           <a:xfrm flipV="1">
-            <a:off x="5879520" y="1880640"/>
+            <a:off x="5879880" y="1880640"/>
             <a:ext cx="0" cy="25560"/>
           </a:xfrm>
           <a:prstGeom prst="line">
@@ -7208,7 +7199,7 @@
         </p:nvSpPr>
         <p:spPr>
           <a:xfrm>
-            <a:off x="4892760" y="1911240"/>
+            <a:off x="4893120" y="1911240"/>
             <a:ext cx="75960" cy="86040"/>
           </a:xfrm>
           <a:prstGeom prst="rect">
@@ -7256,7 +7247,7 @@
         </p:nvSpPr>
         <p:spPr>
           <a:xfrm>
-            <a:off x="5376600" y="1911240"/>
+            <a:off x="5376960" y="1911240"/>
             <a:ext cx="75960" cy="86040"/>
           </a:xfrm>
           <a:prstGeom prst="rect">
@@ -7304,7 +7295,7 @@
         </p:nvSpPr>
         <p:spPr>
           <a:xfrm>
-            <a:off x="5860440" y="1911240"/>
+            <a:off x="5861160" y="1911240"/>
             <a:ext cx="75960" cy="86040"/>
           </a:xfrm>
           <a:prstGeom prst="rect">
@@ -7556,7 +7547,7 @@
         </p:nvSpPr>
         <p:spPr>
           <a:xfrm flipV="1">
-            <a:off x="896040" y="2545200"/>
+            <a:off x="892800" y="2545200"/>
             <a:ext cx="0" cy="1520640"/>
           </a:xfrm>
           <a:prstGeom prst="line">
@@ -7599,15 +7590,15 @@
         </p:nvSpPr>
         <p:spPr>
           <a:xfrm>
-            <a:off x="896040" y="3115440"/>
-            <a:ext cx="410400" cy="0"/>
+            <a:off x="892800" y="2735280"/>
+            <a:ext cx="424440" cy="0"/>
           </a:xfrm>
           <a:prstGeom prst="line">
             <a:avLst/>
           </a:prstGeom>
           <a:ln w="13320">
             <a:solidFill>
-              <a:srgbClr val="D1552C"/>
+              <a:srgbClr val="1F5F9E"/>
             </a:solidFill>
             <a:round/>
           </a:ln>
@@ -7642,15 +7633,15 @@
         </p:nvSpPr>
         <p:spPr>
           <a:xfrm>
-            <a:off x="896040" y="2735280"/>
-            <a:ext cx="421200" cy="0"/>
+            <a:off x="892800" y="3115440"/>
+            <a:ext cx="380160" cy="0"/>
           </a:xfrm>
           <a:prstGeom prst="line">
             <a:avLst/>
           </a:prstGeom>
           <a:ln w="13320">
             <a:solidFill>
-              <a:srgbClr val="1F5F9E"/>
+              <a:srgbClr val="D1552C"/>
             </a:solidFill>
             <a:round/>
           </a:ln>
@@ -7685,8 +7676,8 @@
         </p:nvSpPr>
         <p:spPr>
           <a:xfrm>
-            <a:off x="896040" y="3875760"/>
-            <a:ext cx="92520" cy="0"/>
+            <a:off x="892800" y="3875760"/>
+            <a:ext cx="99360" cy="0"/>
           </a:xfrm>
           <a:prstGeom prst="line">
             <a:avLst/>
@@ -7729,7 +7720,7 @@
         <p:spPr>
           <a:xfrm flipH="1">
             <a:off x="867600" y="3495600"/>
-            <a:ext cx="28440" cy="0"/>
+            <a:ext cx="25200" cy="0"/>
           </a:xfrm>
           <a:prstGeom prst="line">
             <a:avLst/>
@@ -7771,7 +7762,2327 @@
         </p:nvSpPr>
         <p:spPr>
           <a:xfrm>
-            <a:off x="1283400" y="3092400"/>
+            <a:off x="1294200" y="2712240"/>
+            <a:ext cx="46440" cy="46800"/>
+          </a:xfrm>
+          <a:custGeom>
+            <a:avLst/>
+            <a:gdLst/>
+            <a:ahLst/>
+            <a:rect l="0" t="0" r="r" b="b"/>
+            <a:pathLst>
+              <a:path w="129" h="130">
+                <a:moveTo>
+                  <a:pt x="0" y="65"/>
+                </a:moveTo>
+                <a:cubicBezTo>
+                  <a:pt x="0" y="-21"/>
+                  <a:pt x="129" y="-21"/>
+                  <a:pt x="129" y="65"/>
+                </a:cubicBezTo>
+                <a:cubicBezTo>
+                  <a:pt x="129" y="152"/>
+                  <a:pt x="0" y="152"/>
+                  <a:pt x="0" y="65"/>
+                </a:cubicBezTo>
+                <a:close/>
+              </a:path>
+            </a:pathLst>
+          </a:custGeom>
+          <a:solidFill>
+            <a:srgbClr val="1F5F9E"/>
+          </a:solidFill>
+          <a:ln w="0">
+            <a:noFill/>
+          </a:ln>
+        </p:spPr>
+        <p:txBody>
+          <a:bodyPr lIns="0" tIns="0" rIns="0" bIns="0" anchor="t">
+            <a:noAutofit/>
+          </a:bodyPr>
+          <a:p>
+            <a:endParaRPr lang="en-US" sz="2400" b="0" u="none" strike="noStrike">
+              <a:solidFill>
+                <a:srgbClr val="FFFFFF"/>
+              </a:solidFill>
+              <a:effectLst/>
+              <a:uFillTx/>
+              <a:latin typeface="Times New Roman"/>
+            </a:endParaRPr>
+          </a:p>
+        </p:txBody>
+      </p:sp>
+      <p:sp>
+        <p:nvSpPr>
+          <p:cNvPr id="129" name=""/>
+          <p:cNvSpPr/>
+          <p:nvPr/>
+        </p:nvSpPr>
+        <p:spPr>
+          <a:xfrm>
+            <a:off x="1294200" y="2712240"/>
+            <a:ext cx="46440" cy="46800"/>
+          </a:xfrm>
+          <a:custGeom>
+            <a:avLst/>
+            <a:gdLst/>
+            <a:ahLst/>
+            <a:rect l="0" t="0" r="r" b="b"/>
+            <a:pathLst>
+              <a:path fill="none" w="129" h="130">
+                <a:moveTo>
+                  <a:pt x="129" y="65"/>
+                </a:moveTo>
+                <a:cubicBezTo>
+                  <a:pt x="129" y="152"/>
+                  <a:pt x="0" y="152"/>
+                  <a:pt x="0" y="65"/>
+                </a:cubicBezTo>
+                <a:cubicBezTo>
+                  <a:pt x="0" y="-21"/>
+                  <a:pt x="129" y="-21"/>
+                  <a:pt x="129" y="65"/>
+                </a:cubicBezTo>
+              </a:path>
+            </a:pathLst>
+          </a:custGeom>
+          <a:ln cap="rnd" w="5400">
+            <a:solidFill>
+              <a:srgbClr val="1F5F9E"/>
+            </a:solidFill>
+            <a:round/>
+          </a:ln>
+        </p:spPr>
+        <p:txBody>
+          <a:bodyPr lIns="2520" tIns="2520" rIns="2520" bIns="2520" anchor="t">
+            <a:noAutofit/>
+          </a:bodyPr>
+          <a:p>
+            <a:endParaRPr lang="en-US" sz="2400" b="0" u="none" strike="noStrike">
+              <a:solidFill>
+                <a:srgbClr val="000000"/>
+              </a:solidFill>
+              <a:effectLst/>
+              <a:uFillTx/>
+              <a:latin typeface="Times New Roman"/>
+            </a:endParaRPr>
+          </a:p>
+        </p:txBody>
+      </p:sp>
+      <p:sp>
+        <p:nvSpPr>
+          <p:cNvPr id="130" name=""/>
+          <p:cNvSpPr/>
+          <p:nvPr/>
+        </p:nvSpPr>
+        <p:spPr>
+          <a:xfrm>
+            <a:off x="1249560" y="3092400"/>
+            <a:ext cx="46800" cy="46800"/>
+          </a:xfrm>
+          <a:custGeom>
+            <a:avLst/>
+            <a:gdLst/>
+            <a:ahLst/>
+            <a:rect l="0" t="0" r="r" b="b"/>
+            <a:pathLst>
+              <a:path w="130" h="130">
+                <a:moveTo>
+                  <a:pt x="0" y="65"/>
+                </a:moveTo>
+                <a:cubicBezTo>
+                  <a:pt x="0" y="-22"/>
+                  <a:pt x="130" y="-22"/>
+                  <a:pt x="130" y="65"/>
+                </a:cubicBezTo>
+                <a:cubicBezTo>
+                  <a:pt x="130" y="151"/>
+                  <a:pt x="0" y="151"/>
+                  <a:pt x="0" y="65"/>
+                </a:cubicBezTo>
+                <a:close/>
+              </a:path>
+            </a:pathLst>
+          </a:custGeom>
+          <a:solidFill>
+            <a:srgbClr val="D1552C"/>
+          </a:solidFill>
+          <a:ln w="0">
+            <a:noFill/>
+          </a:ln>
+        </p:spPr>
+        <p:txBody>
+          <a:bodyPr lIns="0" tIns="0" rIns="0" bIns="0" anchor="t">
+            <a:noAutofit/>
+          </a:bodyPr>
+          <a:p>
+            <a:endParaRPr lang="en-US" sz="2400" b="0" u="none" strike="noStrike">
+              <a:solidFill>
+                <a:srgbClr val="FFFFFF"/>
+              </a:solidFill>
+              <a:effectLst/>
+              <a:uFillTx/>
+              <a:latin typeface="Times New Roman"/>
+            </a:endParaRPr>
+          </a:p>
+        </p:txBody>
+      </p:sp>
+      <p:sp>
+        <p:nvSpPr>
+          <p:cNvPr id="131" name=""/>
+          <p:cNvSpPr/>
+          <p:nvPr/>
+        </p:nvSpPr>
+        <p:spPr>
+          <a:xfrm>
+            <a:off x="1249560" y="3092400"/>
+            <a:ext cx="46800" cy="46800"/>
+          </a:xfrm>
+          <a:custGeom>
+            <a:avLst/>
+            <a:gdLst/>
+            <a:ahLst/>
+            <a:rect l="0" t="0" r="r" b="b"/>
+            <a:pathLst>
+              <a:path fill="none" w="130" h="130">
+                <a:moveTo>
+                  <a:pt x="130" y="65"/>
+                </a:moveTo>
+                <a:cubicBezTo>
+                  <a:pt x="130" y="151"/>
+                  <a:pt x="0" y="151"/>
+                  <a:pt x="0" y="65"/>
+                </a:cubicBezTo>
+                <a:cubicBezTo>
+                  <a:pt x="0" y="-22"/>
+                  <a:pt x="130" y="-22"/>
+                  <a:pt x="130" y="65"/>
+                </a:cubicBezTo>
+              </a:path>
+            </a:pathLst>
+          </a:custGeom>
+          <a:ln cap="rnd" w="5400">
+            <a:solidFill>
+              <a:srgbClr val="D1552C"/>
+            </a:solidFill>
+            <a:round/>
+          </a:ln>
+        </p:spPr>
+        <p:txBody>
+          <a:bodyPr lIns="2520" tIns="2520" rIns="2520" bIns="2520" anchor="t">
+            <a:noAutofit/>
+          </a:bodyPr>
+          <a:p>
+            <a:endParaRPr lang="en-US" sz="2400" b="0" u="none" strike="noStrike">
+              <a:solidFill>
+                <a:srgbClr val="000000"/>
+              </a:solidFill>
+              <a:effectLst/>
+              <a:uFillTx/>
+              <a:latin typeface="Times New Roman"/>
+            </a:endParaRPr>
+          </a:p>
+        </p:txBody>
+      </p:sp>
+      <p:sp>
+        <p:nvSpPr>
+          <p:cNvPr id="132" name=""/>
+          <p:cNvSpPr/>
+          <p:nvPr/>
+        </p:nvSpPr>
+        <p:spPr>
+          <a:xfrm>
+            <a:off x="968760" y="3852720"/>
+            <a:ext cx="46800" cy="47160"/>
+          </a:xfrm>
+          <a:custGeom>
+            <a:avLst/>
+            <a:gdLst/>
+            <a:ahLst/>
+            <a:rect l="0" t="0" r="r" b="b"/>
+            <a:pathLst>
+              <a:path w="130" h="131">
+                <a:moveTo>
+                  <a:pt x="0" y="65"/>
+                </a:moveTo>
+                <a:cubicBezTo>
+                  <a:pt x="0" y="-22"/>
+                  <a:pt x="130" y="-22"/>
+                  <a:pt x="130" y="65"/>
+                </a:cubicBezTo>
+                <a:cubicBezTo>
+                  <a:pt x="130" y="152"/>
+                  <a:pt x="0" y="152"/>
+                  <a:pt x="0" y="65"/>
+                </a:cubicBezTo>
+                <a:close/>
+              </a:path>
+            </a:pathLst>
+          </a:custGeom>
+          <a:solidFill>
+            <a:srgbClr val="3B3B3B"/>
+          </a:solidFill>
+          <a:ln w="0">
+            <a:noFill/>
+          </a:ln>
+        </p:spPr>
+        <p:txBody>
+          <a:bodyPr lIns="0" tIns="0" rIns="0" bIns="0" anchor="t">
+            <a:noAutofit/>
+          </a:bodyPr>
+          <a:p>
+            <a:endParaRPr lang="en-US" sz="2400" b="0" u="none" strike="noStrike">
+              <a:solidFill>
+                <a:srgbClr val="FFFFFF"/>
+              </a:solidFill>
+              <a:effectLst/>
+              <a:uFillTx/>
+              <a:latin typeface="Times New Roman"/>
+            </a:endParaRPr>
+          </a:p>
+        </p:txBody>
+      </p:sp>
+      <p:sp>
+        <p:nvSpPr>
+          <p:cNvPr id="133" name=""/>
+          <p:cNvSpPr/>
+          <p:nvPr/>
+        </p:nvSpPr>
+        <p:spPr>
+          <a:xfrm>
+            <a:off x="968760" y="3852720"/>
+            <a:ext cx="46800" cy="47160"/>
+          </a:xfrm>
+          <a:custGeom>
+            <a:avLst/>
+            <a:gdLst/>
+            <a:ahLst/>
+            <a:rect l="0" t="0" r="r" b="b"/>
+            <a:pathLst>
+              <a:path fill="none" w="130" h="131">
+                <a:moveTo>
+                  <a:pt x="130" y="65"/>
+                </a:moveTo>
+                <a:cubicBezTo>
+                  <a:pt x="130" y="152"/>
+                  <a:pt x="0" y="152"/>
+                  <a:pt x="0" y="65"/>
+                </a:cubicBezTo>
+                <a:cubicBezTo>
+                  <a:pt x="0" y="-22"/>
+                  <a:pt x="130" y="-22"/>
+                  <a:pt x="130" y="65"/>
+                </a:cubicBezTo>
+              </a:path>
+            </a:pathLst>
+          </a:custGeom>
+          <a:ln cap="rnd" w="5400">
+            <a:solidFill>
+              <a:srgbClr val="3B3B3B"/>
+            </a:solidFill>
+            <a:round/>
+          </a:ln>
+        </p:spPr>
+        <p:txBody>
+          <a:bodyPr lIns="2520" tIns="2520" rIns="2520" bIns="2520" anchor="t">
+            <a:noAutofit/>
+          </a:bodyPr>
+          <a:p>
+            <a:endParaRPr lang="en-US" sz="2400" b="0" u="none" strike="noStrike">
+              <a:solidFill>
+                <a:srgbClr val="000000"/>
+              </a:solidFill>
+              <a:effectLst/>
+              <a:uFillTx/>
+              <a:latin typeface="Times New Roman"/>
+            </a:endParaRPr>
+          </a:p>
+        </p:txBody>
+      </p:sp>
+      <p:sp>
+        <p:nvSpPr>
+          <p:cNvPr id="134" name=""/>
+          <p:cNvSpPr/>
+          <p:nvPr/>
+        </p:nvSpPr>
+        <p:spPr>
+          <a:xfrm>
+            <a:off x="844560" y="3472560"/>
+            <a:ext cx="46440" cy="47160"/>
+          </a:xfrm>
+          <a:custGeom>
+            <a:avLst/>
+            <a:gdLst/>
+            <a:ahLst/>
+            <a:rect l="0" t="0" r="r" b="b"/>
+            <a:pathLst>
+              <a:path w="129" h="131">
+                <a:moveTo>
+                  <a:pt x="0" y="65"/>
+                </a:moveTo>
+                <a:cubicBezTo>
+                  <a:pt x="0" y="-22"/>
+                  <a:pt x="129" y="-22"/>
+                  <a:pt x="129" y="65"/>
+                </a:cubicBezTo>
+                <a:cubicBezTo>
+                  <a:pt x="129" y="152"/>
+                  <a:pt x="0" y="152"/>
+                  <a:pt x="0" y="65"/>
+                </a:cubicBezTo>
+                <a:close/>
+              </a:path>
+            </a:pathLst>
+          </a:custGeom>
+          <a:solidFill>
+            <a:srgbClr val="9A9A9A"/>
+          </a:solidFill>
+          <a:ln w="0">
+            <a:noFill/>
+          </a:ln>
+        </p:spPr>
+        <p:txBody>
+          <a:bodyPr lIns="0" tIns="0" rIns="0" bIns="0" anchor="t">
+            <a:noAutofit/>
+          </a:bodyPr>
+          <a:p>
+            <a:endParaRPr lang="en-US" sz="2400" b="0" u="none" strike="noStrike">
+              <a:solidFill>
+                <a:srgbClr val="FFFFFF"/>
+              </a:solidFill>
+              <a:effectLst/>
+              <a:uFillTx/>
+              <a:latin typeface="Times New Roman"/>
+            </a:endParaRPr>
+          </a:p>
+        </p:txBody>
+      </p:sp>
+      <p:sp>
+        <p:nvSpPr>
+          <p:cNvPr id="135" name=""/>
+          <p:cNvSpPr/>
+          <p:nvPr/>
+        </p:nvSpPr>
+        <p:spPr>
+          <a:xfrm>
+            <a:off x="844560" y="3472560"/>
+            <a:ext cx="46440" cy="47160"/>
+          </a:xfrm>
+          <a:custGeom>
+            <a:avLst/>
+            <a:gdLst/>
+            <a:ahLst/>
+            <a:rect l="0" t="0" r="r" b="b"/>
+            <a:pathLst>
+              <a:path fill="none" w="129" h="131">
+                <a:moveTo>
+                  <a:pt x="129" y="65"/>
+                </a:moveTo>
+                <a:cubicBezTo>
+                  <a:pt x="129" y="152"/>
+                  <a:pt x="0" y="152"/>
+                  <a:pt x="0" y="65"/>
+                </a:cubicBezTo>
+                <a:cubicBezTo>
+                  <a:pt x="0" y="-22"/>
+                  <a:pt x="129" y="-22"/>
+                  <a:pt x="129" y="65"/>
+                </a:cubicBezTo>
+              </a:path>
+            </a:pathLst>
+          </a:custGeom>
+          <a:ln cap="rnd" w="5400">
+            <a:solidFill>
+              <a:srgbClr val="9A9A9A"/>
+            </a:solidFill>
+            <a:round/>
+          </a:ln>
+        </p:spPr>
+        <p:txBody>
+          <a:bodyPr lIns="2520" tIns="2520" rIns="2520" bIns="2520" anchor="t">
+            <a:noAutofit/>
+          </a:bodyPr>
+          <a:p>
+            <a:endParaRPr lang="en-US" sz="2400" b="0" u="none" strike="noStrike">
+              <a:solidFill>
+                <a:srgbClr val="000000"/>
+              </a:solidFill>
+              <a:effectLst/>
+              <a:uFillTx/>
+              <a:latin typeface="Times New Roman"/>
+            </a:endParaRPr>
+          </a:p>
+        </p:txBody>
+      </p:sp>
+      <p:sp>
+        <p:nvSpPr>
+          <p:cNvPr id="136" name=""/>
+          <p:cNvSpPr/>
+          <p:nvPr/>
+        </p:nvSpPr>
+        <p:spPr>
+          <a:xfrm>
+            <a:off x="1494000" y="2545200"/>
+            <a:ext cx="576000" cy="1521000"/>
+          </a:xfrm>
+          <a:custGeom>
+            <a:avLst/>
+            <a:gdLst/>
+            <a:ahLst/>
+            <a:rect l="0" t="0" r="r" b="b"/>
+            <a:pathLst>
+              <a:path w="1600" h="4225">
+                <a:moveTo>
+                  <a:pt x="0" y="0"/>
+                </a:moveTo>
+                <a:lnTo>
+                  <a:pt x="1600" y="0"/>
+                </a:lnTo>
+                <a:lnTo>
+                  <a:pt x="1600" y="4225"/>
+                </a:lnTo>
+                <a:lnTo>
+                  <a:pt x="0" y="4225"/>
+                </a:lnTo>
+                <a:lnTo>
+                  <a:pt x="0" y="0"/>
+                </a:lnTo>
+                <a:close/>
+              </a:path>
+            </a:pathLst>
+          </a:custGeom>
+          <a:solidFill>
+            <a:srgbClr val="FFFFFF"/>
+          </a:solidFill>
+          <a:ln w="0">
+            <a:noFill/>
+          </a:ln>
+        </p:spPr>
+        <p:txBody>
+          <a:bodyPr lIns="0" tIns="0" rIns="0" bIns="0" anchor="t">
+            <a:noAutofit/>
+          </a:bodyPr>
+          <a:p>
+            <a:endParaRPr lang="en-US" sz="2400" b="0" u="none" strike="noStrike">
+              <a:solidFill>
+                <a:srgbClr val="000000"/>
+              </a:solidFill>
+              <a:effectLst/>
+              <a:uFillTx/>
+              <a:latin typeface="Times New Roman"/>
+            </a:endParaRPr>
+          </a:p>
+        </p:txBody>
+      </p:sp>
+      <p:sp>
+        <p:nvSpPr>
+          <p:cNvPr id="137" name=""/>
+          <p:cNvSpPr/>
+          <p:nvPr/>
+        </p:nvSpPr>
+        <p:spPr>
+          <a:xfrm flipV="1">
+            <a:off x="1557000" y="2545200"/>
+            <a:ext cx="0" cy="1520640"/>
+          </a:xfrm>
+          <a:prstGeom prst="line">
+            <a:avLst/>
+          </a:prstGeom>
+          <a:ln w="6480">
+            <a:solidFill>
+              <a:srgbClr val="4A4A4A"/>
+            </a:solidFill>
+            <a:round/>
+          </a:ln>
+        </p:spPr>
+        <p:style>
+          <a:lnRef idx="0"/>
+          <a:fillRef idx="0"/>
+          <a:effectRef idx="0"/>
+          <a:fontRef idx="minor"/>
+        </p:style>
+        <p:txBody>
+          <a:bodyPr lIns="3240" tIns="3240" rIns="3240" bIns="3240" anchor="t">
+            <a:noAutofit/>
+          </a:bodyPr>
+          <a:p>
+            <a:endParaRPr lang="en-US" sz="2400" b="0" u="none" strike="noStrike">
+              <a:solidFill>
+                <a:srgbClr val="000000"/>
+              </a:solidFill>
+              <a:effectLst/>
+              <a:uFillTx/>
+              <a:latin typeface="Times New Roman"/>
+            </a:endParaRPr>
+          </a:p>
+        </p:txBody>
+      </p:sp>
+      <p:sp>
+        <p:nvSpPr>
+          <p:cNvPr id="138" name=""/>
+          <p:cNvSpPr/>
+          <p:nvPr/>
+        </p:nvSpPr>
+        <p:spPr>
+          <a:xfrm>
+            <a:off x="1557000" y="2735280"/>
+            <a:ext cx="279720" cy="0"/>
+          </a:xfrm>
+          <a:prstGeom prst="line">
+            <a:avLst/>
+          </a:prstGeom>
+          <a:ln w="13320">
+            <a:solidFill>
+              <a:srgbClr val="1F5F9E"/>
+            </a:solidFill>
+            <a:round/>
+          </a:ln>
+        </p:spPr>
+        <p:style>
+          <a:lnRef idx="0"/>
+          <a:fillRef idx="0"/>
+          <a:effectRef idx="0"/>
+          <a:fontRef idx="minor"/>
+        </p:style>
+        <p:txBody>
+          <a:bodyPr lIns="6480" tIns="-6480" rIns="6480" bIns="-6480" anchor="t">
+            <a:noAutofit/>
+          </a:bodyPr>
+          <a:p>
+            <a:endParaRPr lang="en-US" sz="2400" b="0" u="none" strike="noStrike">
+              <a:solidFill>
+                <a:srgbClr val="000000"/>
+              </a:solidFill>
+              <a:effectLst/>
+              <a:uFillTx/>
+              <a:latin typeface="Times New Roman"/>
+            </a:endParaRPr>
+          </a:p>
+        </p:txBody>
+      </p:sp>
+      <p:sp>
+        <p:nvSpPr>
+          <p:cNvPr id="139" name=""/>
+          <p:cNvSpPr/>
+          <p:nvPr/>
+        </p:nvSpPr>
+        <p:spPr>
+          <a:xfrm>
+            <a:off x="1557000" y="3115440"/>
+            <a:ext cx="449640" cy="0"/>
+          </a:xfrm>
+          <a:prstGeom prst="line">
+            <a:avLst/>
+          </a:prstGeom>
+          <a:ln w="13320">
+            <a:solidFill>
+              <a:srgbClr val="D1552C"/>
+            </a:solidFill>
+            <a:round/>
+          </a:ln>
+        </p:spPr>
+        <p:style>
+          <a:lnRef idx="0"/>
+          <a:fillRef idx="0"/>
+          <a:effectRef idx="0"/>
+          <a:fontRef idx="minor"/>
+        </p:style>
+        <p:txBody>
+          <a:bodyPr lIns="6480" tIns="-6480" rIns="6480" bIns="-6480" anchor="t">
+            <a:noAutofit/>
+          </a:bodyPr>
+          <a:p>
+            <a:endParaRPr lang="en-US" sz="2400" b="0" u="none" strike="noStrike">
+              <a:solidFill>
+                <a:srgbClr val="000000"/>
+              </a:solidFill>
+              <a:effectLst/>
+              <a:uFillTx/>
+              <a:latin typeface="Times New Roman"/>
+            </a:endParaRPr>
+          </a:p>
+        </p:txBody>
+      </p:sp>
+      <p:sp>
+        <p:nvSpPr>
+          <p:cNvPr id="140" name=""/>
+          <p:cNvSpPr/>
+          <p:nvPr/>
+        </p:nvSpPr>
+        <p:spPr>
+          <a:xfrm>
+            <a:off x="1557000" y="3875760"/>
+            <a:ext cx="18360" cy="0"/>
+          </a:xfrm>
+          <a:prstGeom prst="line">
+            <a:avLst/>
+          </a:prstGeom>
+          <a:ln w="13320">
+            <a:solidFill>
+              <a:srgbClr val="3B3B3B"/>
+            </a:solidFill>
+            <a:round/>
+          </a:ln>
+        </p:spPr>
+        <p:style>
+          <a:lnRef idx="0"/>
+          <a:fillRef idx="0"/>
+          <a:effectRef idx="0"/>
+          <a:fontRef idx="minor"/>
+        </p:style>
+        <p:txBody>
+          <a:bodyPr lIns="6480" tIns="-6480" rIns="6480" bIns="-6480" anchor="t">
+            <a:noAutofit/>
+          </a:bodyPr>
+          <a:p>
+            <a:endParaRPr lang="en-US" sz="2400" b="0" u="none" strike="noStrike">
+              <a:solidFill>
+                <a:srgbClr val="000000"/>
+              </a:solidFill>
+              <a:effectLst/>
+              <a:uFillTx/>
+              <a:latin typeface="Times New Roman"/>
+            </a:endParaRPr>
+          </a:p>
+        </p:txBody>
+      </p:sp>
+      <p:sp>
+        <p:nvSpPr>
+          <p:cNvPr id="141" name=""/>
+          <p:cNvSpPr/>
+          <p:nvPr/>
+        </p:nvSpPr>
+        <p:spPr>
+          <a:xfrm>
+            <a:off x="1557000" y="3495600"/>
+            <a:ext cx="1800" cy="0"/>
+          </a:xfrm>
+          <a:prstGeom prst="line">
+            <a:avLst/>
+          </a:prstGeom>
+          <a:ln w="13320">
+            <a:solidFill>
+              <a:srgbClr val="9A9A9A"/>
+            </a:solidFill>
+            <a:round/>
+          </a:ln>
+        </p:spPr>
+        <p:style>
+          <a:lnRef idx="0"/>
+          <a:fillRef idx="0"/>
+          <a:effectRef idx="0"/>
+          <a:fontRef idx="minor"/>
+        </p:style>
+        <p:txBody>
+          <a:bodyPr lIns="6480" tIns="-6480" rIns="6480" bIns="-6480" anchor="t">
+            <a:noAutofit/>
+          </a:bodyPr>
+          <a:p>
+            <a:endParaRPr lang="en-US" sz="2400" b="0" u="none" strike="noStrike">
+              <a:solidFill>
+                <a:srgbClr val="000000"/>
+              </a:solidFill>
+              <a:effectLst/>
+              <a:uFillTx/>
+              <a:latin typeface="Times New Roman"/>
+            </a:endParaRPr>
+          </a:p>
+        </p:txBody>
+      </p:sp>
+      <p:sp>
+        <p:nvSpPr>
+          <p:cNvPr id="142" name=""/>
+          <p:cNvSpPr/>
+          <p:nvPr/>
+        </p:nvSpPr>
+        <p:spPr>
+          <a:xfrm>
+            <a:off x="1813680" y="2712240"/>
+            <a:ext cx="46800" cy="46800"/>
+          </a:xfrm>
+          <a:custGeom>
+            <a:avLst/>
+            <a:gdLst/>
+            <a:ahLst/>
+            <a:rect l="0" t="0" r="r" b="b"/>
+            <a:pathLst>
+              <a:path w="130" h="130">
+                <a:moveTo>
+                  <a:pt x="0" y="65"/>
+                </a:moveTo>
+                <a:cubicBezTo>
+                  <a:pt x="0" y="-21"/>
+                  <a:pt x="130" y="-21"/>
+                  <a:pt x="130" y="65"/>
+                </a:cubicBezTo>
+                <a:cubicBezTo>
+                  <a:pt x="130" y="152"/>
+                  <a:pt x="0" y="152"/>
+                  <a:pt x="0" y="65"/>
+                </a:cubicBezTo>
+                <a:close/>
+              </a:path>
+            </a:pathLst>
+          </a:custGeom>
+          <a:solidFill>
+            <a:srgbClr val="1F5F9E"/>
+          </a:solidFill>
+          <a:ln w="0">
+            <a:noFill/>
+          </a:ln>
+        </p:spPr>
+        <p:txBody>
+          <a:bodyPr lIns="0" tIns="0" rIns="0" bIns="0" anchor="t">
+            <a:noAutofit/>
+          </a:bodyPr>
+          <a:p>
+            <a:endParaRPr lang="en-US" sz="2400" b="0" u="none" strike="noStrike">
+              <a:solidFill>
+                <a:srgbClr val="FFFFFF"/>
+              </a:solidFill>
+              <a:effectLst/>
+              <a:uFillTx/>
+              <a:latin typeface="Times New Roman"/>
+            </a:endParaRPr>
+          </a:p>
+        </p:txBody>
+      </p:sp>
+      <p:sp>
+        <p:nvSpPr>
+          <p:cNvPr id="143" name=""/>
+          <p:cNvSpPr/>
+          <p:nvPr/>
+        </p:nvSpPr>
+        <p:spPr>
+          <a:xfrm>
+            <a:off x="1813680" y="2712240"/>
+            <a:ext cx="46800" cy="46800"/>
+          </a:xfrm>
+          <a:custGeom>
+            <a:avLst/>
+            <a:gdLst/>
+            <a:ahLst/>
+            <a:rect l="0" t="0" r="r" b="b"/>
+            <a:pathLst>
+              <a:path fill="none" w="130" h="130">
+                <a:moveTo>
+                  <a:pt x="130" y="65"/>
+                </a:moveTo>
+                <a:cubicBezTo>
+                  <a:pt x="130" y="152"/>
+                  <a:pt x="0" y="152"/>
+                  <a:pt x="0" y="65"/>
+                </a:cubicBezTo>
+                <a:cubicBezTo>
+                  <a:pt x="0" y="-21"/>
+                  <a:pt x="130" y="-21"/>
+                  <a:pt x="130" y="65"/>
+                </a:cubicBezTo>
+              </a:path>
+            </a:pathLst>
+          </a:custGeom>
+          <a:ln cap="rnd" w="5400">
+            <a:solidFill>
+              <a:srgbClr val="1F5F9E"/>
+            </a:solidFill>
+            <a:round/>
+          </a:ln>
+        </p:spPr>
+        <p:txBody>
+          <a:bodyPr lIns="2520" tIns="2520" rIns="2520" bIns="2520" anchor="t">
+            <a:noAutofit/>
+          </a:bodyPr>
+          <a:p>
+            <a:endParaRPr lang="en-US" sz="2400" b="0" u="none" strike="noStrike">
+              <a:solidFill>
+                <a:srgbClr val="000000"/>
+              </a:solidFill>
+              <a:effectLst/>
+              <a:uFillTx/>
+              <a:latin typeface="Times New Roman"/>
+            </a:endParaRPr>
+          </a:p>
+        </p:txBody>
+      </p:sp>
+      <p:sp>
+        <p:nvSpPr>
+          <p:cNvPr id="144" name=""/>
+          <p:cNvSpPr/>
+          <p:nvPr/>
+        </p:nvSpPr>
+        <p:spPr>
+          <a:xfrm>
+            <a:off x="1983240" y="3092400"/>
+            <a:ext cx="46800" cy="46800"/>
+          </a:xfrm>
+          <a:custGeom>
+            <a:avLst/>
+            <a:gdLst/>
+            <a:ahLst/>
+            <a:rect l="0" t="0" r="r" b="b"/>
+            <a:pathLst>
+              <a:path w="130" h="130">
+                <a:moveTo>
+                  <a:pt x="0" y="65"/>
+                </a:moveTo>
+                <a:cubicBezTo>
+                  <a:pt x="0" y="-22"/>
+                  <a:pt x="130" y="-22"/>
+                  <a:pt x="130" y="65"/>
+                </a:cubicBezTo>
+                <a:cubicBezTo>
+                  <a:pt x="130" y="151"/>
+                  <a:pt x="0" y="151"/>
+                  <a:pt x="0" y="65"/>
+                </a:cubicBezTo>
+                <a:close/>
+              </a:path>
+            </a:pathLst>
+          </a:custGeom>
+          <a:solidFill>
+            <a:srgbClr val="D1552C"/>
+          </a:solidFill>
+          <a:ln w="0">
+            <a:noFill/>
+          </a:ln>
+        </p:spPr>
+        <p:txBody>
+          <a:bodyPr lIns="0" tIns="0" rIns="0" bIns="0" anchor="t">
+            <a:noAutofit/>
+          </a:bodyPr>
+          <a:p>
+            <a:endParaRPr lang="en-US" sz="2400" b="0" u="none" strike="noStrike">
+              <a:solidFill>
+                <a:srgbClr val="FFFFFF"/>
+              </a:solidFill>
+              <a:effectLst/>
+              <a:uFillTx/>
+              <a:latin typeface="Times New Roman"/>
+            </a:endParaRPr>
+          </a:p>
+        </p:txBody>
+      </p:sp>
+      <p:sp>
+        <p:nvSpPr>
+          <p:cNvPr id="145" name=""/>
+          <p:cNvSpPr/>
+          <p:nvPr/>
+        </p:nvSpPr>
+        <p:spPr>
+          <a:xfrm>
+            <a:off x="1983240" y="3092400"/>
+            <a:ext cx="46800" cy="46800"/>
+          </a:xfrm>
+          <a:custGeom>
+            <a:avLst/>
+            <a:gdLst/>
+            <a:ahLst/>
+            <a:rect l="0" t="0" r="r" b="b"/>
+            <a:pathLst>
+              <a:path fill="none" w="130" h="130">
+                <a:moveTo>
+                  <a:pt x="130" y="65"/>
+                </a:moveTo>
+                <a:cubicBezTo>
+                  <a:pt x="130" y="151"/>
+                  <a:pt x="0" y="151"/>
+                  <a:pt x="0" y="65"/>
+                </a:cubicBezTo>
+                <a:cubicBezTo>
+                  <a:pt x="0" y="-22"/>
+                  <a:pt x="130" y="-22"/>
+                  <a:pt x="130" y="65"/>
+                </a:cubicBezTo>
+              </a:path>
+            </a:pathLst>
+          </a:custGeom>
+          <a:ln cap="rnd" w="5400">
+            <a:solidFill>
+              <a:srgbClr val="D1552C"/>
+            </a:solidFill>
+            <a:round/>
+          </a:ln>
+        </p:spPr>
+        <p:txBody>
+          <a:bodyPr lIns="2520" tIns="2520" rIns="2520" bIns="2520" anchor="t">
+            <a:noAutofit/>
+          </a:bodyPr>
+          <a:p>
+            <a:endParaRPr lang="en-US" sz="2400" b="0" u="none" strike="noStrike">
+              <a:solidFill>
+                <a:srgbClr val="000000"/>
+              </a:solidFill>
+              <a:effectLst/>
+              <a:uFillTx/>
+              <a:latin typeface="Times New Roman"/>
+            </a:endParaRPr>
+          </a:p>
+        </p:txBody>
+      </p:sp>
+      <p:sp>
+        <p:nvSpPr>
+          <p:cNvPr id="146" name=""/>
+          <p:cNvSpPr/>
+          <p:nvPr/>
+        </p:nvSpPr>
+        <p:spPr>
+          <a:xfrm>
+            <a:off x="1552320" y="3852720"/>
+            <a:ext cx="46800" cy="47160"/>
+          </a:xfrm>
+          <a:custGeom>
+            <a:avLst/>
+            <a:gdLst/>
+            <a:ahLst/>
+            <a:rect l="0" t="0" r="r" b="b"/>
+            <a:pathLst>
+              <a:path w="130" h="131">
+                <a:moveTo>
+                  <a:pt x="0" y="65"/>
+                </a:moveTo>
+                <a:cubicBezTo>
+                  <a:pt x="0" y="-22"/>
+                  <a:pt x="130" y="-22"/>
+                  <a:pt x="130" y="65"/>
+                </a:cubicBezTo>
+                <a:cubicBezTo>
+                  <a:pt x="130" y="152"/>
+                  <a:pt x="0" y="152"/>
+                  <a:pt x="0" y="65"/>
+                </a:cubicBezTo>
+                <a:close/>
+              </a:path>
+            </a:pathLst>
+          </a:custGeom>
+          <a:solidFill>
+            <a:srgbClr val="3B3B3B"/>
+          </a:solidFill>
+          <a:ln w="0">
+            <a:noFill/>
+          </a:ln>
+        </p:spPr>
+        <p:txBody>
+          <a:bodyPr lIns="0" tIns="0" rIns="0" bIns="0" anchor="t">
+            <a:noAutofit/>
+          </a:bodyPr>
+          <a:p>
+            <a:endParaRPr lang="en-US" sz="2400" b="0" u="none" strike="noStrike">
+              <a:solidFill>
+                <a:srgbClr val="FFFFFF"/>
+              </a:solidFill>
+              <a:effectLst/>
+              <a:uFillTx/>
+              <a:latin typeface="Times New Roman"/>
+            </a:endParaRPr>
+          </a:p>
+        </p:txBody>
+      </p:sp>
+      <p:sp>
+        <p:nvSpPr>
+          <p:cNvPr id="147" name=""/>
+          <p:cNvSpPr/>
+          <p:nvPr/>
+        </p:nvSpPr>
+        <p:spPr>
+          <a:xfrm>
+            <a:off x="1552320" y="3852720"/>
+            <a:ext cx="46800" cy="47160"/>
+          </a:xfrm>
+          <a:custGeom>
+            <a:avLst/>
+            <a:gdLst/>
+            <a:ahLst/>
+            <a:rect l="0" t="0" r="r" b="b"/>
+            <a:pathLst>
+              <a:path fill="none" w="130" h="131">
+                <a:moveTo>
+                  <a:pt x="130" y="65"/>
+                </a:moveTo>
+                <a:cubicBezTo>
+                  <a:pt x="130" y="152"/>
+                  <a:pt x="0" y="152"/>
+                  <a:pt x="0" y="65"/>
+                </a:cubicBezTo>
+                <a:cubicBezTo>
+                  <a:pt x="0" y="-22"/>
+                  <a:pt x="130" y="-22"/>
+                  <a:pt x="130" y="65"/>
+                </a:cubicBezTo>
+              </a:path>
+            </a:pathLst>
+          </a:custGeom>
+          <a:ln cap="rnd" w="5400">
+            <a:solidFill>
+              <a:srgbClr val="3B3B3B"/>
+            </a:solidFill>
+            <a:round/>
+          </a:ln>
+        </p:spPr>
+        <p:txBody>
+          <a:bodyPr lIns="2520" tIns="2520" rIns="2520" bIns="2520" anchor="t">
+            <a:noAutofit/>
+          </a:bodyPr>
+          <a:p>
+            <a:endParaRPr lang="en-US" sz="2400" b="0" u="none" strike="noStrike">
+              <a:solidFill>
+                <a:srgbClr val="000000"/>
+              </a:solidFill>
+              <a:effectLst/>
+              <a:uFillTx/>
+              <a:latin typeface="Times New Roman"/>
+            </a:endParaRPr>
+          </a:p>
+        </p:txBody>
+      </p:sp>
+      <p:sp>
+        <p:nvSpPr>
+          <p:cNvPr id="148" name=""/>
+          <p:cNvSpPr/>
+          <p:nvPr/>
+        </p:nvSpPr>
+        <p:spPr>
+          <a:xfrm>
+            <a:off x="1535760" y="3472560"/>
+            <a:ext cx="46440" cy="47160"/>
+          </a:xfrm>
+          <a:custGeom>
+            <a:avLst/>
+            <a:gdLst/>
+            <a:ahLst/>
+            <a:rect l="0" t="0" r="r" b="b"/>
+            <a:pathLst>
+              <a:path w="129" h="131">
+                <a:moveTo>
+                  <a:pt x="0" y="65"/>
+                </a:moveTo>
+                <a:cubicBezTo>
+                  <a:pt x="0" y="-22"/>
+                  <a:pt x="129" y="-22"/>
+                  <a:pt x="129" y="65"/>
+                </a:cubicBezTo>
+                <a:cubicBezTo>
+                  <a:pt x="129" y="152"/>
+                  <a:pt x="0" y="152"/>
+                  <a:pt x="0" y="65"/>
+                </a:cubicBezTo>
+                <a:close/>
+              </a:path>
+            </a:pathLst>
+          </a:custGeom>
+          <a:solidFill>
+            <a:srgbClr val="9A9A9A"/>
+          </a:solidFill>
+          <a:ln w="0">
+            <a:noFill/>
+          </a:ln>
+        </p:spPr>
+        <p:txBody>
+          <a:bodyPr lIns="0" tIns="0" rIns="0" bIns="0" anchor="t">
+            <a:noAutofit/>
+          </a:bodyPr>
+          <a:p>
+            <a:endParaRPr lang="en-US" sz="2400" b="0" u="none" strike="noStrike">
+              <a:solidFill>
+                <a:srgbClr val="FFFFFF"/>
+              </a:solidFill>
+              <a:effectLst/>
+              <a:uFillTx/>
+              <a:latin typeface="Times New Roman"/>
+            </a:endParaRPr>
+          </a:p>
+        </p:txBody>
+      </p:sp>
+      <p:sp>
+        <p:nvSpPr>
+          <p:cNvPr id="149" name=""/>
+          <p:cNvSpPr/>
+          <p:nvPr/>
+        </p:nvSpPr>
+        <p:spPr>
+          <a:xfrm>
+            <a:off x="1535760" y="3472560"/>
+            <a:ext cx="46440" cy="47160"/>
+          </a:xfrm>
+          <a:custGeom>
+            <a:avLst/>
+            <a:gdLst/>
+            <a:ahLst/>
+            <a:rect l="0" t="0" r="r" b="b"/>
+            <a:pathLst>
+              <a:path fill="none" w="129" h="131">
+                <a:moveTo>
+                  <a:pt x="129" y="65"/>
+                </a:moveTo>
+                <a:cubicBezTo>
+                  <a:pt x="129" y="152"/>
+                  <a:pt x="0" y="152"/>
+                  <a:pt x="0" y="65"/>
+                </a:cubicBezTo>
+                <a:cubicBezTo>
+                  <a:pt x="0" y="-22"/>
+                  <a:pt x="129" y="-22"/>
+                  <a:pt x="129" y="65"/>
+                </a:cubicBezTo>
+              </a:path>
+            </a:pathLst>
+          </a:custGeom>
+          <a:ln cap="rnd" w="5400">
+            <a:solidFill>
+              <a:srgbClr val="9A9A9A"/>
+            </a:solidFill>
+            <a:round/>
+          </a:ln>
+        </p:spPr>
+        <p:txBody>
+          <a:bodyPr lIns="2520" tIns="2520" rIns="2520" bIns="2520" anchor="t">
+            <a:noAutofit/>
+          </a:bodyPr>
+          <a:p>
+            <a:endParaRPr lang="en-US" sz="2400" b="0" u="none" strike="noStrike">
+              <a:solidFill>
+                <a:srgbClr val="000000"/>
+              </a:solidFill>
+              <a:effectLst/>
+              <a:uFillTx/>
+              <a:latin typeface="Times New Roman"/>
+            </a:endParaRPr>
+          </a:p>
+        </p:txBody>
+      </p:sp>
+      <p:sp>
+        <p:nvSpPr>
+          <p:cNvPr id="150" name=""/>
+          <p:cNvSpPr/>
+          <p:nvPr/>
+        </p:nvSpPr>
+        <p:spPr>
+          <a:xfrm>
+            <a:off x="2183400" y="2545200"/>
+            <a:ext cx="575640" cy="1521000"/>
+          </a:xfrm>
+          <a:custGeom>
+            <a:avLst/>
+            <a:gdLst/>
+            <a:ahLst/>
+            <a:rect l="0" t="0" r="r" b="b"/>
+            <a:pathLst>
+              <a:path w="1599" h="4225">
+                <a:moveTo>
+                  <a:pt x="0" y="0"/>
+                </a:moveTo>
+                <a:lnTo>
+                  <a:pt x="1599" y="0"/>
+                </a:lnTo>
+                <a:lnTo>
+                  <a:pt x="1599" y="4225"/>
+                </a:lnTo>
+                <a:lnTo>
+                  <a:pt x="0" y="4225"/>
+                </a:lnTo>
+                <a:lnTo>
+                  <a:pt x="0" y="0"/>
+                </a:lnTo>
+                <a:close/>
+              </a:path>
+            </a:pathLst>
+          </a:custGeom>
+          <a:solidFill>
+            <a:srgbClr val="FFFFFF"/>
+          </a:solidFill>
+          <a:ln w="0">
+            <a:noFill/>
+          </a:ln>
+        </p:spPr>
+        <p:txBody>
+          <a:bodyPr lIns="0" tIns="0" rIns="0" bIns="0" anchor="t">
+            <a:noAutofit/>
+          </a:bodyPr>
+          <a:p>
+            <a:endParaRPr lang="en-US" sz="2400" b="0" u="none" strike="noStrike">
+              <a:solidFill>
+                <a:srgbClr val="000000"/>
+              </a:solidFill>
+              <a:effectLst/>
+              <a:uFillTx/>
+              <a:latin typeface="Times New Roman"/>
+            </a:endParaRPr>
+          </a:p>
+        </p:txBody>
+      </p:sp>
+      <p:sp>
+        <p:nvSpPr>
+          <p:cNvPr id="151" name=""/>
+          <p:cNvSpPr/>
+          <p:nvPr/>
+        </p:nvSpPr>
+        <p:spPr>
+          <a:xfrm flipV="1">
+            <a:off x="2257200" y="2545200"/>
+            <a:ext cx="0" cy="1520640"/>
+          </a:xfrm>
+          <a:prstGeom prst="line">
+            <a:avLst/>
+          </a:prstGeom>
+          <a:ln w="6480">
+            <a:solidFill>
+              <a:srgbClr val="4A4A4A"/>
+            </a:solidFill>
+            <a:round/>
+          </a:ln>
+        </p:spPr>
+        <p:style>
+          <a:lnRef idx="0"/>
+          <a:fillRef idx="0"/>
+          <a:effectRef idx="0"/>
+          <a:fontRef idx="minor"/>
+        </p:style>
+        <p:txBody>
+          <a:bodyPr lIns="3240" tIns="3240" rIns="3240" bIns="3240" anchor="t">
+            <a:noAutofit/>
+          </a:bodyPr>
+          <a:p>
+            <a:endParaRPr lang="en-US" sz="2400" b="0" u="none" strike="noStrike">
+              <a:solidFill>
+                <a:srgbClr val="000000"/>
+              </a:solidFill>
+              <a:effectLst/>
+              <a:uFillTx/>
+              <a:latin typeface="Times New Roman"/>
+            </a:endParaRPr>
+          </a:p>
+        </p:txBody>
+      </p:sp>
+      <p:sp>
+        <p:nvSpPr>
+          <p:cNvPr id="152" name=""/>
+          <p:cNvSpPr/>
+          <p:nvPr/>
+        </p:nvSpPr>
+        <p:spPr>
+          <a:xfrm>
+            <a:off x="2257200" y="2735280"/>
+            <a:ext cx="24480" cy="0"/>
+          </a:xfrm>
+          <a:prstGeom prst="line">
+            <a:avLst/>
+          </a:prstGeom>
+          <a:ln w="13320">
+            <a:solidFill>
+              <a:srgbClr val="1F5F9E"/>
+            </a:solidFill>
+            <a:round/>
+          </a:ln>
+        </p:spPr>
+        <p:style>
+          <a:lnRef idx="0"/>
+          <a:fillRef idx="0"/>
+          <a:effectRef idx="0"/>
+          <a:fontRef idx="minor"/>
+        </p:style>
+        <p:txBody>
+          <a:bodyPr lIns="6480" tIns="-6480" rIns="6480" bIns="-6480" anchor="t">
+            <a:noAutofit/>
+          </a:bodyPr>
+          <a:p>
+            <a:endParaRPr lang="en-US" sz="2400" b="0" u="none" strike="noStrike">
+              <a:solidFill>
+                <a:srgbClr val="000000"/>
+              </a:solidFill>
+              <a:effectLst/>
+              <a:uFillTx/>
+              <a:latin typeface="Times New Roman"/>
+            </a:endParaRPr>
+          </a:p>
+        </p:txBody>
+      </p:sp>
+      <p:sp>
+        <p:nvSpPr>
+          <p:cNvPr id="153" name=""/>
+          <p:cNvSpPr/>
+          <p:nvPr/>
+        </p:nvSpPr>
+        <p:spPr>
+          <a:xfrm>
+            <a:off x="2257200" y="3115440"/>
+            <a:ext cx="329760" cy="0"/>
+          </a:xfrm>
+          <a:prstGeom prst="line">
+            <a:avLst/>
+          </a:prstGeom>
+          <a:ln w="13320">
+            <a:solidFill>
+              <a:srgbClr val="D1552C"/>
+            </a:solidFill>
+            <a:round/>
+          </a:ln>
+        </p:spPr>
+        <p:style>
+          <a:lnRef idx="0"/>
+          <a:fillRef idx="0"/>
+          <a:effectRef idx="0"/>
+          <a:fontRef idx="minor"/>
+        </p:style>
+        <p:txBody>
+          <a:bodyPr lIns="6480" tIns="-6480" rIns="6480" bIns="-6480" anchor="t">
+            <a:noAutofit/>
+          </a:bodyPr>
+          <a:p>
+            <a:endParaRPr lang="en-US" sz="2400" b="0" u="none" strike="noStrike">
+              <a:solidFill>
+                <a:srgbClr val="000000"/>
+              </a:solidFill>
+              <a:effectLst/>
+              <a:uFillTx/>
+              <a:latin typeface="Times New Roman"/>
+            </a:endParaRPr>
+          </a:p>
+        </p:txBody>
+      </p:sp>
+      <p:sp>
+        <p:nvSpPr>
+          <p:cNvPr id="154" name=""/>
+          <p:cNvSpPr/>
+          <p:nvPr/>
+        </p:nvSpPr>
+        <p:spPr>
+          <a:xfrm>
+            <a:off x="2257200" y="3875760"/>
+            <a:ext cx="438840" cy="0"/>
+          </a:xfrm>
+          <a:prstGeom prst="line">
+            <a:avLst/>
+          </a:prstGeom>
+          <a:ln w="13320">
+            <a:solidFill>
+              <a:srgbClr val="3B3B3B"/>
+            </a:solidFill>
+            <a:round/>
+          </a:ln>
+        </p:spPr>
+        <p:style>
+          <a:lnRef idx="0"/>
+          <a:fillRef idx="0"/>
+          <a:effectRef idx="0"/>
+          <a:fontRef idx="minor"/>
+        </p:style>
+        <p:txBody>
+          <a:bodyPr lIns="6480" tIns="-6480" rIns="6480" bIns="-6480" anchor="t">
+            <a:noAutofit/>
+          </a:bodyPr>
+          <a:p>
+            <a:endParaRPr lang="en-US" sz="2400" b="0" u="none" strike="noStrike">
+              <a:solidFill>
+                <a:srgbClr val="000000"/>
+              </a:solidFill>
+              <a:effectLst/>
+              <a:uFillTx/>
+              <a:latin typeface="Times New Roman"/>
+            </a:endParaRPr>
+          </a:p>
+        </p:txBody>
+      </p:sp>
+      <p:sp>
+        <p:nvSpPr>
+          <p:cNvPr id="155" name=""/>
+          <p:cNvSpPr/>
+          <p:nvPr/>
+        </p:nvSpPr>
+        <p:spPr>
+          <a:xfrm flipH="1">
+            <a:off x="2246400" y="3495600"/>
+            <a:ext cx="10800" cy="0"/>
+          </a:xfrm>
+          <a:prstGeom prst="line">
+            <a:avLst/>
+          </a:prstGeom>
+          <a:ln w="13320">
+            <a:solidFill>
+              <a:srgbClr val="9A9A9A"/>
+            </a:solidFill>
+            <a:round/>
+          </a:ln>
+        </p:spPr>
+        <p:style>
+          <a:lnRef idx="0"/>
+          <a:fillRef idx="0"/>
+          <a:effectRef idx="0"/>
+          <a:fontRef idx="minor"/>
+        </p:style>
+        <p:txBody>
+          <a:bodyPr lIns="6480" tIns="-6480" rIns="6480" bIns="-6480" anchor="t">
+            <a:noAutofit/>
+          </a:bodyPr>
+          <a:p>
+            <a:endParaRPr lang="en-US" sz="2400" b="0" u="none" strike="noStrike">
+              <a:solidFill>
+                <a:srgbClr val="000000"/>
+              </a:solidFill>
+              <a:effectLst/>
+              <a:uFillTx/>
+              <a:latin typeface="Times New Roman"/>
+            </a:endParaRPr>
+          </a:p>
+        </p:txBody>
+      </p:sp>
+      <p:sp>
+        <p:nvSpPr>
+          <p:cNvPr id="156" name=""/>
+          <p:cNvSpPr/>
+          <p:nvPr/>
+        </p:nvSpPr>
+        <p:spPr>
+          <a:xfrm>
+            <a:off x="2258640" y="2712240"/>
+            <a:ext cx="46440" cy="46800"/>
+          </a:xfrm>
+          <a:custGeom>
+            <a:avLst/>
+            <a:gdLst/>
+            <a:ahLst/>
+            <a:rect l="0" t="0" r="r" b="b"/>
+            <a:pathLst>
+              <a:path w="129" h="130">
+                <a:moveTo>
+                  <a:pt x="0" y="65"/>
+                </a:moveTo>
+                <a:cubicBezTo>
+                  <a:pt x="0" y="-21"/>
+                  <a:pt x="129" y="-21"/>
+                  <a:pt x="129" y="65"/>
+                </a:cubicBezTo>
+                <a:cubicBezTo>
+                  <a:pt x="129" y="152"/>
+                  <a:pt x="0" y="152"/>
+                  <a:pt x="0" y="65"/>
+                </a:cubicBezTo>
+                <a:close/>
+              </a:path>
+            </a:pathLst>
+          </a:custGeom>
+          <a:solidFill>
+            <a:srgbClr val="1F5F9E"/>
+          </a:solidFill>
+          <a:ln w="0">
+            <a:noFill/>
+          </a:ln>
+        </p:spPr>
+        <p:txBody>
+          <a:bodyPr lIns="0" tIns="0" rIns="0" bIns="0" anchor="t">
+            <a:noAutofit/>
+          </a:bodyPr>
+          <a:p>
+            <a:endParaRPr lang="en-US" sz="2400" b="0" u="none" strike="noStrike">
+              <a:solidFill>
+                <a:srgbClr val="FFFFFF"/>
+              </a:solidFill>
+              <a:effectLst/>
+              <a:uFillTx/>
+              <a:latin typeface="Times New Roman"/>
+            </a:endParaRPr>
+          </a:p>
+        </p:txBody>
+      </p:sp>
+      <p:sp>
+        <p:nvSpPr>
+          <p:cNvPr id="157" name=""/>
+          <p:cNvSpPr/>
+          <p:nvPr/>
+        </p:nvSpPr>
+        <p:spPr>
+          <a:xfrm>
+            <a:off x="2258640" y="2712240"/>
+            <a:ext cx="46440" cy="46800"/>
+          </a:xfrm>
+          <a:custGeom>
+            <a:avLst/>
+            <a:gdLst/>
+            <a:ahLst/>
+            <a:rect l="0" t="0" r="r" b="b"/>
+            <a:pathLst>
+              <a:path fill="none" w="129" h="130">
+                <a:moveTo>
+                  <a:pt x="129" y="65"/>
+                </a:moveTo>
+                <a:cubicBezTo>
+                  <a:pt x="129" y="152"/>
+                  <a:pt x="0" y="152"/>
+                  <a:pt x="0" y="65"/>
+                </a:cubicBezTo>
+                <a:cubicBezTo>
+                  <a:pt x="0" y="-21"/>
+                  <a:pt x="129" y="-21"/>
+                  <a:pt x="129" y="65"/>
+                </a:cubicBezTo>
+              </a:path>
+            </a:pathLst>
+          </a:custGeom>
+          <a:ln cap="rnd" w="5400">
+            <a:solidFill>
+              <a:srgbClr val="1F5F9E"/>
+            </a:solidFill>
+            <a:round/>
+          </a:ln>
+        </p:spPr>
+        <p:txBody>
+          <a:bodyPr lIns="2520" tIns="2520" rIns="2520" bIns="2520" anchor="t">
+            <a:noAutofit/>
+          </a:bodyPr>
+          <a:p>
+            <a:endParaRPr lang="en-US" sz="2400" b="0" u="none" strike="noStrike">
+              <a:solidFill>
+                <a:srgbClr val="000000"/>
+              </a:solidFill>
+              <a:effectLst/>
+              <a:uFillTx/>
+              <a:latin typeface="Times New Roman"/>
+            </a:endParaRPr>
+          </a:p>
+        </p:txBody>
+      </p:sp>
+      <p:sp>
+        <p:nvSpPr>
+          <p:cNvPr id="158" name=""/>
+          <p:cNvSpPr/>
+          <p:nvPr/>
+        </p:nvSpPr>
+        <p:spPr>
+          <a:xfrm>
+            <a:off x="2563560" y="3092400"/>
+            <a:ext cx="46800" cy="46800"/>
+          </a:xfrm>
+          <a:custGeom>
+            <a:avLst/>
+            <a:gdLst/>
+            <a:ahLst/>
+            <a:rect l="0" t="0" r="r" b="b"/>
+            <a:pathLst>
+              <a:path w="130" h="130">
+                <a:moveTo>
+                  <a:pt x="0" y="65"/>
+                </a:moveTo>
+                <a:cubicBezTo>
+                  <a:pt x="0" y="-22"/>
+                  <a:pt x="130" y="-22"/>
+                  <a:pt x="130" y="65"/>
+                </a:cubicBezTo>
+                <a:cubicBezTo>
+                  <a:pt x="130" y="151"/>
+                  <a:pt x="0" y="151"/>
+                  <a:pt x="0" y="65"/>
+                </a:cubicBezTo>
+                <a:close/>
+              </a:path>
+            </a:pathLst>
+          </a:custGeom>
+          <a:solidFill>
+            <a:srgbClr val="D1552C"/>
+          </a:solidFill>
+          <a:ln w="0">
+            <a:noFill/>
+          </a:ln>
+        </p:spPr>
+        <p:txBody>
+          <a:bodyPr lIns="0" tIns="0" rIns="0" bIns="0" anchor="t">
+            <a:noAutofit/>
+          </a:bodyPr>
+          <a:p>
+            <a:endParaRPr lang="en-US" sz="2400" b="0" u="none" strike="noStrike">
+              <a:solidFill>
+                <a:srgbClr val="FFFFFF"/>
+              </a:solidFill>
+              <a:effectLst/>
+              <a:uFillTx/>
+              <a:latin typeface="Times New Roman"/>
+            </a:endParaRPr>
+          </a:p>
+        </p:txBody>
+      </p:sp>
+      <p:sp>
+        <p:nvSpPr>
+          <p:cNvPr id="159" name=""/>
+          <p:cNvSpPr/>
+          <p:nvPr/>
+        </p:nvSpPr>
+        <p:spPr>
+          <a:xfrm>
+            <a:off x="2563560" y="3092400"/>
+            <a:ext cx="46800" cy="46800"/>
+          </a:xfrm>
+          <a:custGeom>
+            <a:avLst/>
+            <a:gdLst/>
+            <a:ahLst/>
+            <a:rect l="0" t="0" r="r" b="b"/>
+            <a:pathLst>
+              <a:path fill="none" w="130" h="130">
+                <a:moveTo>
+                  <a:pt x="130" y="65"/>
+                </a:moveTo>
+                <a:cubicBezTo>
+                  <a:pt x="130" y="151"/>
+                  <a:pt x="0" y="151"/>
+                  <a:pt x="0" y="65"/>
+                </a:cubicBezTo>
+                <a:cubicBezTo>
+                  <a:pt x="0" y="-22"/>
+                  <a:pt x="130" y="-22"/>
+                  <a:pt x="130" y="65"/>
+                </a:cubicBezTo>
+              </a:path>
+            </a:pathLst>
+          </a:custGeom>
+          <a:ln cap="rnd" w="5400">
+            <a:solidFill>
+              <a:srgbClr val="D1552C"/>
+            </a:solidFill>
+            <a:round/>
+          </a:ln>
+        </p:spPr>
+        <p:txBody>
+          <a:bodyPr lIns="2520" tIns="2520" rIns="2520" bIns="2520" anchor="t">
+            <a:noAutofit/>
+          </a:bodyPr>
+          <a:p>
+            <a:endParaRPr lang="en-US" sz="2400" b="0" u="none" strike="noStrike">
+              <a:solidFill>
+                <a:srgbClr val="000000"/>
+              </a:solidFill>
+              <a:effectLst/>
+              <a:uFillTx/>
+              <a:latin typeface="Times New Roman"/>
+            </a:endParaRPr>
+          </a:p>
+        </p:txBody>
+      </p:sp>
+      <p:sp>
+        <p:nvSpPr>
+          <p:cNvPr id="160" name=""/>
+          <p:cNvSpPr/>
+          <p:nvPr/>
+        </p:nvSpPr>
+        <p:spPr>
+          <a:xfrm>
+            <a:off x="2672640" y="3852720"/>
+            <a:ext cx="46800" cy="47160"/>
+          </a:xfrm>
+          <a:custGeom>
+            <a:avLst/>
+            <a:gdLst/>
+            <a:ahLst/>
+            <a:rect l="0" t="0" r="r" b="b"/>
+            <a:pathLst>
+              <a:path w="130" h="131">
+                <a:moveTo>
+                  <a:pt x="0" y="65"/>
+                </a:moveTo>
+                <a:cubicBezTo>
+                  <a:pt x="0" y="-22"/>
+                  <a:pt x="130" y="-22"/>
+                  <a:pt x="130" y="65"/>
+                </a:cubicBezTo>
+                <a:cubicBezTo>
+                  <a:pt x="130" y="152"/>
+                  <a:pt x="0" y="152"/>
+                  <a:pt x="0" y="65"/>
+                </a:cubicBezTo>
+                <a:close/>
+              </a:path>
+            </a:pathLst>
+          </a:custGeom>
+          <a:solidFill>
+            <a:srgbClr val="3B3B3B"/>
+          </a:solidFill>
+          <a:ln w="0">
+            <a:noFill/>
+          </a:ln>
+        </p:spPr>
+        <p:txBody>
+          <a:bodyPr lIns="0" tIns="0" rIns="0" bIns="0" anchor="t">
+            <a:noAutofit/>
+          </a:bodyPr>
+          <a:p>
+            <a:endParaRPr lang="en-US" sz="2400" b="0" u="none" strike="noStrike">
+              <a:solidFill>
+                <a:srgbClr val="FFFFFF"/>
+              </a:solidFill>
+              <a:effectLst/>
+              <a:uFillTx/>
+              <a:latin typeface="Times New Roman"/>
+            </a:endParaRPr>
+          </a:p>
+        </p:txBody>
+      </p:sp>
+      <p:sp>
+        <p:nvSpPr>
+          <p:cNvPr id="161" name=""/>
+          <p:cNvSpPr/>
+          <p:nvPr/>
+        </p:nvSpPr>
+        <p:spPr>
+          <a:xfrm>
+            <a:off x="2672640" y="3852720"/>
+            <a:ext cx="46800" cy="47160"/>
+          </a:xfrm>
+          <a:custGeom>
+            <a:avLst/>
+            <a:gdLst/>
+            <a:ahLst/>
+            <a:rect l="0" t="0" r="r" b="b"/>
+            <a:pathLst>
+              <a:path fill="none" w="130" h="131">
+                <a:moveTo>
+                  <a:pt x="130" y="65"/>
+                </a:moveTo>
+                <a:cubicBezTo>
+                  <a:pt x="130" y="152"/>
+                  <a:pt x="0" y="152"/>
+                  <a:pt x="0" y="65"/>
+                </a:cubicBezTo>
+                <a:cubicBezTo>
+                  <a:pt x="0" y="-22"/>
+                  <a:pt x="130" y="-22"/>
+                  <a:pt x="130" y="65"/>
+                </a:cubicBezTo>
+              </a:path>
+            </a:pathLst>
+          </a:custGeom>
+          <a:ln cap="rnd" w="5400">
+            <a:solidFill>
+              <a:srgbClr val="3B3B3B"/>
+            </a:solidFill>
+            <a:round/>
+          </a:ln>
+        </p:spPr>
+        <p:txBody>
+          <a:bodyPr lIns="2520" tIns="2520" rIns="2520" bIns="2520" anchor="t">
+            <a:noAutofit/>
+          </a:bodyPr>
+          <a:p>
+            <a:endParaRPr lang="en-US" sz="2400" b="0" u="none" strike="noStrike">
+              <a:solidFill>
+                <a:srgbClr val="000000"/>
+              </a:solidFill>
+              <a:effectLst/>
+              <a:uFillTx/>
+              <a:latin typeface="Times New Roman"/>
+            </a:endParaRPr>
+          </a:p>
+        </p:txBody>
+      </p:sp>
+      <p:sp>
+        <p:nvSpPr>
+          <p:cNvPr id="162" name=""/>
+          <p:cNvSpPr/>
+          <p:nvPr/>
+        </p:nvSpPr>
+        <p:spPr>
+          <a:xfrm>
+            <a:off x="2223000" y="3472560"/>
+            <a:ext cx="46800" cy="47160"/>
+          </a:xfrm>
+          <a:custGeom>
+            <a:avLst/>
+            <a:gdLst/>
+            <a:ahLst/>
+            <a:rect l="0" t="0" r="r" b="b"/>
+            <a:pathLst>
+              <a:path w="130" h="131">
+                <a:moveTo>
+                  <a:pt x="0" y="65"/>
+                </a:moveTo>
+                <a:cubicBezTo>
+                  <a:pt x="0" y="-22"/>
+                  <a:pt x="130" y="-22"/>
+                  <a:pt x="130" y="65"/>
+                </a:cubicBezTo>
+                <a:cubicBezTo>
+                  <a:pt x="130" y="152"/>
+                  <a:pt x="0" y="152"/>
+                  <a:pt x="0" y="65"/>
+                </a:cubicBezTo>
+                <a:close/>
+              </a:path>
+            </a:pathLst>
+          </a:custGeom>
+          <a:solidFill>
+            <a:srgbClr val="9A9A9A"/>
+          </a:solidFill>
+          <a:ln w="0">
+            <a:noFill/>
+          </a:ln>
+        </p:spPr>
+        <p:txBody>
+          <a:bodyPr lIns="0" tIns="0" rIns="0" bIns="0" anchor="t">
+            <a:noAutofit/>
+          </a:bodyPr>
+          <a:p>
+            <a:endParaRPr lang="en-US" sz="2400" b="0" u="none" strike="noStrike">
+              <a:solidFill>
+                <a:srgbClr val="FFFFFF"/>
+              </a:solidFill>
+              <a:effectLst/>
+              <a:uFillTx/>
+              <a:latin typeface="Times New Roman"/>
+            </a:endParaRPr>
+          </a:p>
+        </p:txBody>
+      </p:sp>
+      <p:sp>
+        <p:nvSpPr>
+          <p:cNvPr id="163" name=""/>
+          <p:cNvSpPr/>
+          <p:nvPr/>
+        </p:nvSpPr>
+        <p:spPr>
+          <a:xfrm>
+            <a:off x="2223000" y="3472560"/>
+            <a:ext cx="46800" cy="47160"/>
+          </a:xfrm>
+          <a:custGeom>
+            <a:avLst/>
+            <a:gdLst/>
+            <a:ahLst/>
+            <a:rect l="0" t="0" r="r" b="b"/>
+            <a:pathLst>
+              <a:path fill="none" w="130" h="131">
+                <a:moveTo>
+                  <a:pt x="130" y="65"/>
+                </a:moveTo>
+                <a:cubicBezTo>
+                  <a:pt x="130" y="152"/>
+                  <a:pt x="0" y="152"/>
+                  <a:pt x="0" y="65"/>
+                </a:cubicBezTo>
+                <a:cubicBezTo>
+                  <a:pt x="0" y="-22"/>
+                  <a:pt x="130" y="-22"/>
+                  <a:pt x="130" y="65"/>
+                </a:cubicBezTo>
+              </a:path>
+            </a:pathLst>
+          </a:custGeom>
+          <a:ln cap="rnd" w="5400">
+            <a:solidFill>
+              <a:srgbClr val="9A9A9A"/>
+            </a:solidFill>
+            <a:round/>
+          </a:ln>
+        </p:spPr>
+        <p:txBody>
+          <a:bodyPr lIns="2520" tIns="2520" rIns="2520" bIns="2520" anchor="t">
+            <a:noAutofit/>
+          </a:bodyPr>
+          <a:p>
+            <a:endParaRPr lang="en-US" sz="2400" b="0" u="none" strike="noStrike">
+              <a:solidFill>
+                <a:srgbClr val="000000"/>
+              </a:solidFill>
+              <a:effectLst/>
+              <a:uFillTx/>
+              <a:latin typeface="Times New Roman"/>
+            </a:endParaRPr>
+          </a:p>
+        </p:txBody>
+      </p:sp>
+      <p:sp>
+        <p:nvSpPr>
+          <p:cNvPr id="164" name=""/>
+          <p:cNvSpPr/>
+          <p:nvPr/>
+        </p:nvSpPr>
+        <p:spPr>
+          <a:xfrm>
+            <a:off x="2872800" y="2545200"/>
+            <a:ext cx="575640" cy="1521000"/>
+          </a:xfrm>
+          <a:custGeom>
+            <a:avLst/>
+            <a:gdLst/>
+            <a:ahLst/>
+            <a:rect l="0" t="0" r="r" b="b"/>
+            <a:pathLst>
+              <a:path w="1599" h="4225">
+                <a:moveTo>
+                  <a:pt x="0" y="0"/>
+                </a:moveTo>
+                <a:lnTo>
+                  <a:pt x="1599" y="0"/>
+                </a:lnTo>
+                <a:lnTo>
+                  <a:pt x="1599" y="4225"/>
+                </a:lnTo>
+                <a:lnTo>
+                  <a:pt x="0" y="4225"/>
+                </a:lnTo>
+                <a:lnTo>
+                  <a:pt x="0" y="0"/>
+                </a:lnTo>
+                <a:close/>
+              </a:path>
+            </a:pathLst>
+          </a:custGeom>
+          <a:solidFill>
+            <a:srgbClr val="FFFFFF"/>
+          </a:solidFill>
+          <a:ln w="0">
+            <a:noFill/>
+          </a:ln>
+        </p:spPr>
+        <p:txBody>
+          <a:bodyPr lIns="0" tIns="0" rIns="0" bIns="0" anchor="t">
+            <a:noAutofit/>
+          </a:bodyPr>
+          <a:p>
+            <a:endParaRPr lang="en-US" sz="2400" b="0" u="none" strike="noStrike">
+              <a:solidFill>
+                <a:srgbClr val="000000"/>
+              </a:solidFill>
+              <a:effectLst/>
+              <a:uFillTx/>
+              <a:latin typeface="Times New Roman"/>
+            </a:endParaRPr>
+          </a:p>
+        </p:txBody>
+      </p:sp>
+      <p:sp>
+        <p:nvSpPr>
+          <p:cNvPr id="165" name=""/>
+          <p:cNvSpPr/>
+          <p:nvPr/>
+        </p:nvSpPr>
+        <p:spPr>
+          <a:xfrm flipV="1">
+            <a:off x="2935800" y="2545200"/>
+            <a:ext cx="0" cy="1520640"/>
+          </a:xfrm>
+          <a:prstGeom prst="line">
+            <a:avLst/>
+          </a:prstGeom>
+          <a:ln w="6480">
+            <a:solidFill>
+              <a:srgbClr val="4A4A4A"/>
+            </a:solidFill>
+            <a:round/>
+          </a:ln>
+        </p:spPr>
+        <p:style>
+          <a:lnRef idx="0"/>
+          <a:fillRef idx="0"/>
+          <a:effectRef idx="0"/>
+          <a:fontRef idx="minor"/>
+        </p:style>
+        <p:txBody>
+          <a:bodyPr lIns="3240" tIns="3240" rIns="3240" bIns="3240" anchor="t">
+            <a:noAutofit/>
+          </a:bodyPr>
+          <a:p>
+            <a:endParaRPr lang="en-US" sz="2400" b="0" u="none" strike="noStrike">
+              <a:solidFill>
+                <a:srgbClr val="000000"/>
+              </a:solidFill>
+              <a:effectLst/>
+              <a:uFillTx/>
+              <a:latin typeface="Times New Roman"/>
+            </a:endParaRPr>
+          </a:p>
+        </p:txBody>
+      </p:sp>
+      <p:sp>
+        <p:nvSpPr>
+          <p:cNvPr id="166" name=""/>
+          <p:cNvSpPr/>
+          <p:nvPr/>
+        </p:nvSpPr>
+        <p:spPr>
+          <a:xfrm>
+            <a:off x="2935800" y="2735280"/>
+            <a:ext cx="449280" cy="0"/>
+          </a:xfrm>
+          <a:prstGeom prst="line">
+            <a:avLst/>
+          </a:prstGeom>
+          <a:ln w="13320">
+            <a:solidFill>
+              <a:srgbClr val="1F5F9E"/>
+            </a:solidFill>
+            <a:round/>
+          </a:ln>
+        </p:spPr>
+        <p:style>
+          <a:lnRef idx="0"/>
+          <a:fillRef idx="0"/>
+          <a:effectRef idx="0"/>
+          <a:fontRef idx="minor"/>
+        </p:style>
+        <p:txBody>
+          <a:bodyPr lIns="6480" tIns="-6480" rIns="6480" bIns="-6480" anchor="t">
+            <a:noAutofit/>
+          </a:bodyPr>
+          <a:p>
+            <a:endParaRPr lang="en-US" sz="2400" b="0" u="none" strike="noStrike">
+              <a:solidFill>
+                <a:srgbClr val="000000"/>
+              </a:solidFill>
+              <a:effectLst/>
+              <a:uFillTx/>
+              <a:latin typeface="Times New Roman"/>
+            </a:endParaRPr>
+          </a:p>
+        </p:txBody>
+      </p:sp>
+      <p:sp>
+        <p:nvSpPr>
+          <p:cNvPr id="167" name=""/>
+          <p:cNvSpPr/>
+          <p:nvPr/>
+        </p:nvSpPr>
+        <p:spPr>
+          <a:xfrm>
+            <a:off x="2935800" y="3115440"/>
+            <a:ext cx="391320" cy="0"/>
+          </a:xfrm>
+          <a:prstGeom prst="line">
+            <a:avLst/>
+          </a:prstGeom>
+          <a:ln w="13320">
+            <a:solidFill>
+              <a:srgbClr val="D1552C"/>
+            </a:solidFill>
+            <a:round/>
+          </a:ln>
+        </p:spPr>
+        <p:style>
+          <a:lnRef idx="0"/>
+          <a:fillRef idx="0"/>
+          <a:effectRef idx="0"/>
+          <a:fontRef idx="minor"/>
+        </p:style>
+        <p:txBody>
+          <a:bodyPr lIns="6480" tIns="-6480" rIns="6480" bIns="-6480" anchor="t">
+            <a:noAutofit/>
+          </a:bodyPr>
+          <a:p>
+            <a:endParaRPr lang="en-US" sz="2400" b="0" u="none" strike="noStrike">
+              <a:solidFill>
+                <a:srgbClr val="000000"/>
+              </a:solidFill>
+              <a:effectLst/>
+              <a:uFillTx/>
+              <a:latin typeface="Times New Roman"/>
+            </a:endParaRPr>
+          </a:p>
+        </p:txBody>
+      </p:sp>
+      <p:sp>
+        <p:nvSpPr>
+          <p:cNvPr id="168" name=""/>
+          <p:cNvSpPr/>
+          <p:nvPr/>
+        </p:nvSpPr>
+        <p:spPr>
+          <a:xfrm>
+            <a:off x="2935800" y="3875760"/>
+            <a:ext cx="221040" cy="0"/>
+          </a:xfrm>
+          <a:prstGeom prst="line">
+            <a:avLst/>
+          </a:prstGeom>
+          <a:ln w="13320">
+            <a:solidFill>
+              <a:srgbClr val="3B3B3B"/>
+            </a:solidFill>
+            <a:round/>
+          </a:ln>
+        </p:spPr>
+        <p:style>
+          <a:lnRef idx="0"/>
+          <a:fillRef idx="0"/>
+          <a:effectRef idx="0"/>
+          <a:fontRef idx="minor"/>
+        </p:style>
+        <p:txBody>
+          <a:bodyPr lIns="6480" tIns="-6480" rIns="6480" bIns="-6480" anchor="t">
+            <a:noAutofit/>
+          </a:bodyPr>
+          <a:p>
+            <a:endParaRPr lang="en-US" sz="2400" b="0" u="none" strike="noStrike">
+              <a:solidFill>
+                <a:srgbClr val="000000"/>
+              </a:solidFill>
+              <a:effectLst/>
+              <a:uFillTx/>
+              <a:latin typeface="Times New Roman"/>
+            </a:endParaRPr>
+          </a:p>
+        </p:txBody>
+      </p:sp>
+      <p:sp>
+        <p:nvSpPr>
+          <p:cNvPr id="169" name=""/>
+          <p:cNvSpPr/>
+          <p:nvPr/>
+        </p:nvSpPr>
+        <p:spPr>
+          <a:xfrm>
+            <a:off x="2935800" y="3495600"/>
+            <a:ext cx="6840" cy="0"/>
+          </a:xfrm>
+          <a:prstGeom prst="line">
+            <a:avLst/>
+          </a:prstGeom>
+          <a:ln w="13320">
+            <a:solidFill>
+              <a:srgbClr val="9A9A9A"/>
+            </a:solidFill>
+            <a:round/>
+          </a:ln>
+        </p:spPr>
+        <p:style>
+          <a:lnRef idx="0"/>
+          <a:fillRef idx="0"/>
+          <a:effectRef idx="0"/>
+          <a:fontRef idx="minor"/>
+        </p:style>
+        <p:txBody>
+          <a:bodyPr lIns="6480" tIns="-6480" rIns="6480" bIns="-6480" anchor="t">
+            <a:noAutofit/>
+          </a:bodyPr>
+          <a:p>
+            <a:endParaRPr lang="en-US" sz="2400" b="0" u="none" strike="noStrike">
+              <a:solidFill>
+                <a:srgbClr val="000000"/>
+              </a:solidFill>
+              <a:effectLst/>
+              <a:uFillTx/>
+              <a:latin typeface="Times New Roman"/>
+            </a:endParaRPr>
+          </a:p>
+        </p:txBody>
+      </p:sp>
+      <p:sp>
+        <p:nvSpPr>
+          <p:cNvPr id="170" name=""/>
+          <p:cNvSpPr/>
+          <p:nvPr/>
+        </p:nvSpPr>
+        <p:spPr>
+          <a:xfrm>
+            <a:off x="3362040" y="2712240"/>
+            <a:ext cx="46800" cy="46800"/>
+          </a:xfrm>
+          <a:custGeom>
+            <a:avLst/>
+            <a:gdLst/>
+            <a:ahLst/>
+            <a:rect l="0" t="0" r="r" b="b"/>
+            <a:pathLst>
+              <a:path w="130" h="130">
+                <a:moveTo>
+                  <a:pt x="0" y="65"/>
+                </a:moveTo>
+                <a:cubicBezTo>
+                  <a:pt x="0" y="-21"/>
+                  <a:pt x="130" y="-21"/>
+                  <a:pt x="130" y="65"/>
+                </a:cubicBezTo>
+                <a:cubicBezTo>
+                  <a:pt x="130" y="152"/>
+                  <a:pt x="0" y="152"/>
+                  <a:pt x="0" y="65"/>
+                </a:cubicBezTo>
+                <a:close/>
+              </a:path>
+            </a:pathLst>
+          </a:custGeom>
+          <a:solidFill>
+            <a:srgbClr val="1F5F9E"/>
+          </a:solidFill>
+          <a:ln w="0">
+            <a:noFill/>
+          </a:ln>
+        </p:spPr>
+        <p:txBody>
+          <a:bodyPr lIns="0" tIns="0" rIns="0" bIns="0" anchor="t">
+            <a:noAutofit/>
+          </a:bodyPr>
+          <a:p>
+            <a:endParaRPr lang="en-US" sz="2400" b="0" u="none" strike="noStrike">
+              <a:solidFill>
+                <a:srgbClr val="FFFFFF"/>
+              </a:solidFill>
+              <a:effectLst/>
+              <a:uFillTx/>
+              <a:latin typeface="Times New Roman"/>
+            </a:endParaRPr>
+          </a:p>
+        </p:txBody>
+      </p:sp>
+      <p:sp>
+        <p:nvSpPr>
+          <p:cNvPr id="171" name=""/>
+          <p:cNvSpPr/>
+          <p:nvPr/>
+        </p:nvSpPr>
+        <p:spPr>
+          <a:xfrm>
+            <a:off x="3362040" y="2712240"/>
+            <a:ext cx="46800" cy="46800"/>
+          </a:xfrm>
+          <a:custGeom>
+            <a:avLst/>
+            <a:gdLst/>
+            <a:ahLst/>
+            <a:rect l="0" t="0" r="r" b="b"/>
+            <a:pathLst>
+              <a:path fill="none" w="130" h="130">
+                <a:moveTo>
+                  <a:pt x="130" y="65"/>
+                </a:moveTo>
+                <a:cubicBezTo>
+                  <a:pt x="130" y="152"/>
+                  <a:pt x="0" y="152"/>
+                  <a:pt x="0" y="65"/>
+                </a:cubicBezTo>
+                <a:cubicBezTo>
+                  <a:pt x="0" y="-21"/>
+                  <a:pt x="130" y="-21"/>
+                  <a:pt x="130" y="65"/>
+                </a:cubicBezTo>
+              </a:path>
+            </a:pathLst>
+          </a:custGeom>
+          <a:ln cap="rnd" w="5400">
+            <a:solidFill>
+              <a:srgbClr val="1F5F9E"/>
+            </a:solidFill>
+            <a:round/>
+          </a:ln>
+        </p:spPr>
+        <p:txBody>
+          <a:bodyPr lIns="2520" tIns="2520" rIns="2520" bIns="2520" anchor="t">
+            <a:noAutofit/>
+          </a:bodyPr>
+          <a:p>
+            <a:endParaRPr lang="en-US" sz="2400" b="0" u="none" strike="noStrike">
+              <a:solidFill>
+                <a:srgbClr val="000000"/>
+              </a:solidFill>
+              <a:effectLst/>
+              <a:uFillTx/>
+              <a:latin typeface="Times New Roman"/>
+            </a:endParaRPr>
+          </a:p>
+        </p:txBody>
+      </p:sp>
+      <p:sp>
+        <p:nvSpPr>
+          <p:cNvPr id="172" name=""/>
+          <p:cNvSpPr/>
+          <p:nvPr/>
+        </p:nvSpPr>
+        <p:spPr>
+          <a:xfrm>
+            <a:off x="3304080" y="3092400"/>
             <a:ext cx="46440" cy="46800"/>
           </a:xfrm>
           <a:custGeom>
@@ -7823,13 +10134,13 @@
       </p:sp>
       <p:sp>
         <p:nvSpPr>
-          <p:cNvPr id="129" name=""/>
-          <p:cNvSpPr/>
-          <p:nvPr/>
-        </p:nvSpPr>
-        <p:spPr>
-          <a:xfrm>
-            <a:off x="1283400" y="3092400"/>
+          <p:cNvPr id="173" name=""/>
+          <p:cNvSpPr/>
+          <p:nvPr/>
+        </p:nvSpPr>
+        <p:spPr>
+          <a:xfrm>
+            <a:off x="3304080" y="3092400"/>
             <a:ext cx="46440" cy="46800"/>
           </a:xfrm>
           <a:custGeom>
@@ -7880,128 +10191,13 @@
       </p:sp>
       <p:sp>
         <p:nvSpPr>
-          <p:cNvPr id="130" name=""/>
-          <p:cNvSpPr/>
-          <p:nvPr/>
-        </p:nvSpPr>
-        <p:spPr>
-          <a:xfrm>
-            <a:off x="1294200" y="2712240"/>
-            <a:ext cx="46440" cy="46800"/>
-          </a:xfrm>
-          <a:custGeom>
-            <a:avLst/>
-            <a:gdLst/>
-            <a:ahLst/>
-            <a:rect l="0" t="0" r="r" b="b"/>
-            <a:pathLst>
-              <a:path w="129" h="130">
-                <a:moveTo>
-                  <a:pt x="0" y="65"/>
-                </a:moveTo>
-                <a:cubicBezTo>
-                  <a:pt x="0" y="-21"/>
-                  <a:pt x="129" y="-21"/>
-                  <a:pt x="129" y="65"/>
-                </a:cubicBezTo>
-                <a:cubicBezTo>
-                  <a:pt x="129" y="152"/>
-                  <a:pt x="0" y="152"/>
-                  <a:pt x="0" y="65"/>
-                </a:cubicBezTo>
-                <a:close/>
-              </a:path>
-            </a:pathLst>
-          </a:custGeom>
-          <a:solidFill>
-            <a:srgbClr val="1F5F9E"/>
-          </a:solidFill>
-          <a:ln w="0">
-            <a:noFill/>
-          </a:ln>
-        </p:spPr>
-        <p:txBody>
-          <a:bodyPr lIns="0" tIns="0" rIns="0" bIns="0" anchor="t">
-            <a:noAutofit/>
-          </a:bodyPr>
-          <a:p>
-            <a:endParaRPr lang="en-US" sz="2400" b="0" u="none" strike="noStrike">
-              <a:solidFill>
-                <a:srgbClr val="FFFFFF"/>
-              </a:solidFill>
-              <a:effectLst/>
-              <a:uFillTx/>
-              <a:latin typeface="Times New Roman"/>
-            </a:endParaRPr>
-          </a:p>
-        </p:txBody>
-      </p:sp>
-      <p:sp>
-        <p:nvSpPr>
-          <p:cNvPr id="131" name=""/>
-          <p:cNvSpPr/>
-          <p:nvPr/>
-        </p:nvSpPr>
-        <p:spPr>
-          <a:xfrm>
-            <a:off x="1294200" y="2712240"/>
-            <a:ext cx="46440" cy="46800"/>
-          </a:xfrm>
-          <a:custGeom>
-            <a:avLst/>
-            <a:gdLst/>
-            <a:ahLst/>
-            <a:rect l="0" t="0" r="r" b="b"/>
-            <a:pathLst>
-              <a:path fill="none" w="129" h="130">
-                <a:moveTo>
-                  <a:pt x="129" y="65"/>
-                </a:moveTo>
-                <a:cubicBezTo>
-                  <a:pt x="129" y="152"/>
-                  <a:pt x="0" y="152"/>
-                  <a:pt x="0" y="65"/>
-                </a:cubicBezTo>
-                <a:cubicBezTo>
-                  <a:pt x="0" y="-21"/>
-                  <a:pt x="129" y="-21"/>
-                  <a:pt x="129" y="65"/>
-                </a:cubicBezTo>
-              </a:path>
-            </a:pathLst>
-          </a:custGeom>
-          <a:ln cap="rnd" w="5400">
-            <a:solidFill>
-              <a:srgbClr val="1F5F9E"/>
-            </a:solidFill>
-            <a:round/>
-          </a:ln>
-        </p:spPr>
-        <p:txBody>
-          <a:bodyPr lIns="2520" tIns="2520" rIns="2520" bIns="2520" anchor="t">
-            <a:noAutofit/>
-          </a:bodyPr>
-          <a:p>
-            <a:endParaRPr lang="en-US" sz="2400" b="0" u="none" strike="noStrike">
-              <a:solidFill>
-                <a:srgbClr val="000000"/>
-              </a:solidFill>
-              <a:effectLst/>
-              <a:uFillTx/>
-              <a:latin typeface="Times New Roman"/>
-            </a:endParaRPr>
-          </a:p>
-        </p:txBody>
-      </p:sp>
-      <p:sp>
-        <p:nvSpPr>
-          <p:cNvPr id="132" name=""/>
-          <p:cNvSpPr/>
-          <p:nvPr/>
-        </p:nvSpPr>
-        <p:spPr>
-          <a:xfrm>
-            <a:off x="965160" y="3852720"/>
+          <p:cNvPr id="174" name=""/>
+          <p:cNvSpPr/>
+          <p:nvPr/>
+        </p:nvSpPr>
+        <p:spPr>
+          <a:xfrm>
+            <a:off x="3133440" y="3852720"/>
             <a:ext cx="46800" cy="47160"/>
           </a:xfrm>
           <a:custGeom>
@@ -8053,13 +10249,13 @@
       </p:sp>
       <p:sp>
         <p:nvSpPr>
-          <p:cNvPr id="133" name=""/>
-          <p:cNvSpPr/>
-          <p:nvPr/>
-        </p:nvSpPr>
-        <p:spPr>
-          <a:xfrm>
-            <a:off x="965160" y="3852720"/>
+          <p:cNvPr id="175" name=""/>
+          <p:cNvSpPr/>
+          <p:nvPr/>
+        </p:nvSpPr>
+        <p:spPr>
+          <a:xfrm>
+            <a:off x="3133440" y="3852720"/>
             <a:ext cx="46800" cy="47160"/>
           </a:xfrm>
           <a:custGeom>
@@ -8110,748 +10306,13 @@
       </p:sp>
       <p:sp>
         <p:nvSpPr>
-          <p:cNvPr id="134" name=""/>
-          <p:cNvSpPr/>
-          <p:nvPr/>
-        </p:nvSpPr>
-        <p:spPr>
-          <a:xfrm>
-            <a:off x="844560" y="3472560"/>
-            <a:ext cx="46440" cy="47160"/>
-          </a:xfrm>
-          <a:custGeom>
-            <a:avLst/>
-            <a:gdLst/>
-            <a:ahLst/>
-            <a:rect l="0" t="0" r="r" b="b"/>
-            <a:pathLst>
-              <a:path w="129" h="131">
-                <a:moveTo>
-                  <a:pt x="0" y="65"/>
-                </a:moveTo>
-                <a:cubicBezTo>
-                  <a:pt x="0" y="-22"/>
-                  <a:pt x="129" y="-22"/>
-                  <a:pt x="129" y="65"/>
-                </a:cubicBezTo>
-                <a:cubicBezTo>
-                  <a:pt x="129" y="152"/>
-                  <a:pt x="0" y="152"/>
-                  <a:pt x="0" y="65"/>
-                </a:cubicBezTo>
-                <a:close/>
-              </a:path>
-            </a:pathLst>
-          </a:custGeom>
-          <a:solidFill>
-            <a:srgbClr val="9A9A9A"/>
-          </a:solidFill>
-          <a:ln w="0">
-            <a:noFill/>
-          </a:ln>
-        </p:spPr>
-        <p:txBody>
-          <a:bodyPr lIns="0" tIns="0" rIns="0" bIns="0" anchor="t">
-            <a:noAutofit/>
-          </a:bodyPr>
-          <a:p>
-            <a:endParaRPr lang="en-US" sz="2400" b="0" u="none" strike="noStrike">
-              <a:solidFill>
-                <a:srgbClr val="FFFFFF"/>
-              </a:solidFill>
-              <a:effectLst/>
-              <a:uFillTx/>
-              <a:latin typeface="Times New Roman"/>
-            </a:endParaRPr>
-          </a:p>
-        </p:txBody>
-      </p:sp>
-      <p:sp>
-        <p:nvSpPr>
-          <p:cNvPr id="135" name=""/>
-          <p:cNvSpPr/>
-          <p:nvPr/>
-        </p:nvSpPr>
-        <p:spPr>
-          <a:xfrm>
-            <a:off x="844560" y="3472560"/>
-            <a:ext cx="46440" cy="47160"/>
-          </a:xfrm>
-          <a:custGeom>
-            <a:avLst/>
-            <a:gdLst/>
-            <a:ahLst/>
-            <a:rect l="0" t="0" r="r" b="b"/>
-            <a:pathLst>
-              <a:path fill="none" w="129" h="131">
-                <a:moveTo>
-                  <a:pt x="129" y="65"/>
-                </a:moveTo>
-                <a:cubicBezTo>
-                  <a:pt x="129" y="152"/>
-                  <a:pt x="0" y="152"/>
-                  <a:pt x="0" y="65"/>
-                </a:cubicBezTo>
-                <a:cubicBezTo>
-                  <a:pt x="0" y="-22"/>
-                  <a:pt x="129" y="-22"/>
-                  <a:pt x="129" y="65"/>
-                </a:cubicBezTo>
-              </a:path>
-            </a:pathLst>
-          </a:custGeom>
-          <a:ln cap="rnd" w="5400">
-            <a:solidFill>
-              <a:srgbClr val="9A9A9A"/>
-            </a:solidFill>
-            <a:round/>
-          </a:ln>
-        </p:spPr>
-        <p:txBody>
-          <a:bodyPr lIns="2520" tIns="2520" rIns="2520" bIns="2520" anchor="t">
-            <a:noAutofit/>
-          </a:bodyPr>
-          <a:p>
-            <a:endParaRPr lang="en-US" sz="2400" b="0" u="none" strike="noStrike">
-              <a:solidFill>
-                <a:srgbClr val="000000"/>
-              </a:solidFill>
-              <a:effectLst/>
-              <a:uFillTx/>
-              <a:latin typeface="Times New Roman"/>
-            </a:endParaRPr>
-          </a:p>
-        </p:txBody>
-      </p:sp>
-      <p:sp>
-        <p:nvSpPr>
-          <p:cNvPr id="136" name=""/>
-          <p:cNvSpPr/>
-          <p:nvPr/>
-        </p:nvSpPr>
-        <p:spPr>
-          <a:xfrm>
-            <a:off x="1494000" y="2545200"/>
-            <a:ext cx="576000" cy="1521000"/>
-          </a:xfrm>
-          <a:custGeom>
-            <a:avLst/>
-            <a:gdLst/>
-            <a:ahLst/>
-            <a:rect l="0" t="0" r="r" b="b"/>
-            <a:pathLst>
-              <a:path w="1600" h="4225">
-                <a:moveTo>
-                  <a:pt x="0" y="0"/>
-                </a:moveTo>
-                <a:lnTo>
-                  <a:pt x="1600" y="0"/>
-                </a:lnTo>
-                <a:lnTo>
-                  <a:pt x="1600" y="4225"/>
-                </a:lnTo>
-                <a:lnTo>
-                  <a:pt x="0" y="4225"/>
-                </a:lnTo>
-                <a:lnTo>
-                  <a:pt x="0" y="0"/>
-                </a:lnTo>
-                <a:close/>
-              </a:path>
-            </a:pathLst>
-          </a:custGeom>
-          <a:solidFill>
-            <a:srgbClr val="FFFFFF"/>
-          </a:solidFill>
-          <a:ln w="0">
-            <a:noFill/>
-          </a:ln>
-        </p:spPr>
-        <p:txBody>
-          <a:bodyPr lIns="0" tIns="0" rIns="0" bIns="0" anchor="t">
-            <a:noAutofit/>
-          </a:bodyPr>
-          <a:p>
-            <a:endParaRPr lang="en-US" sz="2400" b="0" u="none" strike="noStrike">
-              <a:solidFill>
-                <a:srgbClr val="000000"/>
-              </a:solidFill>
-              <a:effectLst/>
-              <a:uFillTx/>
-              <a:latin typeface="Times New Roman"/>
-            </a:endParaRPr>
-          </a:p>
-        </p:txBody>
-      </p:sp>
-      <p:sp>
-        <p:nvSpPr>
-          <p:cNvPr id="137" name=""/>
-          <p:cNvSpPr/>
-          <p:nvPr/>
-        </p:nvSpPr>
-        <p:spPr>
-          <a:xfrm flipV="1">
-            <a:off x="1557000" y="2545200"/>
-            <a:ext cx="0" cy="1520640"/>
-          </a:xfrm>
-          <a:prstGeom prst="line">
-            <a:avLst/>
-          </a:prstGeom>
-          <a:ln w="6480">
-            <a:solidFill>
-              <a:srgbClr val="4A4A4A"/>
-            </a:solidFill>
-            <a:round/>
-          </a:ln>
-        </p:spPr>
-        <p:style>
-          <a:lnRef idx="0"/>
-          <a:fillRef idx="0"/>
-          <a:effectRef idx="0"/>
-          <a:fontRef idx="minor"/>
-        </p:style>
-        <p:txBody>
-          <a:bodyPr lIns="3240" tIns="3240" rIns="3240" bIns="3240" anchor="t">
-            <a:noAutofit/>
-          </a:bodyPr>
-          <a:p>
-            <a:endParaRPr lang="en-US" sz="2400" b="0" u="none" strike="noStrike">
-              <a:solidFill>
-                <a:srgbClr val="000000"/>
-              </a:solidFill>
-              <a:effectLst/>
-              <a:uFillTx/>
-              <a:latin typeface="Times New Roman"/>
-            </a:endParaRPr>
-          </a:p>
-        </p:txBody>
-      </p:sp>
-      <p:sp>
-        <p:nvSpPr>
-          <p:cNvPr id="138" name=""/>
-          <p:cNvSpPr/>
-          <p:nvPr/>
-        </p:nvSpPr>
-        <p:spPr>
-          <a:xfrm>
-            <a:off x="1557000" y="3115440"/>
-            <a:ext cx="449640" cy="0"/>
-          </a:xfrm>
-          <a:prstGeom prst="line">
-            <a:avLst/>
-          </a:prstGeom>
-          <a:ln w="13320">
-            <a:solidFill>
-              <a:srgbClr val="D1552C"/>
-            </a:solidFill>
-            <a:round/>
-          </a:ln>
-        </p:spPr>
-        <p:style>
-          <a:lnRef idx="0"/>
-          <a:fillRef idx="0"/>
-          <a:effectRef idx="0"/>
-          <a:fontRef idx="minor"/>
-        </p:style>
-        <p:txBody>
-          <a:bodyPr lIns="6480" tIns="-6480" rIns="6480" bIns="-6480" anchor="t">
-            <a:noAutofit/>
-          </a:bodyPr>
-          <a:p>
-            <a:endParaRPr lang="en-US" sz="2400" b="0" u="none" strike="noStrike">
-              <a:solidFill>
-                <a:srgbClr val="000000"/>
-              </a:solidFill>
-              <a:effectLst/>
-              <a:uFillTx/>
-              <a:latin typeface="Times New Roman"/>
-            </a:endParaRPr>
-          </a:p>
-        </p:txBody>
-      </p:sp>
-      <p:sp>
-        <p:nvSpPr>
-          <p:cNvPr id="139" name=""/>
-          <p:cNvSpPr/>
-          <p:nvPr/>
-        </p:nvSpPr>
-        <p:spPr>
-          <a:xfrm>
-            <a:off x="1557000" y="2735280"/>
-            <a:ext cx="274680" cy="0"/>
-          </a:xfrm>
-          <a:prstGeom prst="line">
-            <a:avLst/>
-          </a:prstGeom>
-          <a:ln w="13320">
-            <a:solidFill>
-              <a:srgbClr val="1F5F9E"/>
-            </a:solidFill>
-            <a:round/>
-          </a:ln>
-        </p:spPr>
-        <p:style>
-          <a:lnRef idx="0"/>
-          <a:fillRef idx="0"/>
-          <a:effectRef idx="0"/>
-          <a:fontRef idx="minor"/>
-        </p:style>
-        <p:txBody>
-          <a:bodyPr lIns="6480" tIns="-6480" rIns="6480" bIns="-6480" anchor="t">
-            <a:noAutofit/>
-          </a:bodyPr>
-          <a:p>
-            <a:endParaRPr lang="en-US" sz="2400" b="0" u="none" strike="noStrike">
-              <a:solidFill>
-                <a:srgbClr val="000000"/>
-              </a:solidFill>
-              <a:effectLst/>
-              <a:uFillTx/>
-              <a:latin typeface="Times New Roman"/>
-            </a:endParaRPr>
-          </a:p>
-        </p:txBody>
-      </p:sp>
-      <p:sp>
-        <p:nvSpPr>
-          <p:cNvPr id="140" name=""/>
-          <p:cNvSpPr/>
-          <p:nvPr/>
-        </p:nvSpPr>
-        <p:spPr>
-          <a:xfrm>
-            <a:off x="1557000" y="3875760"/>
-            <a:ext cx="19080" cy="0"/>
-          </a:xfrm>
-          <a:prstGeom prst="line">
-            <a:avLst/>
-          </a:prstGeom>
-          <a:ln w="13320">
-            <a:solidFill>
-              <a:srgbClr val="3B3B3B"/>
-            </a:solidFill>
-            <a:round/>
-          </a:ln>
-        </p:spPr>
-        <p:style>
-          <a:lnRef idx="0"/>
-          <a:fillRef idx="0"/>
-          <a:effectRef idx="0"/>
-          <a:fontRef idx="minor"/>
-        </p:style>
-        <p:txBody>
-          <a:bodyPr lIns="6480" tIns="-6480" rIns="6480" bIns="-6480" anchor="t">
-            <a:noAutofit/>
-          </a:bodyPr>
-          <a:p>
-            <a:endParaRPr lang="en-US" sz="2400" b="0" u="none" strike="noStrike">
-              <a:solidFill>
-                <a:srgbClr val="000000"/>
-              </a:solidFill>
-              <a:effectLst/>
-              <a:uFillTx/>
-              <a:latin typeface="Times New Roman"/>
-            </a:endParaRPr>
-          </a:p>
-        </p:txBody>
-      </p:sp>
-      <p:sp>
-        <p:nvSpPr>
-          <p:cNvPr id="141" name=""/>
-          <p:cNvSpPr/>
-          <p:nvPr/>
-        </p:nvSpPr>
-        <p:spPr>
-          <a:xfrm>
-            <a:off x="1557000" y="3495600"/>
-            <a:ext cx="1440" cy="0"/>
-          </a:xfrm>
-          <a:prstGeom prst="line">
-            <a:avLst/>
-          </a:prstGeom>
-          <a:ln w="13320">
-            <a:solidFill>
-              <a:srgbClr val="9A9A9A"/>
-            </a:solidFill>
-            <a:round/>
-          </a:ln>
-        </p:spPr>
-        <p:style>
-          <a:lnRef idx="0"/>
-          <a:fillRef idx="0"/>
-          <a:effectRef idx="0"/>
-          <a:fontRef idx="minor"/>
-        </p:style>
-        <p:txBody>
-          <a:bodyPr lIns="6480" tIns="-6480" rIns="6480" bIns="-6480" anchor="t">
-            <a:noAutofit/>
-          </a:bodyPr>
-          <a:p>
-            <a:endParaRPr lang="en-US" sz="2400" b="0" u="none" strike="noStrike">
-              <a:solidFill>
-                <a:srgbClr val="000000"/>
-              </a:solidFill>
-              <a:effectLst/>
-              <a:uFillTx/>
-              <a:latin typeface="Times New Roman"/>
-            </a:endParaRPr>
-          </a:p>
-        </p:txBody>
-      </p:sp>
-      <p:sp>
-        <p:nvSpPr>
-          <p:cNvPr id="142" name=""/>
-          <p:cNvSpPr/>
-          <p:nvPr/>
-        </p:nvSpPr>
-        <p:spPr>
-          <a:xfrm>
-            <a:off x="1983240" y="3092400"/>
-            <a:ext cx="46800" cy="46800"/>
-          </a:xfrm>
-          <a:custGeom>
-            <a:avLst/>
-            <a:gdLst/>
-            <a:ahLst/>
-            <a:rect l="0" t="0" r="r" b="b"/>
-            <a:pathLst>
-              <a:path w="130" h="130">
-                <a:moveTo>
-                  <a:pt x="0" y="65"/>
-                </a:moveTo>
-                <a:cubicBezTo>
-                  <a:pt x="0" y="-22"/>
-                  <a:pt x="130" y="-22"/>
-                  <a:pt x="130" y="65"/>
-                </a:cubicBezTo>
-                <a:cubicBezTo>
-                  <a:pt x="130" y="151"/>
-                  <a:pt x="0" y="151"/>
-                  <a:pt x="0" y="65"/>
-                </a:cubicBezTo>
-                <a:close/>
-              </a:path>
-            </a:pathLst>
-          </a:custGeom>
-          <a:solidFill>
-            <a:srgbClr val="D1552C"/>
-          </a:solidFill>
-          <a:ln w="0">
-            <a:noFill/>
-          </a:ln>
-        </p:spPr>
-        <p:txBody>
-          <a:bodyPr lIns="0" tIns="0" rIns="0" bIns="0" anchor="t">
-            <a:noAutofit/>
-          </a:bodyPr>
-          <a:p>
-            <a:endParaRPr lang="en-US" sz="2400" b="0" u="none" strike="noStrike">
-              <a:solidFill>
-                <a:srgbClr val="FFFFFF"/>
-              </a:solidFill>
-              <a:effectLst/>
-              <a:uFillTx/>
-              <a:latin typeface="Times New Roman"/>
-            </a:endParaRPr>
-          </a:p>
-        </p:txBody>
-      </p:sp>
-      <p:sp>
-        <p:nvSpPr>
-          <p:cNvPr id="143" name=""/>
-          <p:cNvSpPr/>
-          <p:nvPr/>
-        </p:nvSpPr>
-        <p:spPr>
-          <a:xfrm>
-            <a:off x="1983240" y="3092400"/>
-            <a:ext cx="46800" cy="46800"/>
-          </a:xfrm>
-          <a:custGeom>
-            <a:avLst/>
-            <a:gdLst/>
-            <a:ahLst/>
-            <a:rect l="0" t="0" r="r" b="b"/>
-            <a:pathLst>
-              <a:path fill="none" w="130" h="130">
-                <a:moveTo>
-                  <a:pt x="130" y="65"/>
-                </a:moveTo>
-                <a:cubicBezTo>
-                  <a:pt x="130" y="151"/>
-                  <a:pt x="0" y="151"/>
-                  <a:pt x="0" y="65"/>
-                </a:cubicBezTo>
-                <a:cubicBezTo>
-                  <a:pt x="0" y="-22"/>
-                  <a:pt x="130" y="-22"/>
-                  <a:pt x="130" y="65"/>
-                </a:cubicBezTo>
-              </a:path>
-            </a:pathLst>
-          </a:custGeom>
-          <a:ln cap="rnd" w="5400">
-            <a:solidFill>
-              <a:srgbClr val="D1552C"/>
-            </a:solidFill>
-            <a:round/>
-          </a:ln>
-        </p:spPr>
-        <p:txBody>
-          <a:bodyPr lIns="2520" tIns="2520" rIns="2520" bIns="2520" anchor="t">
-            <a:noAutofit/>
-          </a:bodyPr>
-          <a:p>
-            <a:endParaRPr lang="en-US" sz="2400" b="0" u="none" strike="noStrike">
-              <a:solidFill>
-                <a:srgbClr val="000000"/>
-              </a:solidFill>
-              <a:effectLst/>
-              <a:uFillTx/>
-              <a:latin typeface="Times New Roman"/>
-            </a:endParaRPr>
-          </a:p>
-        </p:txBody>
-      </p:sp>
-      <p:sp>
-        <p:nvSpPr>
-          <p:cNvPr id="144" name=""/>
-          <p:cNvSpPr/>
-          <p:nvPr/>
-        </p:nvSpPr>
-        <p:spPr>
-          <a:xfrm>
-            <a:off x="1808640" y="2712240"/>
-            <a:ext cx="46800" cy="46800"/>
-          </a:xfrm>
-          <a:custGeom>
-            <a:avLst/>
-            <a:gdLst/>
-            <a:ahLst/>
-            <a:rect l="0" t="0" r="r" b="b"/>
-            <a:pathLst>
-              <a:path w="130" h="130">
-                <a:moveTo>
-                  <a:pt x="0" y="65"/>
-                </a:moveTo>
-                <a:cubicBezTo>
-                  <a:pt x="0" y="-21"/>
-                  <a:pt x="130" y="-21"/>
-                  <a:pt x="130" y="65"/>
-                </a:cubicBezTo>
-                <a:cubicBezTo>
-                  <a:pt x="130" y="152"/>
-                  <a:pt x="0" y="152"/>
-                  <a:pt x="0" y="65"/>
-                </a:cubicBezTo>
-                <a:close/>
-              </a:path>
-            </a:pathLst>
-          </a:custGeom>
-          <a:solidFill>
-            <a:srgbClr val="1F5F9E"/>
-          </a:solidFill>
-          <a:ln w="0">
-            <a:noFill/>
-          </a:ln>
-        </p:spPr>
-        <p:txBody>
-          <a:bodyPr lIns="0" tIns="0" rIns="0" bIns="0" anchor="t">
-            <a:noAutofit/>
-          </a:bodyPr>
-          <a:p>
-            <a:endParaRPr lang="en-US" sz="2400" b="0" u="none" strike="noStrike">
-              <a:solidFill>
-                <a:srgbClr val="FFFFFF"/>
-              </a:solidFill>
-              <a:effectLst/>
-              <a:uFillTx/>
-              <a:latin typeface="Times New Roman"/>
-            </a:endParaRPr>
-          </a:p>
-        </p:txBody>
-      </p:sp>
-      <p:sp>
-        <p:nvSpPr>
-          <p:cNvPr id="145" name=""/>
-          <p:cNvSpPr/>
-          <p:nvPr/>
-        </p:nvSpPr>
-        <p:spPr>
-          <a:xfrm>
-            <a:off x="1808640" y="2712240"/>
-            <a:ext cx="46800" cy="46800"/>
-          </a:xfrm>
-          <a:custGeom>
-            <a:avLst/>
-            <a:gdLst/>
-            <a:ahLst/>
-            <a:rect l="0" t="0" r="r" b="b"/>
-            <a:pathLst>
-              <a:path fill="none" w="130" h="130">
-                <a:moveTo>
-                  <a:pt x="130" y="65"/>
-                </a:moveTo>
-                <a:cubicBezTo>
-                  <a:pt x="130" y="152"/>
-                  <a:pt x="0" y="152"/>
-                  <a:pt x="0" y="65"/>
-                </a:cubicBezTo>
-                <a:cubicBezTo>
-                  <a:pt x="0" y="-21"/>
-                  <a:pt x="130" y="-21"/>
-                  <a:pt x="130" y="65"/>
-                </a:cubicBezTo>
-              </a:path>
-            </a:pathLst>
-          </a:custGeom>
-          <a:ln cap="rnd" w="5400">
-            <a:solidFill>
-              <a:srgbClr val="1F5F9E"/>
-            </a:solidFill>
-            <a:round/>
-          </a:ln>
-        </p:spPr>
-        <p:txBody>
-          <a:bodyPr lIns="2520" tIns="2520" rIns="2520" bIns="2520" anchor="t">
-            <a:noAutofit/>
-          </a:bodyPr>
-          <a:p>
-            <a:endParaRPr lang="en-US" sz="2400" b="0" u="none" strike="noStrike">
-              <a:solidFill>
-                <a:srgbClr val="000000"/>
-              </a:solidFill>
-              <a:effectLst/>
-              <a:uFillTx/>
-              <a:latin typeface="Times New Roman"/>
-            </a:endParaRPr>
-          </a:p>
-        </p:txBody>
-      </p:sp>
-      <p:sp>
-        <p:nvSpPr>
-          <p:cNvPr id="146" name=""/>
-          <p:cNvSpPr/>
-          <p:nvPr/>
-        </p:nvSpPr>
-        <p:spPr>
-          <a:xfrm>
-            <a:off x="1552680" y="3852720"/>
-            <a:ext cx="46800" cy="47160"/>
-          </a:xfrm>
-          <a:custGeom>
-            <a:avLst/>
-            <a:gdLst/>
-            <a:ahLst/>
-            <a:rect l="0" t="0" r="r" b="b"/>
-            <a:pathLst>
-              <a:path w="130" h="131">
-                <a:moveTo>
-                  <a:pt x="0" y="65"/>
-                </a:moveTo>
-                <a:cubicBezTo>
-                  <a:pt x="0" y="-22"/>
-                  <a:pt x="130" y="-22"/>
-                  <a:pt x="130" y="65"/>
-                </a:cubicBezTo>
-                <a:cubicBezTo>
-                  <a:pt x="130" y="152"/>
-                  <a:pt x="0" y="152"/>
-                  <a:pt x="0" y="65"/>
-                </a:cubicBezTo>
-                <a:close/>
-              </a:path>
-            </a:pathLst>
-          </a:custGeom>
-          <a:solidFill>
-            <a:srgbClr val="3B3B3B"/>
-          </a:solidFill>
-          <a:ln w="0">
-            <a:noFill/>
-          </a:ln>
-        </p:spPr>
-        <p:txBody>
-          <a:bodyPr lIns="0" tIns="0" rIns="0" bIns="0" anchor="t">
-            <a:noAutofit/>
-          </a:bodyPr>
-          <a:p>
-            <a:endParaRPr lang="en-US" sz="2400" b="0" u="none" strike="noStrike">
-              <a:solidFill>
-                <a:srgbClr val="FFFFFF"/>
-              </a:solidFill>
-              <a:effectLst/>
-              <a:uFillTx/>
-              <a:latin typeface="Times New Roman"/>
-            </a:endParaRPr>
-          </a:p>
-        </p:txBody>
-      </p:sp>
-      <p:sp>
-        <p:nvSpPr>
-          <p:cNvPr id="147" name=""/>
-          <p:cNvSpPr/>
-          <p:nvPr/>
-        </p:nvSpPr>
-        <p:spPr>
-          <a:xfrm>
-            <a:off x="1552680" y="3852720"/>
-            <a:ext cx="46800" cy="47160"/>
-          </a:xfrm>
-          <a:custGeom>
-            <a:avLst/>
-            <a:gdLst/>
-            <a:ahLst/>
-            <a:rect l="0" t="0" r="r" b="b"/>
-            <a:pathLst>
-              <a:path fill="none" w="130" h="131">
-                <a:moveTo>
-                  <a:pt x="130" y="65"/>
-                </a:moveTo>
-                <a:cubicBezTo>
-                  <a:pt x="130" y="152"/>
-                  <a:pt x="0" y="152"/>
-                  <a:pt x="0" y="65"/>
-                </a:cubicBezTo>
-                <a:cubicBezTo>
-                  <a:pt x="0" y="-22"/>
-                  <a:pt x="130" y="-22"/>
-                  <a:pt x="130" y="65"/>
-                </a:cubicBezTo>
-              </a:path>
-            </a:pathLst>
-          </a:custGeom>
-          <a:ln cap="rnd" w="5400">
-            <a:solidFill>
-              <a:srgbClr val="3B3B3B"/>
-            </a:solidFill>
-            <a:round/>
-          </a:ln>
-        </p:spPr>
-        <p:txBody>
-          <a:bodyPr lIns="2520" tIns="2520" rIns="2520" bIns="2520" anchor="t">
-            <a:noAutofit/>
-          </a:bodyPr>
-          <a:p>
-            <a:endParaRPr lang="en-US" sz="2400" b="0" u="none" strike="noStrike">
-              <a:solidFill>
-                <a:srgbClr val="000000"/>
-              </a:solidFill>
-              <a:effectLst/>
-              <a:uFillTx/>
-              <a:latin typeface="Times New Roman"/>
-            </a:endParaRPr>
-          </a:p>
-        </p:txBody>
-      </p:sp>
-      <p:sp>
-        <p:nvSpPr>
-          <p:cNvPr id="148" name=""/>
-          <p:cNvSpPr/>
-          <p:nvPr/>
-        </p:nvSpPr>
-        <p:spPr>
-          <a:xfrm>
-            <a:off x="1535400" y="3472560"/>
+          <p:cNvPr id="176" name=""/>
+          <p:cNvSpPr/>
+          <p:nvPr/>
+        </p:nvSpPr>
+        <p:spPr>
+          <a:xfrm>
+            <a:off x="2919240" y="3472560"/>
             <a:ext cx="46800" cy="47160"/>
           </a:xfrm>
           <a:custGeom>
@@ -8903,13 +10364,13 @@
       </p:sp>
       <p:sp>
         <p:nvSpPr>
-          <p:cNvPr id="149" name=""/>
-          <p:cNvSpPr/>
-          <p:nvPr/>
-        </p:nvSpPr>
-        <p:spPr>
-          <a:xfrm>
-            <a:off x="1535400" y="3472560"/>
+          <p:cNvPr id="177" name=""/>
+          <p:cNvSpPr/>
+          <p:nvPr/>
+        </p:nvSpPr>
+        <p:spPr>
+          <a:xfrm>
+            <a:off x="2919240" y="3472560"/>
             <a:ext cx="46800" cy="47160"/>
           </a:xfrm>
           <a:custGeom>
@@ -8960,1476 +10421,6 @@
       </p:sp>
       <p:sp>
         <p:nvSpPr>
-          <p:cNvPr id="150" name=""/>
-          <p:cNvSpPr/>
-          <p:nvPr/>
-        </p:nvSpPr>
-        <p:spPr>
-          <a:xfrm>
-            <a:off x="2183400" y="2545200"/>
-            <a:ext cx="575640" cy="1521000"/>
-          </a:xfrm>
-          <a:custGeom>
-            <a:avLst/>
-            <a:gdLst/>
-            <a:ahLst/>
-            <a:rect l="0" t="0" r="r" b="b"/>
-            <a:pathLst>
-              <a:path w="1599" h="4225">
-                <a:moveTo>
-                  <a:pt x="0" y="0"/>
-                </a:moveTo>
-                <a:lnTo>
-                  <a:pt x="1599" y="0"/>
-                </a:lnTo>
-                <a:lnTo>
-                  <a:pt x="1599" y="4225"/>
-                </a:lnTo>
-                <a:lnTo>
-                  <a:pt x="0" y="4225"/>
-                </a:lnTo>
-                <a:lnTo>
-                  <a:pt x="0" y="0"/>
-                </a:lnTo>
-                <a:close/>
-              </a:path>
-            </a:pathLst>
-          </a:custGeom>
-          <a:solidFill>
-            <a:srgbClr val="FFFFFF"/>
-          </a:solidFill>
-          <a:ln w="0">
-            <a:noFill/>
-          </a:ln>
-        </p:spPr>
-        <p:txBody>
-          <a:bodyPr lIns="0" tIns="0" rIns="0" bIns="0" anchor="t">
-            <a:noAutofit/>
-          </a:bodyPr>
-          <a:p>
-            <a:endParaRPr lang="en-US" sz="2400" b="0" u="none" strike="noStrike">
-              <a:solidFill>
-                <a:srgbClr val="000000"/>
-              </a:solidFill>
-              <a:effectLst/>
-              <a:uFillTx/>
-              <a:latin typeface="Times New Roman"/>
-            </a:endParaRPr>
-          </a:p>
-        </p:txBody>
-      </p:sp>
-      <p:sp>
-        <p:nvSpPr>
-          <p:cNvPr id="151" name=""/>
-          <p:cNvSpPr/>
-          <p:nvPr/>
-        </p:nvSpPr>
-        <p:spPr>
-          <a:xfrm flipV="1">
-            <a:off x="2275560" y="2545200"/>
-            <a:ext cx="0" cy="1520640"/>
-          </a:xfrm>
-          <a:prstGeom prst="line">
-            <a:avLst/>
-          </a:prstGeom>
-          <a:ln w="6480">
-            <a:solidFill>
-              <a:srgbClr val="4A4A4A"/>
-            </a:solidFill>
-            <a:round/>
-          </a:ln>
-        </p:spPr>
-        <p:style>
-          <a:lnRef idx="0"/>
-          <a:fillRef idx="0"/>
-          <a:effectRef idx="0"/>
-          <a:fontRef idx="minor"/>
-        </p:style>
-        <p:txBody>
-          <a:bodyPr lIns="3240" tIns="3240" rIns="3240" bIns="3240" anchor="t">
-            <a:noAutofit/>
-          </a:bodyPr>
-          <a:p>
-            <a:endParaRPr lang="en-US" sz="2400" b="0" u="none" strike="noStrike">
-              <a:solidFill>
-                <a:srgbClr val="000000"/>
-              </a:solidFill>
-              <a:effectLst/>
-              <a:uFillTx/>
-              <a:latin typeface="Times New Roman"/>
-            </a:endParaRPr>
-          </a:p>
-        </p:txBody>
-      </p:sp>
-      <p:sp>
-        <p:nvSpPr>
-          <p:cNvPr id="152" name=""/>
-          <p:cNvSpPr/>
-          <p:nvPr/>
-        </p:nvSpPr>
-        <p:spPr>
-          <a:xfrm>
-            <a:off x="2275560" y="3115440"/>
-            <a:ext cx="300600" cy="0"/>
-          </a:xfrm>
-          <a:prstGeom prst="line">
-            <a:avLst/>
-          </a:prstGeom>
-          <a:ln w="13320">
-            <a:solidFill>
-              <a:srgbClr val="D1552C"/>
-            </a:solidFill>
-            <a:round/>
-          </a:ln>
-        </p:spPr>
-        <p:style>
-          <a:lnRef idx="0"/>
-          <a:fillRef idx="0"/>
-          <a:effectRef idx="0"/>
-          <a:fontRef idx="minor"/>
-        </p:style>
-        <p:txBody>
-          <a:bodyPr lIns="6480" tIns="-6480" rIns="6480" bIns="-6480" anchor="t">
-            <a:noAutofit/>
-          </a:bodyPr>
-          <a:p>
-            <a:endParaRPr lang="en-US" sz="2400" b="0" u="none" strike="noStrike">
-              <a:solidFill>
-                <a:srgbClr val="000000"/>
-              </a:solidFill>
-              <a:effectLst/>
-              <a:uFillTx/>
-              <a:latin typeface="Times New Roman"/>
-            </a:endParaRPr>
-          </a:p>
-        </p:txBody>
-      </p:sp>
-      <p:sp>
-        <p:nvSpPr>
-          <p:cNvPr id="153" name=""/>
-          <p:cNvSpPr/>
-          <p:nvPr/>
-        </p:nvSpPr>
-        <p:spPr>
-          <a:xfrm flipH="1">
-            <a:off x="2246400" y="2735280"/>
-            <a:ext cx="29160" cy="0"/>
-          </a:xfrm>
-          <a:prstGeom prst="line">
-            <a:avLst/>
-          </a:prstGeom>
-          <a:ln w="13320">
-            <a:solidFill>
-              <a:srgbClr val="1F5F9E"/>
-            </a:solidFill>
-            <a:round/>
-          </a:ln>
-        </p:spPr>
-        <p:style>
-          <a:lnRef idx="0"/>
-          <a:fillRef idx="0"/>
-          <a:effectRef idx="0"/>
-          <a:fontRef idx="minor"/>
-        </p:style>
-        <p:txBody>
-          <a:bodyPr lIns="6480" tIns="-6480" rIns="6480" bIns="-6480" anchor="t">
-            <a:noAutofit/>
-          </a:bodyPr>
-          <a:p>
-            <a:endParaRPr lang="en-US" sz="2400" b="0" u="none" strike="noStrike">
-              <a:solidFill>
-                <a:srgbClr val="000000"/>
-              </a:solidFill>
-              <a:effectLst/>
-              <a:uFillTx/>
-              <a:latin typeface="Times New Roman"/>
-            </a:endParaRPr>
-          </a:p>
-        </p:txBody>
-      </p:sp>
-      <p:sp>
-        <p:nvSpPr>
-          <p:cNvPr id="154" name=""/>
-          <p:cNvSpPr/>
-          <p:nvPr/>
-        </p:nvSpPr>
-        <p:spPr>
-          <a:xfrm>
-            <a:off x="2275560" y="3875760"/>
-            <a:ext cx="420480" cy="0"/>
-          </a:xfrm>
-          <a:prstGeom prst="line">
-            <a:avLst/>
-          </a:prstGeom>
-          <a:ln w="13320">
-            <a:solidFill>
-              <a:srgbClr val="3B3B3B"/>
-            </a:solidFill>
-            <a:round/>
-          </a:ln>
-        </p:spPr>
-        <p:style>
-          <a:lnRef idx="0"/>
-          <a:fillRef idx="0"/>
-          <a:effectRef idx="0"/>
-          <a:fontRef idx="minor"/>
-        </p:style>
-        <p:txBody>
-          <a:bodyPr lIns="6480" tIns="-6480" rIns="6480" bIns="-6480" anchor="t">
-            <a:noAutofit/>
-          </a:bodyPr>
-          <a:p>
-            <a:endParaRPr lang="en-US" sz="2400" b="0" u="none" strike="noStrike">
-              <a:solidFill>
-                <a:srgbClr val="000000"/>
-              </a:solidFill>
-              <a:effectLst/>
-              <a:uFillTx/>
-              <a:latin typeface="Times New Roman"/>
-            </a:endParaRPr>
-          </a:p>
-        </p:txBody>
-      </p:sp>
-      <p:sp>
-        <p:nvSpPr>
-          <p:cNvPr id="155" name=""/>
-          <p:cNvSpPr/>
-          <p:nvPr/>
-        </p:nvSpPr>
-        <p:spPr>
-          <a:xfrm flipH="1">
-            <a:off x="2265120" y="3495600"/>
-            <a:ext cx="10440" cy="0"/>
-          </a:xfrm>
-          <a:prstGeom prst="line">
-            <a:avLst/>
-          </a:prstGeom>
-          <a:ln w="13320">
-            <a:solidFill>
-              <a:srgbClr val="9A9A9A"/>
-            </a:solidFill>
-            <a:round/>
-          </a:ln>
-        </p:spPr>
-        <p:style>
-          <a:lnRef idx="0"/>
-          <a:fillRef idx="0"/>
-          <a:effectRef idx="0"/>
-          <a:fontRef idx="minor"/>
-        </p:style>
-        <p:txBody>
-          <a:bodyPr lIns="6480" tIns="-6480" rIns="6480" bIns="-6480" anchor="t">
-            <a:noAutofit/>
-          </a:bodyPr>
-          <a:p>
-            <a:endParaRPr lang="en-US" sz="2400" b="0" u="none" strike="noStrike">
-              <a:solidFill>
-                <a:srgbClr val="000000"/>
-              </a:solidFill>
-              <a:effectLst/>
-              <a:uFillTx/>
-              <a:latin typeface="Times New Roman"/>
-            </a:endParaRPr>
-          </a:p>
-        </p:txBody>
-      </p:sp>
-      <p:sp>
-        <p:nvSpPr>
-          <p:cNvPr id="156" name=""/>
-          <p:cNvSpPr/>
-          <p:nvPr/>
-        </p:nvSpPr>
-        <p:spPr>
-          <a:xfrm>
-            <a:off x="2553120" y="3092400"/>
-            <a:ext cx="46800" cy="46800"/>
-          </a:xfrm>
-          <a:custGeom>
-            <a:avLst/>
-            <a:gdLst/>
-            <a:ahLst/>
-            <a:rect l="0" t="0" r="r" b="b"/>
-            <a:pathLst>
-              <a:path w="130" h="130">
-                <a:moveTo>
-                  <a:pt x="0" y="65"/>
-                </a:moveTo>
-                <a:cubicBezTo>
-                  <a:pt x="0" y="-22"/>
-                  <a:pt x="130" y="-22"/>
-                  <a:pt x="130" y="65"/>
-                </a:cubicBezTo>
-                <a:cubicBezTo>
-                  <a:pt x="130" y="151"/>
-                  <a:pt x="0" y="151"/>
-                  <a:pt x="0" y="65"/>
-                </a:cubicBezTo>
-                <a:close/>
-              </a:path>
-            </a:pathLst>
-          </a:custGeom>
-          <a:solidFill>
-            <a:srgbClr val="D1552C"/>
-          </a:solidFill>
-          <a:ln w="0">
-            <a:noFill/>
-          </a:ln>
-        </p:spPr>
-        <p:txBody>
-          <a:bodyPr lIns="0" tIns="0" rIns="0" bIns="0" anchor="t">
-            <a:noAutofit/>
-          </a:bodyPr>
-          <a:p>
-            <a:endParaRPr lang="en-US" sz="2400" b="0" u="none" strike="noStrike">
-              <a:solidFill>
-                <a:srgbClr val="FFFFFF"/>
-              </a:solidFill>
-              <a:effectLst/>
-              <a:uFillTx/>
-              <a:latin typeface="Times New Roman"/>
-            </a:endParaRPr>
-          </a:p>
-        </p:txBody>
-      </p:sp>
-      <p:sp>
-        <p:nvSpPr>
-          <p:cNvPr id="157" name=""/>
-          <p:cNvSpPr/>
-          <p:nvPr/>
-        </p:nvSpPr>
-        <p:spPr>
-          <a:xfrm>
-            <a:off x="2553120" y="3092400"/>
-            <a:ext cx="46800" cy="46800"/>
-          </a:xfrm>
-          <a:custGeom>
-            <a:avLst/>
-            <a:gdLst/>
-            <a:ahLst/>
-            <a:rect l="0" t="0" r="r" b="b"/>
-            <a:pathLst>
-              <a:path fill="none" w="130" h="130">
-                <a:moveTo>
-                  <a:pt x="130" y="65"/>
-                </a:moveTo>
-                <a:cubicBezTo>
-                  <a:pt x="130" y="151"/>
-                  <a:pt x="0" y="151"/>
-                  <a:pt x="0" y="65"/>
-                </a:cubicBezTo>
-                <a:cubicBezTo>
-                  <a:pt x="0" y="-22"/>
-                  <a:pt x="130" y="-22"/>
-                  <a:pt x="130" y="65"/>
-                </a:cubicBezTo>
-              </a:path>
-            </a:pathLst>
-          </a:custGeom>
-          <a:ln cap="rnd" w="5400">
-            <a:solidFill>
-              <a:srgbClr val="D1552C"/>
-            </a:solidFill>
-            <a:round/>
-          </a:ln>
-        </p:spPr>
-        <p:txBody>
-          <a:bodyPr lIns="2520" tIns="2520" rIns="2520" bIns="2520" anchor="t">
-            <a:noAutofit/>
-          </a:bodyPr>
-          <a:p>
-            <a:endParaRPr lang="en-US" sz="2400" b="0" u="none" strike="noStrike">
-              <a:solidFill>
-                <a:srgbClr val="000000"/>
-              </a:solidFill>
-              <a:effectLst/>
-              <a:uFillTx/>
-              <a:latin typeface="Times New Roman"/>
-            </a:endParaRPr>
-          </a:p>
-        </p:txBody>
-      </p:sp>
-      <p:sp>
-        <p:nvSpPr>
-          <p:cNvPr id="158" name=""/>
-          <p:cNvSpPr/>
-          <p:nvPr/>
-        </p:nvSpPr>
-        <p:spPr>
-          <a:xfrm>
-            <a:off x="2223000" y="2712240"/>
-            <a:ext cx="46800" cy="46800"/>
-          </a:xfrm>
-          <a:custGeom>
-            <a:avLst/>
-            <a:gdLst/>
-            <a:ahLst/>
-            <a:rect l="0" t="0" r="r" b="b"/>
-            <a:pathLst>
-              <a:path w="130" h="130">
-                <a:moveTo>
-                  <a:pt x="0" y="65"/>
-                </a:moveTo>
-                <a:cubicBezTo>
-                  <a:pt x="0" y="-21"/>
-                  <a:pt x="130" y="-21"/>
-                  <a:pt x="130" y="65"/>
-                </a:cubicBezTo>
-                <a:cubicBezTo>
-                  <a:pt x="130" y="152"/>
-                  <a:pt x="0" y="152"/>
-                  <a:pt x="0" y="65"/>
-                </a:cubicBezTo>
-                <a:close/>
-              </a:path>
-            </a:pathLst>
-          </a:custGeom>
-          <a:solidFill>
-            <a:srgbClr val="1F5F9E"/>
-          </a:solidFill>
-          <a:ln w="0">
-            <a:noFill/>
-          </a:ln>
-        </p:spPr>
-        <p:txBody>
-          <a:bodyPr lIns="0" tIns="0" rIns="0" bIns="0" anchor="t">
-            <a:noAutofit/>
-          </a:bodyPr>
-          <a:p>
-            <a:endParaRPr lang="en-US" sz="2400" b="0" u="none" strike="noStrike">
-              <a:solidFill>
-                <a:srgbClr val="FFFFFF"/>
-              </a:solidFill>
-              <a:effectLst/>
-              <a:uFillTx/>
-              <a:latin typeface="Times New Roman"/>
-            </a:endParaRPr>
-          </a:p>
-        </p:txBody>
-      </p:sp>
-      <p:sp>
-        <p:nvSpPr>
-          <p:cNvPr id="159" name=""/>
-          <p:cNvSpPr/>
-          <p:nvPr/>
-        </p:nvSpPr>
-        <p:spPr>
-          <a:xfrm>
-            <a:off x="2223000" y="2712240"/>
-            <a:ext cx="46800" cy="46800"/>
-          </a:xfrm>
-          <a:custGeom>
-            <a:avLst/>
-            <a:gdLst/>
-            <a:ahLst/>
-            <a:rect l="0" t="0" r="r" b="b"/>
-            <a:pathLst>
-              <a:path fill="none" w="130" h="130">
-                <a:moveTo>
-                  <a:pt x="130" y="65"/>
-                </a:moveTo>
-                <a:cubicBezTo>
-                  <a:pt x="130" y="152"/>
-                  <a:pt x="0" y="152"/>
-                  <a:pt x="0" y="65"/>
-                </a:cubicBezTo>
-                <a:cubicBezTo>
-                  <a:pt x="0" y="-21"/>
-                  <a:pt x="130" y="-21"/>
-                  <a:pt x="130" y="65"/>
-                </a:cubicBezTo>
-              </a:path>
-            </a:pathLst>
-          </a:custGeom>
-          <a:ln cap="rnd" w="5400">
-            <a:solidFill>
-              <a:srgbClr val="1F5F9E"/>
-            </a:solidFill>
-            <a:round/>
-          </a:ln>
-        </p:spPr>
-        <p:txBody>
-          <a:bodyPr lIns="2520" tIns="2520" rIns="2520" bIns="2520" anchor="t">
-            <a:noAutofit/>
-          </a:bodyPr>
-          <a:p>
-            <a:endParaRPr lang="en-US" sz="2400" b="0" u="none" strike="noStrike">
-              <a:solidFill>
-                <a:srgbClr val="000000"/>
-              </a:solidFill>
-              <a:effectLst/>
-              <a:uFillTx/>
-              <a:latin typeface="Times New Roman"/>
-            </a:endParaRPr>
-          </a:p>
-        </p:txBody>
-      </p:sp>
-      <p:sp>
-        <p:nvSpPr>
-          <p:cNvPr id="160" name=""/>
-          <p:cNvSpPr/>
-          <p:nvPr/>
-        </p:nvSpPr>
-        <p:spPr>
-          <a:xfrm>
-            <a:off x="2672640" y="3852720"/>
-            <a:ext cx="46800" cy="47160"/>
-          </a:xfrm>
-          <a:custGeom>
-            <a:avLst/>
-            <a:gdLst/>
-            <a:ahLst/>
-            <a:rect l="0" t="0" r="r" b="b"/>
-            <a:pathLst>
-              <a:path w="130" h="131">
-                <a:moveTo>
-                  <a:pt x="0" y="65"/>
-                </a:moveTo>
-                <a:cubicBezTo>
-                  <a:pt x="0" y="-22"/>
-                  <a:pt x="130" y="-22"/>
-                  <a:pt x="130" y="65"/>
-                </a:cubicBezTo>
-                <a:cubicBezTo>
-                  <a:pt x="130" y="152"/>
-                  <a:pt x="0" y="152"/>
-                  <a:pt x="0" y="65"/>
-                </a:cubicBezTo>
-                <a:close/>
-              </a:path>
-            </a:pathLst>
-          </a:custGeom>
-          <a:solidFill>
-            <a:srgbClr val="3B3B3B"/>
-          </a:solidFill>
-          <a:ln w="0">
-            <a:noFill/>
-          </a:ln>
-        </p:spPr>
-        <p:txBody>
-          <a:bodyPr lIns="0" tIns="0" rIns="0" bIns="0" anchor="t">
-            <a:noAutofit/>
-          </a:bodyPr>
-          <a:p>
-            <a:endParaRPr lang="en-US" sz="2400" b="0" u="none" strike="noStrike">
-              <a:solidFill>
-                <a:srgbClr val="FFFFFF"/>
-              </a:solidFill>
-              <a:effectLst/>
-              <a:uFillTx/>
-              <a:latin typeface="Times New Roman"/>
-            </a:endParaRPr>
-          </a:p>
-        </p:txBody>
-      </p:sp>
-      <p:sp>
-        <p:nvSpPr>
-          <p:cNvPr id="161" name=""/>
-          <p:cNvSpPr/>
-          <p:nvPr/>
-        </p:nvSpPr>
-        <p:spPr>
-          <a:xfrm>
-            <a:off x="2672640" y="3852720"/>
-            <a:ext cx="46800" cy="47160"/>
-          </a:xfrm>
-          <a:custGeom>
-            <a:avLst/>
-            <a:gdLst/>
-            <a:ahLst/>
-            <a:rect l="0" t="0" r="r" b="b"/>
-            <a:pathLst>
-              <a:path fill="none" w="130" h="131">
-                <a:moveTo>
-                  <a:pt x="130" y="65"/>
-                </a:moveTo>
-                <a:cubicBezTo>
-                  <a:pt x="130" y="152"/>
-                  <a:pt x="0" y="152"/>
-                  <a:pt x="0" y="65"/>
-                </a:cubicBezTo>
-                <a:cubicBezTo>
-                  <a:pt x="0" y="-22"/>
-                  <a:pt x="130" y="-22"/>
-                  <a:pt x="130" y="65"/>
-                </a:cubicBezTo>
-              </a:path>
-            </a:pathLst>
-          </a:custGeom>
-          <a:ln cap="rnd" w="5400">
-            <a:solidFill>
-              <a:srgbClr val="3B3B3B"/>
-            </a:solidFill>
-            <a:round/>
-          </a:ln>
-        </p:spPr>
-        <p:txBody>
-          <a:bodyPr lIns="2520" tIns="2520" rIns="2520" bIns="2520" anchor="t">
-            <a:noAutofit/>
-          </a:bodyPr>
-          <a:p>
-            <a:endParaRPr lang="en-US" sz="2400" b="0" u="none" strike="noStrike">
-              <a:solidFill>
-                <a:srgbClr val="000000"/>
-              </a:solidFill>
-              <a:effectLst/>
-              <a:uFillTx/>
-              <a:latin typeface="Times New Roman"/>
-            </a:endParaRPr>
-          </a:p>
-        </p:txBody>
-      </p:sp>
-      <p:sp>
-        <p:nvSpPr>
-          <p:cNvPr id="162" name=""/>
-          <p:cNvSpPr/>
-          <p:nvPr/>
-        </p:nvSpPr>
-        <p:spPr>
-          <a:xfrm>
-            <a:off x="2241720" y="3472560"/>
-            <a:ext cx="46800" cy="47160"/>
-          </a:xfrm>
-          <a:custGeom>
-            <a:avLst/>
-            <a:gdLst/>
-            <a:ahLst/>
-            <a:rect l="0" t="0" r="r" b="b"/>
-            <a:pathLst>
-              <a:path w="130" h="131">
-                <a:moveTo>
-                  <a:pt x="0" y="65"/>
-                </a:moveTo>
-                <a:cubicBezTo>
-                  <a:pt x="0" y="-22"/>
-                  <a:pt x="130" y="-22"/>
-                  <a:pt x="130" y="65"/>
-                </a:cubicBezTo>
-                <a:cubicBezTo>
-                  <a:pt x="130" y="152"/>
-                  <a:pt x="0" y="152"/>
-                  <a:pt x="0" y="65"/>
-                </a:cubicBezTo>
-                <a:close/>
-              </a:path>
-            </a:pathLst>
-          </a:custGeom>
-          <a:solidFill>
-            <a:srgbClr val="9A9A9A"/>
-          </a:solidFill>
-          <a:ln w="0">
-            <a:noFill/>
-          </a:ln>
-        </p:spPr>
-        <p:txBody>
-          <a:bodyPr lIns="0" tIns="0" rIns="0" bIns="0" anchor="t">
-            <a:noAutofit/>
-          </a:bodyPr>
-          <a:p>
-            <a:endParaRPr lang="en-US" sz="2400" b="0" u="none" strike="noStrike">
-              <a:solidFill>
-                <a:srgbClr val="FFFFFF"/>
-              </a:solidFill>
-              <a:effectLst/>
-              <a:uFillTx/>
-              <a:latin typeface="Times New Roman"/>
-            </a:endParaRPr>
-          </a:p>
-        </p:txBody>
-      </p:sp>
-      <p:sp>
-        <p:nvSpPr>
-          <p:cNvPr id="163" name=""/>
-          <p:cNvSpPr/>
-          <p:nvPr/>
-        </p:nvSpPr>
-        <p:spPr>
-          <a:xfrm>
-            <a:off x="2241720" y="3472560"/>
-            <a:ext cx="46800" cy="47160"/>
-          </a:xfrm>
-          <a:custGeom>
-            <a:avLst/>
-            <a:gdLst/>
-            <a:ahLst/>
-            <a:rect l="0" t="0" r="r" b="b"/>
-            <a:pathLst>
-              <a:path fill="none" w="130" h="131">
-                <a:moveTo>
-                  <a:pt x="130" y="65"/>
-                </a:moveTo>
-                <a:cubicBezTo>
-                  <a:pt x="130" y="152"/>
-                  <a:pt x="0" y="152"/>
-                  <a:pt x="0" y="65"/>
-                </a:cubicBezTo>
-                <a:cubicBezTo>
-                  <a:pt x="0" y="-22"/>
-                  <a:pt x="130" y="-22"/>
-                  <a:pt x="130" y="65"/>
-                </a:cubicBezTo>
-              </a:path>
-            </a:pathLst>
-          </a:custGeom>
-          <a:ln cap="rnd" w="5400">
-            <a:solidFill>
-              <a:srgbClr val="9A9A9A"/>
-            </a:solidFill>
-            <a:round/>
-          </a:ln>
-        </p:spPr>
-        <p:txBody>
-          <a:bodyPr lIns="2520" tIns="2520" rIns="2520" bIns="2520" anchor="t">
-            <a:noAutofit/>
-          </a:bodyPr>
-          <a:p>
-            <a:endParaRPr lang="en-US" sz="2400" b="0" u="none" strike="noStrike">
-              <a:solidFill>
-                <a:srgbClr val="000000"/>
-              </a:solidFill>
-              <a:effectLst/>
-              <a:uFillTx/>
-              <a:latin typeface="Times New Roman"/>
-            </a:endParaRPr>
-          </a:p>
-        </p:txBody>
-      </p:sp>
-      <p:sp>
-        <p:nvSpPr>
-          <p:cNvPr id="164" name=""/>
-          <p:cNvSpPr/>
-          <p:nvPr/>
-        </p:nvSpPr>
-        <p:spPr>
-          <a:xfrm>
-            <a:off x="2872800" y="2545200"/>
-            <a:ext cx="575640" cy="1521000"/>
-          </a:xfrm>
-          <a:custGeom>
-            <a:avLst/>
-            <a:gdLst/>
-            <a:ahLst/>
-            <a:rect l="0" t="0" r="r" b="b"/>
-            <a:pathLst>
-              <a:path w="1599" h="4225">
-                <a:moveTo>
-                  <a:pt x="0" y="0"/>
-                </a:moveTo>
-                <a:lnTo>
-                  <a:pt x="1599" y="0"/>
-                </a:lnTo>
-                <a:lnTo>
-                  <a:pt x="1599" y="4225"/>
-                </a:lnTo>
-                <a:lnTo>
-                  <a:pt x="0" y="4225"/>
-                </a:lnTo>
-                <a:lnTo>
-                  <a:pt x="0" y="0"/>
-                </a:lnTo>
-                <a:close/>
-              </a:path>
-            </a:pathLst>
-          </a:custGeom>
-          <a:solidFill>
-            <a:srgbClr val="FFFFFF"/>
-          </a:solidFill>
-          <a:ln w="0">
-            <a:noFill/>
-          </a:ln>
-        </p:spPr>
-        <p:txBody>
-          <a:bodyPr lIns="0" tIns="0" rIns="0" bIns="0" anchor="t">
-            <a:noAutofit/>
-          </a:bodyPr>
-          <a:p>
-            <a:endParaRPr lang="en-US" sz="2400" b="0" u="none" strike="noStrike">
-              <a:solidFill>
-                <a:srgbClr val="000000"/>
-              </a:solidFill>
-              <a:effectLst/>
-              <a:uFillTx/>
-              <a:latin typeface="Times New Roman"/>
-            </a:endParaRPr>
-          </a:p>
-        </p:txBody>
-      </p:sp>
-      <p:sp>
-        <p:nvSpPr>
-          <p:cNvPr id="165" name=""/>
-          <p:cNvSpPr/>
-          <p:nvPr/>
-        </p:nvSpPr>
-        <p:spPr>
-          <a:xfrm flipV="1">
-            <a:off x="2935800" y="2545200"/>
-            <a:ext cx="0" cy="1520640"/>
-          </a:xfrm>
-          <a:prstGeom prst="line">
-            <a:avLst/>
-          </a:prstGeom>
-          <a:ln w="6480">
-            <a:solidFill>
-              <a:srgbClr val="4A4A4A"/>
-            </a:solidFill>
-            <a:round/>
-          </a:ln>
-        </p:spPr>
-        <p:style>
-          <a:lnRef idx="0"/>
-          <a:fillRef idx="0"/>
-          <a:effectRef idx="0"/>
-          <a:fontRef idx="minor"/>
-        </p:style>
-        <p:txBody>
-          <a:bodyPr lIns="3240" tIns="3240" rIns="3240" bIns="3240" anchor="t">
-            <a:noAutofit/>
-          </a:bodyPr>
-          <a:p>
-            <a:endParaRPr lang="en-US" sz="2400" b="0" u="none" strike="noStrike">
-              <a:solidFill>
-                <a:srgbClr val="000000"/>
-              </a:solidFill>
-              <a:effectLst/>
-              <a:uFillTx/>
-              <a:latin typeface="Times New Roman"/>
-            </a:endParaRPr>
-          </a:p>
-        </p:txBody>
-      </p:sp>
-      <p:sp>
-        <p:nvSpPr>
-          <p:cNvPr id="166" name=""/>
-          <p:cNvSpPr/>
-          <p:nvPr/>
-        </p:nvSpPr>
-        <p:spPr>
-          <a:xfrm>
-            <a:off x="2935800" y="3115440"/>
-            <a:ext cx="408960" cy="0"/>
-          </a:xfrm>
-          <a:prstGeom prst="line">
-            <a:avLst/>
-          </a:prstGeom>
-          <a:ln w="13320">
-            <a:solidFill>
-              <a:srgbClr val="D1552C"/>
-            </a:solidFill>
-            <a:round/>
-          </a:ln>
-        </p:spPr>
-        <p:style>
-          <a:lnRef idx="0"/>
-          <a:fillRef idx="0"/>
-          <a:effectRef idx="0"/>
-          <a:fontRef idx="minor"/>
-        </p:style>
-        <p:txBody>
-          <a:bodyPr lIns="6480" tIns="-6480" rIns="6480" bIns="-6480" anchor="t">
-            <a:noAutofit/>
-          </a:bodyPr>
-          <a:p>
-            <a:endParaRPr lang="en-US" sz="2400" b="0" u="none" strike="noStrike">
-              <a:solidFill>
-                <a:srgbClr val="000000"/>
-              </a:solidFill>
-              <a:effectLst/>
-              <a:uFillTx/>
-              <a:latin typeface="Times New Roman"/>
-            </a:endParaRPr>
-          </a:p>
-        </p:txBody>
-      </p:sp>
-      <p:sp>
-        <p:nvSpPr>
-          <p:cNvPr id="167" name=""/>
-          <p:cNvSpPr/>
-          <p:nvPr/>
-        </p:nvSpPr>
-        <p:spPr>
-          <a:xfrm>
-            <a:off x="2935800" y="2735280"/>
-            <a:ext cx="449280" cy="0"/>
-          </a:xfrm>
-          <a:prstGeom prst="line">
-            <a:avLst/>
-          </a:prstGeom>
-          <a:ln w="13320">
-            <a:solidFill>
-              <a:srgbClr val="1F5F9E"/>
-            </a:solidFill>
-            <a:round/>
-          </a:ln>
-        </p:spPr>
-        <p:style>
-          <a:lnRef idx="0"/>
-          <a:fillRef idx="0"/>
-          <a:effectRef idx="0"/>
-          <a:fontRef idx="minor"/>
-        </p:style>
-        <p:txBody>
-          <a:bodyPr lIns="6480" tIns="-6480" rIns="6480" bIns="-6480" anchor="t">
-            <a:noAutofit/>
-          </a:bodyPr>
-          <a:p>
-            <a:endParaRPr lang="en-US" sz="2400" b="0" u="none" strike="noStrike">
-              <a:solidFill>
-                <a:srgbClr val="000000"/>
-              </a:solidFill>
-              <a:effectLst/>
-              <a:uFillTx/>
-              <a:latin typeface="Times New Roman"/>
-            </a:endParaRPr>
-          </a:p>
-        </p:txBody>
-      </p:sp>
-      <p:sp>
-        <p:nvSpPr>
-          <p:cNvPr id="168" name=""/>
-          <p:cNvSpPr/>
-          <p:nvPr/>
-        </p:nvSpPr>
-        <p:spPr>
-          <a:xfrm>
-            <a:off x="2935800" y="3875760"/>
-            <a:ext cx="216360" cy="0"/>
-          </a:xfrm>
-          <a:prstGeom prst="line">
-            <a:avLst/>
-          </a:prstGeom>
-          <a:ln w="13320">
-            <a:solidFill>
-              <a:srgbClr val="3B3B3B"/>
-            </a:solidFill>
-            <a:round/>
-          </a:ln>
-        </p:spPr>
-        <p:style>
-          <a:lnRef idx="0"/>
-          <a:fillRef idx="0"/>
-          <a:effectRef idx="0"/>
-          <a:fontRef idx="minor"/>
-        </p:style>
-        <p:txBody>
-          <a:bodyPr lIns="6480" tIns="-6480" rIns="6480" bIns="-6480" anchor="t">
-            <a:noAutofit/>
-          </a:bodyPr>
-          <a:p>
-            <a:endParaRPr lang="en-US" sz="2400" b="0" u="none" strike="noStrike">
-              <a:solidFill>
-                <a:srgbClr val="000000"/>
-              </a:solidFill>
-              <a:effectLst/>
-              <a:uFillTx/>
-              <a:latin typeface="Times New Roman"/>
-            </a:endParaRPr>
-          </a:p>
-        </p:txBody>
-      </p:sp>
-      <p:sp>
-        <p:nvSpPr>
-          <p:cNvPr id="169" name=""/>
-          <p:cNvSpPr/>
-          <p:nvPr/>
-        </p:nvSpPr>
-        <p:spPr>
-          <a:xfrm>
-            <a:off x="2935800" y="3495600"/>
-            <a:ext cx="6480" cy="0"/>
-          </a:xfrm>
-          <a:prstGeom prst="line">
-            <a:avLst/>
-          </a:prstGeom>
-          <a:ln w="13320">
-            <a:solidFill>
-              <a:srgbClr val="9A9A9A"/>
-            </a:solidFill>
-            <a:round/>
-          </a:ln>
-        </p:spPr>
-        <p:style>
-          <a:lnRef idx="0"/>
-          <a:fillRef idx="0"/>
-          <a:effectRef idx="0"/>
-          <a:fontRef idx="minor"/>
-        </p:style>
-        <p:txBody>
-          <a:bodyPr lIns="6480" tIns="-6480" rIns="6480" bIns="-6480" anchor="t">
-            <a:noAutofit/>
-          </a:bodyPr>
-          <a:p>
-            <a:endParaRPr lang="en-US" sz="2400" b="0" u="none" strike="noStrike">
-              <a:solidFill>
-                <a:srgbClr val="000000"/>
-              </a:solidFill>
-              <a:effectLst/>
-              <a:uFillTx/>
-              <a:latin typeface="Times New Roman"/>
-            </a:endParaRPr>
-          </a:p>
-        </p:txBody>
-      </p:sp>
-      <p:sp>
-        <p:nvSpPr>
-          <p:cNvPr id="170" name=""/>
-          <p:cNvSpPr/>
-          <p:nvPr/>
-        </p:nvSpPr>
-        <p:spPr>
-          <a:xfrm>
-            <a:off x="3321720" y="3092400"/>
-            <a:ext cx="46800" cy="46800"/>
-          </a:xfrm>
-          <a:custGeom>
-            <a:avLst/>
-            <a:gdLst/>
-            <a:ahLst/>
-            <a:rect l="0" t="0" r="r" b="b"/>
-            <a:pathLst>
-              <a:path w="130" h="130">
-                <a:moveTo>
-                  <a:pt x="0" y="65"/>
-                </a:moveTo>
-                <a:cubicBezTo>
-                  <a:pt x="0" y="-22"/>
-                  <a:pt x="130" y="-22"/>
-                  <a:pt x="130" y="65"/>
-                </a:cubicBezTo>
-                <a:cubicBezTo>
-                  <a:pt x="130" y="151"/>
-                  <a:pt x="0" y="151"/>
-                  <a:pt x="0" y="65"/>
-                </a:cubicBezTo>
-                <a:close/>
-              </a:path>
-            </a:pathLst>
-          </a:custGeom>
-          <a:solidFill>
-            <a:srgbClr val="D1552C"/>
-          </a:solidFill>
-          <a:ln w="0">
-            <a:noFill/>
-          </a:ln>
-        </p:spPr>
-        <p:txBody>
-          <a:bodyPr lIns="0" tIns="0" rIns="0" bIns="0" anchor="t">
-            <a:noAutofit/>
-          </a:bodyPr>
-          <a:p>
-            <a:endParaRPr lang="en-US" sz="2400" b="0" u="none" strike="noStrike">
-              <a:solidFill>
-                <a:srgbClr val="FFFFFF"/>
-              </a:solidFill>
-              <a:effectLst/>
-              <a:uFillTx/>
-              <a:latin typeface="Times New Roman"/>
-            </a:endParaRPr>
-          </a:p>
-        </p:txBody>
-      </p:sp>
-      <p:sp>
-        <p:nvSpPr>
-          <p:cNvPr id="171" name=""/>
-          <p:cNvSpPr/>
-          <p:nvPr/>
-        </p:nvSpPr>
-        <p:spPr>
-          <a:xfrm>
-            <a:off x="3321720" y="3092400"/>
-            <a:ext cx="46800" cy="46800"/>
-          </a:xfrm>
-          <a:custGeom>
-            <a:avLst/>
-            <a:gdLst/>
-            <a:ahLst/>
-            <a:rect l="0" t="0" r="r" b="b"/>
-            <a:pathLst>
-              <a:path fill="none" w="130" h="130">
-                <a:moveTo>
-                  <a:pt x="130" y="65"/>
-                </a:moveTo>
-                <a:cubicBezTo>
-                  <a:pt x="130" y="151"/>
-                  <a:pt x="0" y="151"/>
-                  <a:pt x="0" y="65"/>
-                </a:cubicBezTo>
-                <a:cubicBezTo>
-                  <a:pt x="0" y="-22"/>
-                  <a:pt x="130" y="-22"/>
-                  <a:pt x="130" y="65"/>
-                </a:cubicBezTo>
-              </a:path>
-            </a:pathLst>
-          </a:custGeom>
-          <a:ln cap="rnd" w="5400">
-            <a:solidFill>
-              <a:srgbClr val="D1552C"/>
-            </a:solidFill>
-            <a:round/>
-          </a:ln>
-        </p:spPr>
-        <p:txBody>
-          <a:bodyPr lIns="2520" tIns="2520" rIns="2520" bIns="2520" anchor="t">
-            <a:noAutofit/>
-          </a:bodyPr>
-          <a:p>
-            <a:endParaRPr lang="en-US" sz="2400" b="0" u="none" strike="noStrike">
-              <a:solidFill>
-                <a:srgbClr val="000000"/>
-              </a:solidFill>
-              <a:effectLst/>
-              <a:uFillTx/>
-              <a:latin typeface="Times New Roman"/>
-            </a:endParaRPr>
-          </a:p>
-        </p:txBody>
-      </p:sp>
-      <p:sp>
-        <p:nvSpPr>
-          <p:cNvPr id="172" name=""/>
-          <p:cNvSpPr/>
-          <p:nvPr/>
-        </p:nvSpPr>
-        <p:spPr>
-          <a:xfrm>
-            <a:off x="3362040" y="2712240"/>
-            <a:ext cx="46800" cy="46800"/>
-          </a:xfrm>
-          <a:custGeom>
-            <a:avLst/>
-            <a:gdLst/>
-            <a:ahLst/>
-            <a:rect l="0" t="0" r="r" b="b"/>
-            <a:pathLst>
-              <a:path w="130" h="130">
-                <a:moveTo>
-                  <a:pt x="0" y="65"/>
-                </a:moveTo>
-                <a:cubicBezTo>
-                  <a:pt x="0" y="-21"/>
-                  <a:pt x="130" y="-21"/>
-                  <a:pt x="130" y="65"/>
-                </a:cubicBezTo>
-                <a:cubicBezTo>
-                  <a:pt x="130" y="152"/>
-                  <a:pt x="0" y="152"/>
-                  <a:pt x="0" y="65"/>
-                </a:cubicBezTo>
-                <a:close/>
-              </a:path>
-            </a:pathLst>
-          </a:custGeom>
-          <a:solidFill>
-            <a:srgbClr val="1F5F9E"/>
-          </a:solidFill>
-          <a:ln w="0">
-            <a:noFill/>
-          </a:ln>
-        </p:spPr>
-        <p:txBody>
-          <a:bodyPr lIns="0" tIns="0" rIns="0" bIns="0" anchor="t">
-            <a:noAutofit/>
-          </a:bodyPr>
-          <a:p>
-            <a:endParaRPr lang="en-US" sz="2400" b="0" u="none" strike="noStrike">
-              <a:solidFill>
-                <a:srgbClr val="FFFFFF"/>
-              </a:solidFill>
-              <a:effectLst/>
-              <a:uFillTx/>
-              <a:latin typeface="Times New Roman"/>
-            </a:endParaRPr>
-          </a:p>
-        </p:txBody>
-      </p:sp>
-      <p:sp>
-        <p:nvSpPr>
-          <p:cNvPr id="173" name=""/>
-          <p:cNvSpPr/>
-          <p:nvPr/>
-        </p:nvSpPr>
-        <p:spPr>
-          <a:xfrm>
-            <a:off x="3362040" y="2712240"/>
-            <a:ext cx="46800" cy="46800"/>
-          </a:xfrm>
-          <a:custGeom>
-            <a:avLst/>
-            <a:gdLst/>
-            <a:ahLst/>
-            <a:rect l="0" t="0" r="r" b="b"/>
-            <a:pathLst>
-              <a:path fill="none" w="130" h="130">
-                <a:moveTo>
-                  <a:pt x="130" y="65"/>
-                </a:moveTo>
-                <a:cubicBezTo>
-                  <a:pt x="130" y="152"/>
-                  <a:pt x="0" y="152"/>
-                  <a:pt x="0" y="65"/>
-                </a:cubicBezTo>
-                <a:cubicBezTo>
-                  <a:pt x="0" y="-21"/>
-                  <a:pt x="130" y="-21"/>
-                  <a:pt x="130" y="65"/>
-                </a:cubicBezTo>
-              </a:path>
-            </a:pathLst>
-          </a:custGeom>
-          <a:ln cap="rnd" w="5400">
-            <a:solidFill>
-              <a:srgbClr val="1F5F9E"/>
-            </a:solidFill>
-            <a:round/>
-          </a:ln>
-        </p:spPr>
-        <p:txBody>
-          <a:bodyPr lIns="2520" tIns="2520" rIns="2520" bIns="2520" anchor="t">
-            <a:noAutofit/>
-          </a:bodyPr>
-          <a:p>
-            <a:endParaRPr lang="en-US" sz="2400" b="0" u="none" strike="noStrike">
-              <a:solidFill>
-                <a:srgbClr val="000000"/>
-              </a:solidFill>
-              <a:effectLst/>
-              <a:uFillTx/>
-              <a:latin typeface="Times New Roman"/>
-            </a:endParaRPr>
-          </a:p>
-        </p:txBody>
-      </p:sp>
-      <p:sp>
-        <p:nvSpPr>
-          <p:cNvPr id="174" name=""/>
-          <p:cNvSpPr/>
-          <p:nvPr/>
-        </p:nvSpPr>
-        <p:spPr>
-          <a:xfrm>
-            <a:off x="3129120" y="3852720"/>
-            <a:ext cx="46800" cy="47160"/>
-          </a:xfrm>
-          <a:custGeom>
-            <a:avLst/>
-            <a:gdLst/>
-            <a:ahLst/>
-            <a:rect l="0" t="0" r="r" b="b"/>
-            <a:pathLst>
-              <a:path w="130" h="131">
-                <a:moveTo>
-                  <a:pt x="0" y="65"/>
-                </a:moveTo>
-                <a:cubicBezTo>
-                  <a:pt x="0" y="-22"/>
-                  <a:pt x="130" y="-22"/>
-                  <a:pt x="130" y="65"/>
-                </a:cubicBezTo>
-                <a:cubicBezTo>
-                  <a:pt x="130" y="152"/>
-                  <a:pt x="0" y="152"/>
-                  <a:pt x="0" y="65"/>
-                </a:cubicBezTo>
-                <a:close/>
-              </a:path>
-            </a:pathLst>
-          </a:custGeom>
-          <a:solidFill>
-            <a:srgbClr val="3B3B3B"/>
-          </a:solidFill>
-          <a:ln w="0">
-            <a:noFill/>
-          </a:ln>
-        </p:spPr>
-        <p:txBody>
-          <a:bodyPr lIns="0" tIns="0" rIns="0" bIns="0" anchor="t">
-            <a:noAutofit/>
-          </a:bodyPr>
-          <a:p>
-            <a:endParaRPr lang="en-US" sz="2400" b="0" u="none" strike="noStrike">
-              <a:solidFill>
-                <a:srgbClr val="FFFFFF"/>
-              </a:solidFill>
-              <a:effectLst/>
-              <a:uFillTx/>
-              <a:latin typeface="Times New Roman"/>
-            </a:endParaRPr>
-          </a:p>
-        </p:txBody>
-      </p:sp>
-      <p:sp>
-        <p:nvSpPr>
-          <p:cNvPr id="175" name=""/>
-          <p:cNvSpPr/>
-          <p:nvPr/>
-        </p:nvSpPr>
-        <p:spPr>
-          <a:xfrm>
-            <a:off x="3129120" y="3852720"/>
-            <a:ext cx="46800" cy="47160"/>
-          </a:xfrm>
-          <a:custGeom>
-            <a:avLst/>
-            <a:gdLst/>
-            <a:ahLst/>
-            <a:rect l="0" t="0" r="r" b="b"/>
-            <a:pathLst>
-              <a:path fill="none" w="130" h="131">
-                <a:moveTo>
-                  <a:pt x="130" y="65"/>
-                </a:moveTo>
-                <a:cubicBezTo>
-                  <a:pt x="130" y="152"/>
-                  <a:pt x="0" y="152"/>
-                  <a:pt x="0" y="65"/>
-                </a:cubicBezTo>
-                <a:cubicBezTo>
-                  <a:pt x="0" y="-22"/>
-                  <a:pt x="130" y="-22"/>
-                  <a:pt x="130" y="65"/>
-                </a:cubicBezTo>
-              </a:path>
-            </a:pathLst>
-          </a:custGeom>
-          <a:ln cap="rnd" w="5400">
-            <a:solidFill>
-              <a:srgbClr val="3B3B3B"/>
-            </a:solidFill>
-            <a:round/>
-          </a:ln>
-        </p:spPr>
-        <p:txBody>
-          <a:bodyPr lIns="2520" tIns="2520" rIns="2520" bIns="2520" anchor="t">
-            <a:noAutofit/>
-          </a:bodyPr>
-          <a:p>
-            <a:endParaRPr lang="en-US" sz="2400" b="0" u="none" strike="noStrike">
-              <a:solidFill>
-                <a:srgbClr val="000000"/>
-              </a:solidFill>
-              <a:effectLst/>
-              <a:uFillTx/>
-              <a:latin typeface="Times New Roman"/>
-            </a:endParaRPr>
-          </a:p>
-        </p:txBody>
-      </p:sp>
-      <p:sp>
-        <p:nvSpPr>
-          <p:cNvPr id="176" name=""/>
-          <p:cNvSpPr/>
-          <p:nvPr/>
-        </p:nvSpPr>
-        <p:spPr>
-          <a:xfrm>
-            <a:off x="2918880" y="3472560"/>
-            <a:ext cx="46800" cy="47160"/>
-          </a:xfrm>
-          <a:custGeom>
-            <a:avLst/>
-            <a:gdLst/>
-            <a:ahLst/>
-            <a:rect l="0" t="0" r="r" b="b"/>
-            <a:pathLst>
-              <a:path w="130" h="131">
-                <a:moveTo>
-                  <a:pt x="0" y="65"/>
-                </a:moveTo>
-                <a:cubicBezTo>
-                  <a:pt x="0" y="-22"/>
-                  <a:pt x="130" y="-22"/>
-                  <a:pt x="130" y="65"/>
-                </a:cubicBezTo>
-                <a:cubicBezTo>
-                  <a:pt x="130" y="152"/>
-                  <a:pt x="0" y="152"/>
-                  <a:pt x="0" y="65"/>
-                </a:cubicBezTo>
-                <a:close/>
-              </a:path>
-            </a:pathLst>
-          </a:custGeom>
-          <a:solidFill>
-            <a:srgbClr val="9A9A9A"/>
-          </a:solidFill>
-          <a:ln w="0">
-            <a:noFill/>
-          </a:ln>
-        </p:spPr>
-        <p:txBody>
-          <a:bodyPr lIns="0" tIns="0" rIns="0" bIns="0" anchor="t">
-            <a:noAutofit/>
-          </a:bodyPr>
-          <a:p>
-            <a:endParaRPr lang="en-US" sz="2400" b="0" u="none" strike="noStrike">
-              <a:solidFill>
-                <a:srgbClr val="FFFFFF"/>
-              </a:solidFill>
-              <a:effectLst/>
-              <a:uFillTx/>
-              <a:latin typeface="Times New Roman"/>
-            </a:endParaRPr>
-          </a:p>
-        </p:txBody>
-      </p:sp>
-      <p:sp>
-        <p:nvSpPr>
-          <p:cNvPr id="177" name=""/>
-          <p:cNvSpPr/>
-          <p:nvPr/>
-        </p:nvSpPr>
-        <p:spPr>
-          <a:xfrm>
-            <a:off x="2918880" y="3472560"/>
-            <a:ext cx="46800" cy="47160"/>
-          </a:xfrm>
-          <a:custGeom>
-            <a:avLst/>
-            <a:gdLst/>
-            <a:ahLst/>
-            <a:rect l="0" t="0" r="r" b="b"/>
-            <a:pathLst>
-              <a:path fill="none" w="130" h="131">
-                <a:moveTo>
-                  <a:pt x="130" y="65"/>
-                </a:moveTo>
-                <a:cubicBezTo>
-                  <a:pt x="130" y="152"/>
-                  <a:pt x="0" y="152"/>
-                  <a:pt x="0" y="65"/>
-                </a:cubicBezTo>
-                <a:cubicBezTo>
-                  <a:pt x="0" y="-22"/>
-                  <a:pt x="130" y="-22"/>
-                  <a:pt x="130" y="65"/>
-                </a:cubicBezTo>
-              </a:path>
-            </a:pathLst>
-          </a:custGeom>
-          <a:ln cap="rnd" w="5400">
-            <a:solidFill>
-              <a:srgbClr val="9A9A9A"/>
-            </a:solidFill>
-            <a:round/>
-          </a:ln>
-        </p:spPr>
-        <p:txBody>
-          <a:bodyPr lIns="2520" tIns="2520" rIns="2520" bIns="2520" anchor="t">
-            <a:noAutofit/>
-          </a:bodyPr>
-          <a:p>
-            <a:endParaRPr lang="en-US" sz="2400" b="0" u="none" strike="noStrike">
-              <a:solidFill>
-                <a:srgbClr val="000000"/>
-              </a:solidFill>
-              <a:effectLst/>
-              <a:uFillTx/>
-              <a:latin typeface="Times New Roman"/>
-            </a:endParaRPr>
-          </a:p>
-        </p:txBody>
-      </p:sp>
-      <p:sp>
-        <p:nvSpPr>
           <p:cNvPr id="178" name=""/>
           <p:cNvSpPr txBox="1"/>
           <p:nvPr/>
@@ -10911,7 +10902,7 @@
         </p:nvSpPr>
         <p:spPr>
           <a:xfrm flipV="1">
-            <a:off x="896040" y="4065840"/>
+            <a:off x="892800" y="4065840"/>
             <a:ext cx="0" cy="25560"/>
           </a:xfrm>
           <a:prstGeom prst="line">
@@ -10954,7 +10945,7 @@
         </p:nvSpPr>
         <p:spPr>
           <a:xfrm flipV="1">
-            <a:off x="1324800" y="4065840"/>
+            <a:off x="1273680" y="4065840"/>
             <a:ext cx="0" cy="25560"/>
           </a:xfrm>
           <a:prstGeom prst="line">
@@ -11045,7 +11036,7 @@
         </p:nvSpPr>
         <p:spPr>
           <a:xfrm>
-            <a:off x="877320" y="4096440"/>
+            <a:off x="874080" y="4096440"/>
             <a:ext cx="75960" cy="86040"/>
           </a:xfrm>
           <a:prstGeom prst="rect">
@@ -11179,7 +11170,7 @@
         </p:nvSpPr>
         <p:spPr>
           <a:xfrm flipV="1">
-            <a:off x="1982880" y="4065840"/>
+            <a:off x="1981440" y="4065840"/>
             <a:ext cx="0" cy="25560"/>
           </a:xfrm>
           <a:prstGeom prst="line">
@@ -11222,7 +11213,7 @@
         </p:nvSpPr>
         <p:spPr>
           <a:xfrm>
-            <a:off x="1287000" y="4096440"/>
+            <a:off x="1235880" y="4096440"/>
             <a:ext cx="85320" cy="86040"/>
           </a:xfrm>
           <a:prstGeom prst="rect">
@@ -11361,7 +11352,7 @@
         </p:nvSpPr>
         <p:spPr>
           <a:xfrm flipV="1">
-            <a:off x="2275560" y="4065840"/>
+            <a:off x="2257200" y="4065840"/>
             <a:ext cx="0" cy="25560"/>
           </a:xfrm>
           <a:prstGeom prst="line">
@@ -11404,7 +11395,7 @@
         </p:nvSpPr>
         <p:spPr>
           <a:xfrm flipV="1">
-            <a:off x="2701080" y="4065840"/>
+            <a:off x="2640240" y="4065840"/>
             <a:ext cx="0" cy="25560"/>
           </a:xfrm>
           <a:prstGeom prst="line">
@@ -11447,7 +11438,7 @@
         </p:nvSpPr>
         <p:spPr>
           <a:xfrm>
-            <a:off x="1913400" y="4096440"/>
+            <a:off x="1911960" y="4096440"/>
             <a:ext cx="149040" cy="86040"/>
           </a:xfrm>
           <a:prstGeom prst="rect">
@@ -11495,7 +11486,7 @@
         </p:nvSpPr>
         <p:spPr>
           <a:xfrm>
-            <a:off x="2256840" y="4096440"/>
+            <a:off x="2238120" y="4096440"/>
             <a:ext cx="75960" cy="86040"/>
           </a:xfrm>
           <a:prstGeom prst="rect">
@@ -11629,7 +11620,7 @@
         </p:nvSpPr>
         <p:spPr>
           <a:xfrm flipV="1">
-            <a:off x="3333240" y="4065840"/>
+            <a:off x="3439080" y="4065840"/>
             <a:ext cx="0" cy="25560"/>
           </a:xfrm>
           <a:prstGeom prst="line">
@@ -11672,7 +11663,7 @@
         </p:nvSpPr>
         <p:spPr>
           <a:xfrm>
-            <a:off x="2631240" y="4096440"/>
+            <a:off x="2570400" y="4096440"/>
             <a:ext cx="149040" cy="86040"/>
           </a:xfrm>
           <a:prstGeom prst="rect">
@@ -11768,7 +11759,7 @@
         </p:nvSpPr>
         <p:spPr>
           <a:xfrm>
-            <a:off x="3282840" y="4096440"/>
+            <a:off x="3388680" y="4096440"/>
             <a:ext cx="106560" cy="86040"/>
           </a:xfrm>
           <a:prstGeom prst="rect">
@@ -11795,7 +11786,7 @@
                 <a:latin typeface="Arial"/>
                 <a:ea typeface="Arial"/>
               </a:rPr>
-              <a:t>0.3</a:t>
+              <a:t>0.4</a:t>
             </a:r>
             <a:endParaRPr lang="en-US" sz="600" b="0" u="none" strike="noStrike">
               <a:solidFill>
@@ -12126,8 +12117,8 @@
         </p:nvSpPr>
         <p:spPr>
           <a:xfrm>
-            <a:off x="4066560" y="2891520"/>
-            <a:ext cx="2203200" cy="1017000"/>
+            <a:off x="4066560" y="2891160"/>
+            <a:ext cx="2203200" cy="1021680"/>
           </a:xfrm>
           <a:custGeom>
             <a:avLst/>
@@ -12135,21 +12126,21 @@
             <a:ahLst/>
             <a:rect l="0" t="0" r="r" b="b"/>
             <a:pathLst>
-              <a:path fill="none" w="6120" h="2825">
+              <a:path fill="none" w="6120" h="2838">
                 <a:moveTo>
-                  <a:pt x="0" y="2825"/>
+                  <a:pt x="0" y="2838"/>
                 </a:moveTo>
                 <a:lnTo>
-                  <a:pt x="1224" y="744"/>
-                </a:lnTo>
-                <a:lnTo>
-                  <a:pt x="2448" y="444"/>
-                </a:lnTo>
-                <a:lnTo>
-                  <a:pt x="3672" y="29"/>
-                </a:lnTo>
-                <a:lnTo>
-                  <a:pt x="4897" y="32"/>
+                  <a:pt x="1224" y="747"/>
+                </a:lnTo>
+                <a:lnTo>
+                  <a:pt x="2448" y="453"/>
+                </a:lnTo>
+                <a:lnTo>
+                  <a:pt x="3672" y="27"/>
+                </a:lnTo>
+                <a:lnTo>
+                  <a:pt x="4897" y="30"/>
                 </a:lnTo>
                 <a:lnTo>
                   <a:pt x="6120" y="0"/>
@@ -12188,7 +12179,7 @@
         </p:nvSpPr>
         <p:spPr>
           <a:xfrm>
-            <a:off x="4044600" y="3886200"/>
+            <a:off x="4044600" y="3890520"/>
             <a:ext cx="44280" cy="43920"/>
           </a:xfrm>
           <a:custGeom>
@@ -12246,7 +12237,7 @@
         </p:nvSpPr>
         <p:spPr>
           <a:xfrm>
-            <a:off x="4044600" y="3886200"/>
+            <a:off x="4044600" y="3890520"/>
             <a:ext cx="44280" cy="43920"/>
           </a:xfrm>
           <a:custGeom>
@@ -12303,7 +12294,7 @@
         </p:nvSpPr>
         <p:spPr>
           <a:xfrm>
-            <a:off x="4485240" y="3137400"/>
+            <a:off x="4485240" y="3138120"/>
             <a:ext cx="44280" cy="43920"/>
           </a:xfrm>
           <a:custGeom>
@@ -12322,8 +12313,8 @@
                   <a:pt x="123" y="62"/>
                 </a:cubicBezTo>
                 <a:cubicBezTo>
-                  <a:pt x="123" y="143"/>
-                  <a:pt x="0" y="143"/>
+                  <a:pt x="123" y="142"/>
+                  <a:pt x="0" y="142"/>
                   <a:pt x="0" y="62"/>
                 </a:cubicBezTo>
                 <a:close/>
@@ -12361,7 +12352,7 @@
         </p:nvSpPr>
         <p:spPr>
           <a:xfrm>
-            <a:off x="4485240" y="3137400"/>
+            <a:off x="4485240" y="3138120"/>
             <a:ext cx="44280" cy="43920"/>
           </a:xfrm>
           <a:custGeom>
@@ -12375,8 +12366,8 @@
                   <a:pt x="123" y="62"/>
                 </a:moveTo>
                 <a:cubicBezTo>
-                  <a:pt x="123" y="143"/>
-                  <a:pt x="0" y="143"/>
+                  <a:pt x="123" y="142"/>
+                  <a:pt x="0" y="142"/>
                   <a:pt x="0" y="62"/>
                 </a:cubicBezTo>
                 <a:cubicBezTo>
@@ -12418,8 +12409,8 @@
         </p:nvSpPr>
         <p:spPr>
           <a:xfrm>
-            <a:off x="4925880" y="3029400"/>
-            <a:ext cx="43920" cy="43920"/>
+            <a:off x="4925880" y="3032640"/>
+            <a:ext cx="43920" cy="44280"/>
           </a:xfrm>
           <a:custGeom>
             <a:avLst/>
@@ -12427,7 +12418,7 @@
             <a:ahLst/>
             <a:rect l="0" t="0" r="r" b="b"/>
             <a:pathLst>
-              <a:path w="122" h="122">
+              <a:path w="122" h="123">
                 <a:moveTo>
                   <a:pt x="0" y="62"/>
                 </a:moveTo>
@@ -12437,8 +12428,8 @@
                   <a:pt x="122" y="62"/>
                 </a:cubicBezTo>
                 <a:cubicBezTo>
-                  <a:pt x="122" y="143"/>
-                  <a:pt x="0" y="143"/>
+                  <a:pt x="122" y="144"/>
+                  <a:pt x="0" y="144"/>
                   <a:pt x="0" y="62"/>
                 </a:cubicBezTo>
                 <a:close/>
@@ -12476,8 +12467,8 @@
         </p:nvSpPr>
         <p:spPr>
           <a:xfrm>
-            <a:off x="4925880" y="3029400"/>
-            <a:ext cx="43920" cy="43920"/>
+            <a:off x="4925880" y="3032640"/>
+            <a:ext cx="43920" cy="44280"/>
           </a:xfrm>
           <a:custGeom>
             <a:avLst/>
@@ -12485,13 +12476,13 @@
             <a:ahLst/>
             <a:rect l="0" t="0" r="r" b="b"/>
             <a:pathLst>
-              <a:path fill="none" w="122" h="122">
+              <a:path fill="none" w="122" h="123">
                 <a:moveTo>
                   <a:pt x="122" y="62"/>
                 </a:moveTo>
                 <a:cubicBezTo>
-                  <a:pt x="122" y="143"/>
-                  <a:pt x="0" y="143"/>
+                  <a:pt x="122" y="144"/>
+                  <a:pt x="0" y="144"/>
                   <a:pt x="0" y="62"/>
                 </a:cubicBezTo>
                 <a:cubicBezTo>
@@ -12533,7 +12524,7 @@
         </p:nvSpPr>
         <p:spPr>
           <a:xfrm>
-            <a:off x="5366520" y="2880000"/>
+            <a:off x="5366520" y="2879280"/>
             <a:ext cx="43920" cy="43920"/>
           </a:xfrm>
           <a:custGeom>
@@ -12544,17 +12535,17 @@
             <a:pathLst>
               <a:path w="122" h="122">
                 <a:moveTo>
-                  <a:pt x="0" y="62"/>
+                  <a:pt x="0" y="61"/>
                 </a:moveTo>
                 <a:cubicBezTo>
                   <a:pt x="0" y="-20"/>
                   <a:pt x="122" y="-20"/>
-                  <a:pt x="122" y="62"/>
+                  <a:pt x="122" y="61"/>
                 </a:cubicBezTo>
                 <a:cubicBezTo>
-                  <a:pt x="122" y="143"/>
-                  <a:pt x="0" y="143"/>
-                  <a:pt x="0" y="62"/>
+                  <a:pt x="122" y="142"/>
+                  <a:pt x="0" y="142"/>
+                  <a:pt x="0" y="61"/>
                 </a:cubicBezTo>
                 <a:close/>
               </a:path>
@@ -12591,7 +12582,7 @@
         </p:nvSpPr>
         <p:spPr>
           <a:xfrm>
-            <a:off x="5366520" y="2880000"/>
+            <a:off x="5366520" y="2879280"/>
             <a:ext cx="43920" cy="43920"/>
           </a:xfrm>
           <a:custGeom>
@@ -12602,17 +12593,17 @@
             <a:pathLst>
               <a:path fill="none" w="122" h="122">
                 <a:moveTo>
-                  <a:pt x="122" y="62"/>
+                  <a:pt x="122" y="61"/>
                 </a:moveTo>
                 <a:cubicBezTo>
-                  <a:pt x="122" y="143"/>
-                  <a:pt x="0" y="143"/>
-                  <a:pt x="0" y="62"/>
+                  <a:pt x="122" y="142"/>
+                  <a:pt x="0" y="142"/>
+                  <a:pt x="0" y="61"/>
                 </a:cubicBezTo>
                 <a:cubicBezTo>
                   <a:pt x="0" y="-20"/>
                   <a:pt x="122" y="-20"/>
-                  <a:pt x="122" y="62"/>
+                  <a:pt x="122" y="61"/>
                 </a:cubicBezTo>
               </a:path>
             </a:pathLst>
@@ -12648,7 +12639,7 @@
         </p:nvSpPr>
         <p:spPr>
           <a:xfrm>
-            <a:off x="5807160" y="2881080"/>
+            <a:off x="5807160" y="2880360"/>
             <a:ext cx="43920" cy="43920"/>
           </a:xfrm>
           <a:custGeom>
@@ -12659,17 +12650,17 @@
             <a:pathLst>
               <a:path w="122" h="122">
                 <a:moveTo>
-                  <a:pt x="0" y="62"/>
+                  <a:pt x="0" y="61"/>
                 </a:moveTo>
                 <a:cubicBezTo>
                   <a:pt x="0" y="-20"/>
                   <a:pt x="122" y="-20"/>
-                  <a:pt x="122" y="62"/>
+                  <a:pt x="122" y="61"/>
                 </a:cubicBezTo>
                 <a:cubicBezTo>
-                  <a:pt x="122" y="143"/>
-                  <a:pt x="0" y="143"/>
-                  <a:pt x="0" y="62"/>
+                  <a:pt x="122" y="142"/>
+                  <a:pt x="0" y="142"/>
+                  <a:pt x="0" y="61"/>
                 </a:cubicBezTo>
                 <a:close/>
               </a:path>
@@ -12706,7 +12697,7 @@
         </p:nvSpPr>
         <p:spPr>
           <a:xfrm>
-            <a:off x="5807160" y="2881080"/>
+            <a:off x="5807160" y="2880360"/>
             <a:ext cx="43920" cy="43920"/>
           </a:xfrm>
           <a:custGeom>
@@ -12717,17 +12708,17 @@
             <a:pathLst>
               <a:path fill="none" w="122" h="122">
                 <a:moveTo>
-                  <a:pt x="122" y="62"/>
+                  <a:pt x="122" y="61"/>
                 </a:moveTo>
                 <a:cubicBezTo>
-                  <a:pt x="122" y="143"/>
-                  <a:pt x="0" y="143"/>
-                  <a:pt x="0" y="62"/>
+                  <a:pt x="122" y="142"/>
+                  <a:pt x="0" y="142"/>
+                  <a:pt x="0" y="61"/>
                 </a:cubicBezTo>
                 <a:cubicBezTo>
                   <a:pt x="0" y="-20"/>
                   <a:pt x="122" y="-20"/>
-                  <a:pt x="122" y="62"/>
+                  <a:pt x="122" y="61"/>
                 </a:cubicBezTo>
               </a:path>
             </a:pathLst>
@@ -12763,7 +12754,7 @@
         </p:nvSpPr>
         <p:spPr>
           <a:xfrm>
-            <a:off x="6239520" y="2861640"/>
+            <a:off x="6239520" y="2861280"/>
             <a:ext cx="60480" cy="60120"/>
           </a:xfrm>
           <a:custGeom>
@@ -12821,7 +12812,7 @@
         </p:nvSpPr>
         <p:spPr>
           <a:xfrm>
-            <a:off x="6239520" y="2861640"/>
+            <a:off x="6239520" y="2861280"/>
             <a:ext cx="60480" cy="60120"/>
           </a:xfrm>
           <a:custGeom>
@@ -12926,7 +12917,7 @@
         </p:nvSpPr>
         <p:spPr>
           <a:xfrm>
-            <a:off x="3978000" y="3768480"/>
+            <a:off x="3978000" y="3772800"/>
             <a:ext cx="191520" cy="86040"/>
           </a:xfrm>
           <a:prstGeom prst="rect">
@@ -12953,7 +12944,7 @@
                 <a:latin typeface="Arial"/>
                 <a:ea typeface="Arial"/>
               </a:rPr>
-              <a:t>0.411</a:t>
+              <a:t>0.410</a:t>
             </a:r>
             <a:endParaRPr lang="en-US" sz="600" b="0" u="none" strike="noStrike">
               <a:solidFill>
@@ -12974,7 +12965,7 @@
         </p:nvSpPr>
         <p:spPr>
           <a:xfrm>
-            <a:off x="4418280" y="3019680"/>
+            <a:off x="4418280" y="3020400"/>
             <a:ext cx="191520" cy="86040"/>
           </a:xfrm>
           <a:prstGeom prst="rect">
@@ -13022,7 +13013,7 @@
         </p:nvSpPr>
         <p:spPr>
           <a:xfrm>
-            <a:off x="4858920" y="2911680"/>
+            <a:off x="4858920" y="2914920"/>
             <a:ext cx="191520" cy="86040"/>
           </a:xfrm>
           <a:prstGeom prst="rect">
@@ -13070,7 +13061,7 @@
         </p:nvSpPr>
         <p:spPr>
           <a:xfrm>
-            <a:off x="5299560" y="2762280"/>
+            <a:off x="5299560" y="2761560"/>
             <a:ext cx="191520" cy="86040"/>
           </a:xfrm>
           <a:prstGeom prst="rect">
@@ -13118,7 +13109,7 @@
         </p:nvSpPr>
         <p:spPr>
           <a:xfrm>
-            <a:off x="5740200" y="2763360"/>
+            <a:off x="5740200" y="2762640"/>
             <a:ext cx="191520" cy="86040"/>
           </a:xfrm>
           <a:prstGeom prst="rect">
@@ -13145,7 +13136,7 @@
                 <a:latin typeface="Arial"/>
                 <a:ea typeface="Arial"/>
               </a:rPr>
-              <a:t>0.609</a:t>
+              <a:t>0.610</a:t>
             </a:r>
             <a:endParaRPr lang="en-US" sz="600" b="0" u="none" strike="noStrike">
               <a:solidFill>
@@ -13209,7 +13200,7 @@
         </p:nvSpPr>
         <p:spPr>
           <a:xfrm>
-            <a:off x="6180840" y="2752200"/>
+            <a:off x="6180840" y="2751480"/>
             <a:ext cx="191520" cy="86040"/>
           </a:xfrm>
           <a:prstGeom prst="rect">
